--- a/問題集/問36-40.pptx
+++ b/問題集/問36-40.pptx
@@ -4,6 +4,9 @@
   <p:sldMasterIdLst>
     <p:sldMasterId id="2147483648" r:id="rId1"/>
   </p:sldMasterIdLst>
+  <p:notesMasterIdLst>
+    <p:notesMasterId r:id="rId8"/>
+  </p:notesMasterIdLst>
   <p:sldIdLst>
     <p:sldId id="256" r:id="rId2"/>
     <p:sldId id="261" r:id="rId3"/>
@@ -117,17 +120,40 @@
 </p:presentation>
 </file>
 
+<file path=ppt/revisionInfo.xml><?xml version="1.0" encoding="utf-8"?>
+<p1510:revInfo xmlns:a="http://schemas.openxmlformats.org/drawingml/2006/main" xmlns:r="http://schemas.openxmlformats.org/officeDocument/2006/relationships" xmlns:p1510="http://schemas.microsoft.com/office/powerpoint/2015/10/main">
+  <p1510:revLst>
+    <p1510:client id="{F30BD00A-4533-4B58-A40F-4DF1E72EFFFF}" v="2" dt="2026-10-14T12:35:50.120"/>
+  </p1510:revLst>
+</p1510:revInfo>
+</file>
+
 <file path=ppt/changesInfos/changesInfo1.xml><?xml version="1.0" encoding="utf-8"?>
 <pc:chgInfo xmlns:a="http://schemas.openxmlformats.org/drawingml/2006/main" xmlns:r="http://schemas.openxmlformats.org/officeDocument/2006/relationships" xmlns:ac="http://schemas.microsoft.com/office/drawing/2013/main/command" xmlns:pc="http://schemas.microsoft.com/office/powerpoint/2013/main/command">
   <pc:docChgLst>
     <pc:chgData name="越智 統" userId="2de33d77-a65a-42d1-92e2-b40da65bb07e" providerId="ADAL" clId="{F30BD00A-4533-4B58-A40F-4DF1E72EFFFF}"/>
-    <pc:docChg chg="undo custSel modSld">
-      <pc:chgData name="越智 統" userId="2de33d77-a65a-42d1-92e2-b40da65bb07e" providerId="ADAL" clId="{F30BD00A-4533-4B58-A40F-4DF1E72EFFFF}" dt="2026-10-08T02:49:41.489" v="748" actId="20577"/>
+    <pc:docChg chg="undo custSel modSld modShowInfo">
+      <pc:chgData name="越智 統" userId="2de33d77-a65a-42d1-92e2-b40da65bb07e" providerId="ADAL" clId="{F30BD00A-4533-4B58-A40F-4DF1E72EFFFF}" dt="2026-10-15T03:19:33.529" v="3201" actId="20577"/>
       <pc:docMkLst>
         <pc:docMk/>
       </pc:docMkLst>
+      <pc:sldChg chg="delSp mod">
+        <pc:chgData name="越智 統" userId="2de33d77-a65a-42d1-92e2-b40da65bb07e" providerId="ADAL" clId="{F30BD00A-4533-4B58-A40F-4DF1E72EFFFF}" dt="2026-10-15T02:50:49.667" v="3178" actId="478"/>
+        <pc:sldMkLst>
+          <pc:docMk/>
+          <pc:sldMk cId="87558667" sldId="256"/>
+        </pc:sldMkLst>
+        <pc:spChg chg="del">
+          <ac:chgData name="越智 統" userId="2de33d77-a65a-42d1-92e2-b40da65bb07e" providerId="ADAL" clId="{F30BD00A-4533-4B58-A40F-4DF1E72EFFFF}" dt="2026-10-15T02:50:49.667" v="3178" actId="478"/>
+          <ac:spMkLst>
+            <pc:docMk/>
+            <pc:sldMk cId="87558667" sldId="256"/>
+            <ac:spMk id="3" creationId="{14F923B0-1A1F-E9B4-81C8-C650E768663C}"/>
+          </ac:spMkLst>
+        </pc:spChg>
+      </pc:sldChg>
       <pc:sldChg chg="modSp mod">
-        <pc:chgData name="越智 統" userId="2de33d77-a65a-42d1-92e2-b40da65bb07e" providerId="ADAL" clId="{F30BD00A-4533-4B58-A40F-4DF1E72EFFFF}" dt="2026-10-08T02:39:14.730" v="497" actId="20577"/>
+        <pc:chgData name="越智 統" userId="2de33d77-a65a-42d1-92e2-b40da65bb07e" providerId="ADAL" clId="{F30BD00A-4533-4B58-A40F-4DF1E72EFFFF}" dt="2026-10-14T15:04:37.660" v="3177" actId="20577"/>
         <pc:sldMkLst>
           <pc:docMk/>
           <pc:sldMk cId="4204333872" sldId="261"/>
@@ -141,7 +167,7 @@
           </ac:spMkLst>
         </pc:spChg>
         <pc:spChg chg="mod">
-          <ac:chgData name="越智 統" userId="2de33d77-a65a-42d1-92e2-b40da65bb07e" providerId="ADAL" clId="{F30BD00A-4533-4B58-A40F-4DF1E72EFFFF}" dt="2026-10-08T02:39:14.730" v="497" actId="20577"/>
+          <ac:chgData name="越智 統" userId="2de33d77-a65a-42d1-92e2-b40da65bb07e" providerId="ADAL" clId="{F30BD00A-4533-4B58-A40F-4DF1E72EFFFF}" dt="2026-10-14T15:04:37.660" v="3177" actId="20577"/>
           <ac:spMkLst>
             <pc:docMk/>
             <pc:sldMk cId="4204333872" sldId="261"/>
@@ -150,13 +176,13 @@
         </pc:spChg>
       </pc:sldChg>
       <pc:sldChg chg="modSp mod">
-        <pc:chgData name="越智 統" userId="2de33d77-a65a-42d1-92e2-b40da65bb07e" providerId="ADAL" clId="{F30BD00A-4533-4B58-A40F-4DF1E72EFFFF}" dt="2026-10-08T02:48:31.504" v="735" actId="20577"/>
+        <pc:chgData name="越智 統" userId="2de33d77-a65a-42d1-92e2-b40da65bb07e" providerId="ADAL" clId="{F30BD00A-4533-4B58-A40F-4DF1E72EFFFF}" dt="2026-10-14T12:30:33.332" v="821" actId="20577"/>
         <pc:sldMkLst>
           <pc:docMk/>
           <pc:sldMk cId="3736045710" sldId="262"/>
         </pc:sldMkLst>
         <pc:spChg chg="mod">
-          <ac:chgData name="越智 統" userId="2de33d77-a65a-42d1-92e2-b40da65bb07e" providerId="ADAL" clId="{F30BD00A-4533-4B58-A40F-4DF1E72EFFFF}" dt="2026-10-08T02:48:31.504" v="735" actId="20577"/>
+          <ac:chgData name="越智 統" userId="2de33d77-a65a-42d1-92e2-b40da65bb07e" providerId="ADAL" clId="{F30BD00A-4533-4B58-A40F-4DF1E72EFFFF}" dt="2026-10-14T12:30:33.332" v="821" actId="20577"/>
           <ac:spMkLst>
             <pc:docMk/>
             <pc:sldMk cId="3736045710" sldId="262"/>
@@ -164,7 +190,7 @@
           </ac:spMkLst>
         </pc:spChg>
         <pc:spChg chg="mod">
-          <ac:chgData name="越智 統" userId="2de33d77-a65a-42d1-92e2-b40da65bb07e" providerId="ADAL" clId="{F30BD00A-4533-4B58-A40F-4DF1E72EFFFF}" dt="2026-10-08T02:46:28.033" v="723" actId="20577"/>
+          <ac:chgData name="越智 統" userId="2de33d77-a65a-42d1-92e2-b40da65bb07e" providerId="ADAL" clId="{F30BD00A-4533-4B58-A40F-4DF1E72EFFFF}" dt="2026-10-14T12:30:21.349" v="806" actId="20577"/>
           <ac:spMkLst>
             <pc:docMk/>
             <pc:sldMk cId="3736045710" sldId="262"/>
@@ -172,24 +198,3795 @@
           </ac:spMkLst>
         </pc:spChg>
       </pc:sldChg>
-      <pc:sldChg chg="modSp mod">
-        <pc:chgData name="越智 統" userId="2de33d77-a65a-42d1-92e2-b40da65bb07e" providerId="ADAL" clId="{F30BD00A-4533-4B58-A40F-4DF1E72EFFFF}" dt="2026-10-08T02:49:41.489" v="748" actId="20577"/>
+      <pc:sldChg chg="addSp delSp modSp mod">
+        <pc:chgData name="越智 統" userId="2de33d77-a65a-42d1-92e2-b40da65bb07e" providerId="ADAL" clId="{F30BD00A-4533-4B58-A40F-4DF1E72EFFFF}" dt="2026-10-14T14:57:12.900" v="2987" actId="20577"/>
         <pc:sldMkLst>
           <pc:docMk/>
           <pc:sldMk cId="3882074766" sldId="263"/>
         </pc:sldMkLst>
         <pc:spChg chg="mod">
-          <ac:chgData name="越智 統" userId="2de33d77-a65a-42d1-92e2-b40da65bb07e" providerId="ADAL" clId="{F30BD00A-4533-4B58-A40F-4DF1E72EFFFF}" dt="2026-10-08T02:49:41.489" v="748" actId="20577"/>
+          <ac:chgData name="越智 統" userId="2de33d77-a65a-42d1-92e2-b40da65bb07e" providerId="ADAL" clId="{F30BD00A-4533-4B58-A40F-4DF1E72EFFFF}" dt="2026-10-14T12:40:57.084" v="1082" actId="20577"/>
           <ac:spMkLst>
             <pc:docMk/>
             <pc:sldMk cId="3882074766" sldId="263"/>
             <ac:spMk id="2" creationId="{580CCA8E-082E-9CFE-8FA9-DE02C7F6E493}"/>
           </ac:spMkLst>
         </pc:spChg>
+        <pc:spChg chg="mod">
+          <ac:chgData name="越智 統" userId="2de33d77-a65a-42d1-92e2-b40da65bb07e" providerId="ADAL" clId="{F30BD00A-4533-4B58-A40F-4DF1E72EFFFF}" dt="2026-10-14T14:57:12.900" v="2987" actId="20577"/>
+          <ac:spMkLst>
+            <pc:docMk/>
+            <pc:sldMk cId="3882074766" sldId="263"/>
+            <ac:spMk id="3" creationId="{BF969751-C17A-1769-0ABC-1B51BE3C73F9}"/>
+          </ac:spMkLst>
+        </pc:spChg>
+        <pc:spChg chg="add del mod">
+          <ac:chgData name="越智 統" userId="2de33d77-a65a-42d1-92e2-b40da65bb07e" providerId="ADAL" clId="{F30BD00A-4533-4B58-A40F-4DF1E72EFFFF}" dt="2026-10-14T12:54:18.813" v="1215" actId="478"/>
+          <ac:spMkLst>
+            <pc:docMk/>
+            <pc:sldMk cId="3882074766" sldId="263"/>
+            <ac:spMk id="7" creationId="{04C44821-1A29-2198-D1CD-FEDDD498B61A}"/>
+          </ac:spMkLst>
+        </pc:spChg>
+        <pc:spChg chg="add del mod">
+          <ac:chgData name="越智 統" userId="2de33d77-a65a-42d1-92e2-b40da65bb07e" providerId="ADAL" clId="{F30BD00A-4533-4B58-A40F-4DF1E72EFFFF}" dt="2026-10-14T12:54:16.939" v="1214" actId="478"/>
+          <ac:spMkLst>
+            <pc:docMk/>
+            <pc:sldMk cId="3882074766" sldId="263"/>
+            <ac:spMk id="9" creationId="{B6E1C2C0-752F-DF30-6CB2-16DDC674280E}"/>
+          </ac:spMkLst>
+        </pc:spChg>
+        <pc:spChg chg="add del">
+          <ac:chgData name="越智 統" userId="2de33d77-a65a-42d1-92e2-b40da65bb07e" providerId="ADAL" clId="{F30BD00A-4533-4B58-A40F-4DF1E72EFFFF}" dt="2026-10-14T12:57:07.008" v="1282" actId="478"/>
+          <ac:spMkLst>
+            <pc:docMk/>
+            <pc:sldMk cId="3882074766" sldId="263"/>
+            <ac:spMk id="12" creationId="{56A4FAAD-7CAF-045F-0B16-FE46F8121A48}"/>
+          </ac:spMkLst>
+        </pc:spChg>
+        <pc:spChg chg="add mod">
+          <ac:chgData name="越智 統" userId="2de33d77-a65a-42d1-92e2-b40da65bb07e" providerId="ADAL" clId="{F30BD00A-4533-4B58-A40F-4DF1E72EFFFF}" dt="2026-10-14T13:01:48.584" v="1358" actId="1076"/>
+          <ac:spMkLst>
+            <pc:docMk/>
+            <pc:sldMk cId="3882074766" sldId="263"/>
+            <ac:spMk id="13" creationId="{5980120C-6F8D-E591-3159-468C27FAAD02}"/>
+          </ac:spMkLst>
+        </pc:spChg>
+        <pc:spChg chg="add del">
+          <ac:chgData name="越智 統" userId="2de33d77-a65a-42d1-92e2-b40da65bb07e" providerId="ADAL" clId="{F30BD00A-4533-4B58-A40F-4DF1E72EFFFF}" dt="2026-10-14T12:58:23.957" v="1288" actId="478"/>
+          <ac:spMkLst>
+            <pc:docMk/>
+            <pc:sldMk cId="3882074766" sldId="263"/>
+            <ac:spMk id="14" creationId="{4A2FC0F5-F80F-74A3-51A9-8FB6487635E6}"/>
+          </ac:spMkLst>
+        </pc:spChg>
+        <pc:spChg chg="add mod">
+          <ac:chgData name="越智 統" userId="2de33d77-a65a-42d1-92e2-b40da65bb07e" providerId="ADAL" clId="{F30BD00A-4533-4B58-A40F-4DF1E72EFFFF}" dt="2026-10-14T13:01:48.584" v="1358" actId="1076"/>
+          <ac:spMkLst>
+            <pc:docMk/>
+            <pc:sldMk cId="3882074766" sldId="263"/>
+            <ac:spMk id="15" creationId="{3705FDCD-9E74-74C2-5EE9-183A2236FFD9}"/>
+          </ac:spMkLst>
+        </pc:spChg>
+        <pc:spChg chg="add del">
+          <ac:chgData name="越智 統" userId="2de33d77-a65a-42d1-92e2-b40da65bb07e" providerId="ADAL" clId="{F30BD00A-4533-4B58-A40F-4DF1E72EFFFF}" dt="2026-10-14T12:59:25.757" v="1296" actId="478"/>
+          <ac:spMkLst>
+            <pc:docMk/>
+            <pc:sldMk cId="3882074766" sldId="263"/>
+            <ac:spMk id="16" creationId="{E78D14AC-5BB1-15F3-4826-993366FC401C}"/>
+          </ac:spMkLst>
+        </pc:spChg>
+        <pc:spChg chg="add mod">
+          <ac:chgData name="越智 統" userId="2de33d77-a65a-42d1-92e2-b40da65bb07e" providerId="ADAL" clId="{F30BD00A-4533-4B58-A40F-4DF1E72EFFFF}" dt="2026-10-14T13:01:48.584" v="1358" actId="1076"/>
+          <ac:spMkLst>
+            <pc:docMk/>
+            <pc:sldMk cId="3882074766" sldId="263"/>
+            <ac:spMk id="17" creationId="{2ACC77F0-86AE-5CEC-11C8-83A5913C44C0}"/>
+          </ac:spMkLst>
+        </pc:spChg>
+        <pc:spChg chg="add mod">
+          <ac:chgData name="越智 統" userId="2de33d77-a65a-42d1-92e2-b40da65bb07e" providerId="ADAL" clId="{F30BD00A-4533-4B58-A40F-4DF1E72EFFFF}" dt="2026-10-14T13:01:48.584" v="1358" actId="1076"/>
+          <ac:spMkLst>
+            <pc:docMk/>
+            <pc:sldMk cId="3882074766" sldId="263"/>
+            <ac:spMk id="18" creationId="{4D8A6448-27E1-5F03-7AA5-BE769717030F}"/>
+          </ac:spMkLst>
+        </pc:spChg>
+        <pc:spChg chg="add mod">
+          <ac:chgData name="越智 統" userId="2de33d77-a65a-42d1-92e2-b40da65bb07e" providerId="ADAL" clId="{F30BD00A-4533-4B58-A40F-4DF1E72EFFFF}" dt="2026-10-14T13:21:34.983" v="1776" actId="20577"/>
+          <ac:spMkLst>
+            <pc:docMk/>
+            <pc:sldMk cId="3882074766" sldId="263"/>
+            <ac:spMk id="19" creationId="{A8265098-E6BF-089D-7DFA-ADB0B111368D}"/>
+          </ac:spMkLst>
+        </pc:spChg>
+        <pc:graphicFrameChg chg="add mod modGraphic">
+          <ac:chgData name="越智 統" userId="2de33d77-a65a-42d1-92e2-b40da65bb07e" providerId="ADAL" clId="{F30BD00A-4533-4B58-A40F-4DF1E72EFFFF}" dt="2026-10-14T13:01:48.584" v="1358" actId="1076"/>
+          <ac:graphicFrameMkLst>
+            <pc:docMk/>
+            <pc:sldMk cId="3882074766" sldId="263"/>
+            <ac:graphicFrameMk id="4" creationId="{BF9DB59D-03E8-50AF-B8A0-6BD34A94DD20}"/>
+          </ac:graphicFrameMkLst>
+        </pc:graphicFrameChg>
+        <pc:cxnChg chg="add del mod">
+          <ac:chgData name="越智 統" userId="2de33d77-a65a-42d1-92e2-b40da65bb07e" providerId="ADAL" clId="{F30BD00A-4533-4B58-A40F-4DF1E72EFFFF}" dt="2026-10-14T12:54:20.013" v="1216" actId="478"/>
+          <ac:cxnSpMkLst>
+            <pc:docMk/>
+            <pc:sldMk cId="3882074766" sldId="263"/>
+            <ac:cxnSpMk id="6" creationId="{975D231D-D429-923C-993F-20915383F3D0}"/>
+          </ac:cxnSpMkLst>
+        </pc:cxnChg>
+        <pc:cxnChg chg="add del mod">
+          <ac:chgData name="越智 統" userId="2de33d77-a65a-42d1-92e2-b40da65bb07e" providerId="ADAL" clId="{F30BD00A-4533-4B58-A40F-4DF1E72EFFFF}" dt="2026-10-14T12:54:21.308" v="1217" actId="478"/>
+          <ac:cxnSpMkLst>
+            <pc:docMk/>
+            <pc:sldMk cId="3882074766" sldId="263"/>
+            <ac:cxnSpMk id="11" creationId="{7105A3AF-5AED-3154-1B29-3B703DF79204}"/>
+          </ac:cxnSpMkLst>
+        </pc:cxnChg>
+      </pc:sldChg>
+      <pc:sldChg chg="addSp delSp modSp mod">
+        <pc:chgData name="越智 統" userId="2de33d77-a65a-42d1-92e2-b40da65bb07e" providerId="ADAL" clId="{F30BD00A-4533-4B58-A40F-4DF1E72EFFFF}" dt="2026-10-14T14:53:26.354" v="2969" actId="1076"/>
+        <pc:sldMkLst>
+          <pc:docMk/>
+          <pc:sldMk cId="3885844179" sldId="264"/>
+        </pc:sldMkLst>
+        <pc:spChg chg="mod">
+          <ac:chgData name="越智 統" userId="2de33d77-a65a-42d1-92e2-b40da65bb07e" providerId="ADAL" clId="{F30BD00A-4533-4B58-A40F-4DF1E72EFFFF}" dt="2026-10-14T14:12:51.038" v="1816" actId="20577"/>
+          <ac:spMkLst>
+            <pc:docMk/>
+            <pc:sldMk cId="3885844179" sldId="264"/>
+            <ac:spMk id="2" creationId="{5E4C6CFB-2F0D-35D3-D9D1-9EBA1819C25D}"/>
+          </ac:spMkLst>
+        </pc:spChg>
+        <pc:spChg chg="mod">
+          <ac:chgData name="越智 統" userId="2de33d77-a65a-42d1-92e2-b40da65bb07e" providerId="ADAL" clId="{F30BD00A-4533-4B58-A40F-4DF1E72EFFFF}" dt="2026-10-14T14:52:37.802" v="2957" actId="20577"/>
+          <ac:spMkLst>
+            <pc:docMk/>
+            <pc:sldMk cId="3885844179" sldId="264"/>
+            <ac:spMk id="3" creationId="{841864B1-F11B-791E-B2CC-18BD151883D1}"/>
+          </ac:spMkLst>
+        </pc:spChg>
+        <pc:spChg chg="add del mod">
+          <ac:chgData name="越智 統" userId="2de33d77-a65a-42d1-92e2-b40da65bb07e" providerId="ADAL" clId="{F30BD00A-4533-4B58-A40F-4DF1E72EFFFF}" dt="2026-10-14T14:52:01.821" v="2949"/>
+          <ac:spMkLst>
+            <pc:docMk/>
+            <pc:sldMk cId="3885844179" sldId="264"/>
+            <ac:spMk id="6" creationId="{5FC752A8-577A-89EA-0717-B3549FD23391}"/>
+          </ac:spMkLst>
+        </pc:spChg>
+        <pc:spChg chg="add mod">
+          <ac:chgData name="越智 統" userId="2de33d77-a65a-42d1-92e2-b40da65bb07e" providerId="ADAL" clId="{F30BD00A-4533-4B58-A40F-4DF1E72EFFFF}" dt="2026-10-14T14:53:26.354" v="2969" actId="1076"/>
+          <ac:spMkLst>
+            <pc:docMk/>
+            <pc:sldMk cId="3885844179" sldId="264"/>
+            <ac:spMk id="7" creationId="{F7F93B1D-6A7A-291D-2919-F425C05442E3}"/>
+          </ac:spMkLst>
+        </pc:spChg>
+        <pc:spChg chg="add mod">
+          <ac:chgData name="越智 統" userId="2de33d77-a65a-42d1-92e2-b40da65bb07e" providerId="ADAL" clId="{F30BD00A-4533-4B58-A40F-4DF1E72EFFFF}" dt="2026-10-14T14:53:07.438" v="2966" actId="1076"/>
+          <ac:spMkLst>
+            <pc:docMk/>
+            <pc:sldMk cId="3885844179" sldId="264"/>
+            <ac:spMk id="8" creationId="{3B85456E-7E55-963C-0602-BC8138A09206}"/>
+          </ac:spMkLst>
+        </pc:spChg>
+        <pc:graphicFrameChg chg="add mod modGraphic">
+          <ac:chgData name="越智 統" userId="2de33d77-a65a-42d1-92e2-b40da65bb07e" providerId="ADAL" clId="{F30BD00A-4533-4B58-A40F-4DF1E72EFFFF}" dt="2026-10-14T14:52:54.860" v="2962" actId="1076"/>
+          <ac:graphicFrameMkLst>
+            <pc:docMk/>
+            <pc:sldMk cId="3885844179" sldId="264"/>
+            <ac:graphicFrameMk id="4" creationId="{1602F5CF-AB31-34DF-5AFB-AD40F50E9448}"/>
+          </ac:graphicFrameMkLst>
+        </pc:graphicFrameChg>
+        <pc:graphicFrameChg chg="add del mod modGraphic">
+          <ac:chgData name="越智 統" userId="2de33d77-a65a-42d1-92e2-b40da65bb07e" providerId="ADAL" clId="{F30BD00A-4533-4B58-A40F-4DF1E72EFFFF}" dt="2026-10-14T14:15:21.015" v="1876" actId="478"/>
+          <ac:graphicFrameMkLst>
+            <pc:docMk/>
+            <pc:sldMk cId="3885844179" sldId="264"/>
+            <ac:graphicFrameMk id="5" creationId="{1E2F85A8-F6DB-804F-F322-BFA4AD772849}"/>
+          </ac:graphicFrameMkLst>
+        </pc:graphicFrameChg>
+      </pc:sldChg>
+      <pc:sldChg chg="modSp mod">
+        <pc:chgData name="越智 統" userId="2de33d77-a65a-42d1-92e2-b40da65bb07e" providerId="ADAL" clId="{F30BD00A-4533-4B58-A40F-4DF1E72EFFFF}" dt="2026-10-15T03:19:33.529" v="3201" actId="20577"/>
+        <pc:sldMkLst>
+          <pc:docMk/>
+          <pc:sldMk cId="3164935586" sldId="265"/>
+        </pc:sldMkLst>
+        <pc:spChg chg="mod">
+          <ac:chgData name="越智 統" userId="2de33d77-a65a-42d1-92e2-b40da65bb07e" providerId="ADAL" clId="{F30BD00A-4533-4B58-A40F-4DF1E72EFFFF}" dt="2026-10-15T03:19:33.529" v="3201" actId="20577"/>
+          <ac:spMkLst>
+            <pc:docMk/>
+            <pc:sldMk cId="3164935586" sldId="265"/>
+            <ac:spMk id="2" creationId="{ED59F0AA-AD8D-902D-D440-84F85A87E490}"/>
+          </ac:spMkLst>
+        </pc:spChg>
+        <pc:spChg chg="mod">
+          <ac:chgData name="越智 統" userId="2de33d77-a65a-42d1-92e2-b40da65bb07e" providerId="ADAL" clId="{F30BD00A-4533-4B58-A40F-4DF1E72EFFFF}" dt="2026-10-14T14:45:32.083" v="2771" actId="20577"/>
+          <ac:spMkLst>
+            <pc:docMk/>
+            <pc:sldMk cId="3164935586" sldId="265"/>
+            <ac:spMk id="3" creationId="{3043F0E9-13F1-3471-E6FC-7A64303B55C3}"/>
+          </ac:spMkLst>
+        </pc:spChg>
       </pc:sldChg>
     </pc:docChg>
   </pc:docChgLst>
 </pc:chgInfo>
+</file>
+
+<file path=ppt/diagrams/colors1.xml><?xml version="1.0" encoding="utf-8"?>
+<dgm:colorsDef xmlns:dgm="http://schemas.openxmlformats.org/drawingml/2006/diagram" xmlns:a="http://schemas.openxmlformats.org/drawingml/2006/main" uniqueId="urn:microsoft.com/office/officeart/2005/8/colors/accent1_2">
+  <dgm:title val=""/>
+  <dgm:desc val=""/>
+  <dgm:catLst>
+    <dgm:cat type="accent1" pri="11200"/>
+  </dgm:catLst>
+  <dgm:styleLbl name="node0">
+    <dgm:fillClrLst meth="repeat">
+      <a:schemeClr val="accent1"/>
+    </dgm:fillClrLst>
+    <dgm:linClrLst meth="repeat">
+      <a:schemeClr val="lt1"/>
+    </dgm:linClrLst>
+    <dgm:effectClrLst/>
+    <dgm:txLinClrLst/>
+    <dgm:txFillClrLst/>
+    <dgm:txEffectClrLst/>
+  </dgm:styleLbl>
+  <dgm:styleLbl name="alignNode1">
+    <dgm:fillClrLst meth="repeat">
+      <a:schemeClr val="accent1"/>
+    </dgm:fillClrLst>
+    <dgm:linClrLst meth="repeat">
+      <a:schemeClr val="accent1"/>
+    </dgm:linClrLst>
+    <dgm:effectClrLst/>
+    <dgm:txLinClrLst/>
+    <dgm:txFillClrLst/>
+    <dgm:txEffectClrLst/>
+  </dgm:styleLbl>
+  <dgm:styleLbl name="node1">
+    <dgm:fillClrLst meth="repeat">
+      <a:schemeClr val="accent1"/>
+    </dgm:fillClrLst>
+    <dgm:linClrLst meth="repeat">
+      <a:schemeClr val="lt1"/>
+    </dgm:linClrLst>
+    <dgm:effectClrLst/>
+    <dgm:txLinClrLst/>
+    <dgm:txFillClrLst/>
+    <dgm:txEffectClrLst/>
+  </dgm:styleLbl>
+  <dgm:styleLbl name="lnNode1">
+    <dgm:fillClrLst meth="repeat">
+      <a:schemeClr val="accent1"/>
+    </dgm:fillClrLst>
+    <dgm:linClrLst meth="repeat">
+      <a:schemeClr val="lt1"/>
+    </dgm:linClrLst>
+    <dgm:effectClrLst/>
+    <dgm:txLinClrLst/>
+    <dgm:txFillClrLst/>
+    <dgm:txEffectClrLst/>
+  </dgm:styleLbl>
+  <dgm:styleLbl name="vennNode1">
+    <dgm:fillClrLst meth="repeat">
+      <a:schemeClr val="accent1">
+        <a:alpha val="50000"/>
+      </a:schemeClr>
+    </dgm:fillClrLst>
+    <dgm:linClrLst meth="repeat">
+      <a:schemeClr val="lt1"/>
+    </dgm:linClrLst>
+    <dgm:effectClrLst/>
+    <dgm:txLinClrLst/>
+    <dgm:txFillClrLst/>
+    <dgm:txEffectClrLst/>
+  </dgm:styleLbl>
+  <dgm:styleLbl name="node2">
+    <dgm:fillClrLst meth="repeat">
+      <a:schemeClr val="accent1"/>
+    </dgm:fillClrLst>
+    <dgm:linClrLst meth="repeat">
+      <a:schemeClr val="lt1"/>
+    </dgm:linClrLst>
+    <dgm:effectClrLst/>
+    <dgm:txLinClrLst/>
+    <dgm:txFillClrLst/>
+    <dgm:txEffectClrLst/>
+  </dgm:styleLbl>
+  <dgm:styleLbl name="node3">
+    <dgm:fillClrLst meth="repeat">
+      <a:schemeClr val="accent1"/>
+    </dgm:fillClrLst>
+    <dgm:linClrLst meth="repeat">
+      <a:schemeClr val="lt1"/>
+    </dgm:linClrLst>
+    <dgm:effectClrLst/>
+    <dgm:txLinClrLst/>
+    <dgm:txFillClrLst/>
+    <dgm:txEffectClrLst/>
+  </dgm:styleLbl>
+  <dgm:styleLbl name="node4">
+    <dgm:fillClrLst meth="repeat">
+      <a:schemeClr val="accent1"/>
+    </dgm:fillClrLst>
+    <dgm:linClrLst meth="repeat">
+      <a:schemeClr val="lt1"/>
+    </dgm:linClrLst>
+    <dgm:effectClrLst/>
+    <dgm:txLinClrLst/>
+    <dgm:txFillClrLst/>
+    <dgm:txEffectClrLst/>
+  </dgm:styleLbl>
+  <dgm:styleLbl name="fgImgPlace1">
+    <dgm:fillClrLst meth="repeat">
+      <a:schemeClr val="accent1">
+        <a:tint val="50000"/>
+      </a:schemeClr>
+    </dgm:fillClrLst>
+    <dgm:linClrLst meth="repeat">
+      <a:schemeClr val="lt1"/>
+    </dgm:linClrLst>
+    <dgm:effectClrLst/>
+    <dgm:txLinClrLst/>
+    <dgm:txFillClrLst meth="repeat">
+      <a:schemeClr val="lt1"/>
+    </dgm:txFillClrLst>
+    <dgm:txEffectClrLst/>
+  </dgm:styleLbl>
+  <dgm:styleLbl name="alignImgPlace1">
+    <dgm:fillClrLst meth="repeat">
+      <a:schemeClr val="accent1">
+        <a:tint val="50000"/>
+      </a:schemeClr>
+    </dgm:fillClrLst>
+    <dgm:linClrLst meth="repeat">
+      <a:schemeClr val="lt1"/>
+    </dgm:linClrLst>
+    <dgm:effectClrLst/>
+    <dgm:txLinClrLst/>
+    <dgm:txFillClrLst meth="repeat">
+      <a:schemeClr val="lt1"/>
+    </dgm:txFillClrLst>
+    <dgm:txEffectClrLst/>
+  </dgm:styleLbl>
+  <dgm:styleLbl name="bgImgPlace1">
+    <dgm:fillClrLst meth="repeat">
+      <a:schemeClr val="accent1">
+        <a:tint val="50000"/>
+      </a:schemeClr>
+    </dgm:fillClrLst>
+    <dgm:linClrLst meth="repeat">
+      <a:schemeClr val="lt1"/>
+    </dgm:linClrLst>
+    <dgm:effectClrLst/>
+    <dgm:txLinClrLst/>
+    <dgm:txFillClrLst meth="repeat">
+      <a:schemeClr val="lt1"/>
+    </dgm:txFillClrLst>
+    <dgm:txEffectClrLst/>
+  </dgm:styleLbl>
+  <dgm:styleLbl name="sibTrans2D1">
+    <dgm:fillClrLst meth="repeat">
+      <a:schemeClr val="accent1">
+        <a:tint val="60000"/>
+      </a:schemeClr>
+    </dgm:fillClrLst>
+    <dgm:linClrLst meth="repeat">
+      <a:schemeClr val="accent1">
+        <a:tint val="60000"/>
+      </a:schemeClr>
+    </dgm:linClrLst>
+    <dgm:effectClrLst/>
+    <dgm:txLinClrLst/>
+    <dgm:txFillClrLst/>
+    <dgm:txEffectClrLst/>
+  </dgm:styleLbl>
+  <dgm:styleLbl name="fgSibTrans2D1">
+    <dgm:fillClrLst meth="repeat">
+      <a:schemeClr val="accent1">
+        <a:tint val="60000"/>
+      </a:schemeClr>
+    </dgm:fillClrLst>
+    <dgm:linClrLst meth="repeat">
+      <a:schemeClr val="accent1">
+        <a:tint val="60000"/>
+      </a:schemeClr>
+    </dgm:linClrLst>
+    <dgm:effectClrLst/>
+    <dgm:txLinClrLst/>
+    <dgm:txFillClrLst/>
+    <dgm:txEffectClrLst/>
+  </dgm:styleLbl>
+  <dgm:styleLbl name="bgSibTrans2D1">
+    <dgm:fillClrLst meth="repeat">
+      <a:schemeClr val="accent1">
+        <a:tint val="60000"/>
+      </a:schemeClr>
+    </dgm:fillClrLst>
+    <dgm:linClrLst meth="repeat">
+      <a:schemeClr val="accent1">
+        <a:tint val="60000"/>
+      </a:schemeClr>
+    </dgm:linClrLst>
+    <dgm:effectClrLst/>
+    <dgm:txLinClrLst/>
+    <dgm:txFillClrLst/>
+    <dgm:txEffectClrLst/>
+  </dgm:styleLbl>
+  <dgm:styleLbl name="sibTrans1D1">
+    <dgm:fillClrLst meth="repeat">
+      <a:schemeClr val="accent1"/>
+    </dgm:fillClrLst>
+    <dgm:linClrLst meth="repeat">
+      <a:schemeClr val="accent1"/>
+    </dgm:linClrLst>
+    <dgm:effectClrLst/>
+    <dgm:txLinClrLst/>
+    <dgm:txFillClrLst meth="repeat">
+      <a:schemeClr val="tx1"/>
+    </dgm:txFillClrLst>
+    <dgm:txEffectClrLst/>
+  </dgm:styleLbl>
+  <dgm:styleLbl name="callout">
+    <dgm:fillClrLst meth="repeat">
+      <a:schemeClr val="accent1"/>
+    </dgm:fillClrLst>
+    <dgm:linClrLst meth="repeat">
+      <a:schemeClr val="accent1">
+        <a:tint val="50000"/>
+      </a:schemeClr>
+    </dgm:linClrLst>
+    <dgm:effectClrLst/>
+    <dgm:txLinClrLst/>
+    <dgm:txFillClrLst meth="repeat">
+      <a:schemeClr val="tx1"/>
+    </dgm:txFillClrLst>
+    <dgm:txEffectClrLst/>
+  </dgm:styleLbl>
+  <dgm:styleLbl name="asst0">
+    <dgm:fillClrLst meth="repeat">
+      <a:schemeClr val="accent1"/>
+    </dgm:fillClrLst>
+    <dgm:linClrLst meth="repeat">
+      <a:schemeClr val="lt1"/>
+    </dgm:linClrLst>
+    <dgm:effectClrLst/>
+    <dgm:txLinClrLst/>
+    <dgm:txFillClrLst/>
+    <dgm:txEffectClrLst/>
+  </dgm:styleLbl>
+  <dgm:styleLbl name="asst1">
+    <dgm:fillClrLst meth="repeat">
+      <a:schemeClr val="accent1"/>
+    </dgm:fillClrLst>
+    <dgm:linClrLst meth="repeat">
+      <a:schemeClr val="lt1"/>
+    </dgm:linClrLst>
+    <dgm:effectClrLst/>
+    <dgm:txLinClrLst/>
+    <dgm:txFillClrLst/>
+    <dgm:txEffectClrLst/>
+  </dgm:styleLbl>
+  <dgm:styleLbl name="asst2">
+    <dgm:fillClrLst meth="repeat">
+      <a:schemeClr val="accent1"/>
+    </dgm:fillClrLst>
+    <dgm:linClrLst meth="repeat">
+      <a:schemeClr val="lt1"/>
+    </dgm:linClrLst>
+    <dgm:effectClrLst/>
+    <dgm:txLinClrLst/>
+    <dgm:txFillClrLst/>
+    <dgm:txEffectClrLst/>
+  </dgm:styleLbl>
+  <dgm:styleLbl name="asst3">
+    <dgm:fillClrLst meth="repeat">
+      <a:schemeClr val="accent1"/>
+    </dgm:fillClrLst>
+    <dgm:linClrLst meth="repeat">
+      <a:schemeClr val="lt1"/>
+    </dgm:linClrLst>
+    <dgm:effectClrLst/>
+    <dgm:txLinClrLst/>
+    <dgm:txFillClrLst/>
+    <dgm:txEffectClrLst/>
+  </dgm:styleLbl>
+  <dgm:styleLbl name="asst4">
+    <dgm:fillClrLst meth="repeat">
+      <a:schemeClr val="accent1"/>
+    </dgm:fillClrLst>
+    <dgm:linClrLst meth="repeat">
+      <a:schemeClr val="lt1"/>
+    </dgm:linClrLst>
+    <dgm:effectClrLst/>
+    <dgm:txLinClrLst/>
+    <dgm:txFillClrLst/>
+    <dgm:txEffectClrLst/>
+  </dgm:styleLbl>
+  <dgm:styleLbl name="parChTrans2D1">
+    <dgm:fillClrLst meth="repeat">
+      <a:schemeClr val="accent1">
+        <a:tint val="60000"/>
+      </a:schemeClr>
+    </dgm:fillClrLst>
+    <dgm:linClrLst meth="repeat">
+      <a:schemeClr val="accent1">
+        <a:tint val="60000"/>
+      </a:schemeClr>
+    </dgm:linClrLst>
+    <dgm:effectClrLst/>
+    <dgm:txLinClrLst/>
+    <dgm:txFillClrLst meth="repeat">
+      <a:schemeClr val="lt1"/>
+    </dgm:txFillClrLst>
+    <dgm:txEffectClrLst/>
+  </dgm:styleLbl>
+  <dgm:styleLbl name="parChTrans2D2">
+    <dgm:fillClrLst meth="repeat">
+      <a:schemeClr val="accent1"/>
+    </dgm:fillClrLst>
+    <dgm:linClrLst meth="repeat">
+      <a:schemeClr val="accent1"/>
+    </dgm:linClrLst>
+    <dgm:effectClrLst/>
+    <dgm:txLinClrLst/>
+    <dgm:txFillClrLst meth="repeat">
+      <a:schemeClr val="lt1"/>
+    </dgm:txFillClrLst>
+    <dgm:txEffectClrLst/>
+  </dgm:styleLbl>
+  <dgm:styleLbl name="parChTrans2D3">
+    <dgm:fillClrLst meth="repeat">
+      <a:schemeClr val="accent1"/>
+    </dgm:fillClrLst>
+    <dgm:linClrLst meth="repeat">
+      <a:schemeClr val="accent1"/>
+    </dgm:linClrLst>
+    <dgm:effectClrLst/>
+    <dgm:txLinClrLst/>
+    <dgm:txFillClrLst meth="repeat">
+      <a:schemeClr val="lt1"/>
+    </dgm:txFillClrLst>
+    <dgm:txEffectClrLst/>
+  </dgm:styleLbl>
+  <dgm:styleLbl name="parChTrans2D4">
+    <dgm:fillClrLst meth="repeat">
+      <a:schemeClr val="accent1"/>
+    </dgm:fillClrLst>
+    <dgm:linClrLst meth="repeat">
+      <a:schemeClr val="accent1"/>
+    </dgm:linClrLst>
+    <dgm:effectClrLst/>
+    <dgm:txLinClrLst/>
+    <dgm:txFillClrLst meth="repeat">
+      <a:schemeClr val="lt1"/>
+    </dgm:txFillClrLst>
+    <dgm:txEffectClrLst/>
+  </dgm:styleLbl>
+  <dgm:styleLbl name="parChTrans1D1">
+    <dgm:fillClrLst meth="repeat">
+      <a:schemeClr val="accent1"/>
+    </dgm:fillClrLst>
+    <dgm:linClrLst meth="repeat">
+      <a:schemeClr val="accent1">
+        <a:shade val="60000"/>
+      </a:schemeClr>
+    </dgm:linClrLst>
+    <dgm:effectClrLst/>
+    <dgm:txLinClrLst/>
+    <dgm:txFillClrLst meth="repeat">
+      <a:schemeClr val="tx1"/>
+    </dgm:txFillClrLst>
+    <dgm:txEffectClrLst/>
+  </dgm:styleLbl>
+  <dgm:styleLbl name="parChTrans1D2">
+    <dgm:fillClrLst meth="repeat">
+      <a:schemeClr val="accent1"/>
+    </dgm:fillClrLst>
+    <dgm:linClrLst meth="repeat">
+      <a:schemeClr val="accent1">
+        <a:shade val="60000"/>
+      </a:schemeClr>
+    </dgm:linClrLst>
+    <dgm:effectClrLst/>
+    <dgm:txLinClrLst/>
+    <dgm:txFillClrLst meth="repeat">
+      <a:schemeClr val="tx1"/>
+    </dgm:txFillClrLst>
+    <dgm:txEffectClrLst/>
+  </dgm:styleLbl>
+  <dgm:styleLbl name="parChTrans1D3">
+    <dgm:fillClrLst meth="repeat">
+      <a:schemeClr val="accent1"/>
+    </dgm:fillClrLst>
+    <dgm:linClrLst meth="repeat">
+      <a:schemeClr val="accent1">
+        <a:shade val="80000"/>
+      </a:schemeClr>
+    </dgm:linClrLst>
+    <dgm:effectClrLst/>
+    <dgm:txLinClrLst/>
+    <dgm:txFillClrLst meth="repeat">
+      <a:schemeClr val="tx1"/>
+    </dgm:txFillClrLst>
+    <dgm:txEffectClrLst/>
+  </dgm:styleLbl>
+  <dgm:styleLbl name="parChTrans1D4">
+    <dgm:fillClrLst meth="repeat">
+      <a:schemeClr val="accent1"/>
+    </dgm:fillClrLst>
+    <dgm:linClrLst meth="repeat">
+      <a:schemeClr val="accent1">
+        <a:shade val="80000"/>
+      </a:schemeClr>
+    </dgm:linClrLst>
+    <dgm:effectClrLst/>
+    <dgm:txLinClrLst/>
+    <dgm:txFillClrLst meth="repeat">
+      <a:schemeClr val="tx1"/>
+    </dgm:txFillClrLst>
+    <dgm:txEffectClrLst/>
+  </dgm:styleLbl>
+  <dgm:styleLbl name="fgAcc1">
+    <dgm:fillClrLst meth="repeat">
+      <a:schemeClr val="lt1">
+        <a:alpha val="90000"/>
+      </a:schemeClr>
+    </dgm:fillClrLst>
+    <dgm:linClrLst meth="repeat">
+      <a:schemeClr val="accent1"/>
+    </dgm:linClrLst>
+    <dgm:effectClrLst/>
+    <dgm:txLinClrLst/>
+    <dgm:txFillClrLst meth="repeat">
+      <a:schemeClr val="dk1"/>
+    </dgm:txFillClrLst>
+    <dgm:txEffectClrLst/>
+  </dgm:styleLbl>
+  <dgm:styleLbl name="conFgAcc1">
+    <dgm:fillClrLst meth="repeat">
+      <a:schemeClr val="lt1">
+        <a:alpha val="90000"/>
+      </a:schemeClr>
+    </dgm:fillClrLst>
+    <dgm:linClrLst meth="repeat">
+      <a:schemeClr val="accent1"/>
+    </dgm:linClrLst>
+    <dgm:effectClrLst/>
+    <dgm:txLinClrLst/>
+    <dgm:txFillClrLst meth="repeat">
+      <a:schemeClr val="dk1"/>
+    </dgm:txFillClrLst>
+    <dgm:txEffectClrLst/>
+  </dgm:styleLbl>
+  <dgm:styleLbl name="alignAcc1">
+    <dgm:fillClrLst meth="repeat">
+      <a:schemeClr val="lt1">
+        <a:alpha val="90000"/>
+      </a:schemeClr>
+    </dgm:fillClrLst>
+    <dgm:linClrLst meth="repeat">
+      <a:schemeClr val="accent1"/>
+    </dgm:linClrLst>
+    <dgm:effectClrLst/>
+    <dgm:txLinClrLst/>
+    <dgm:txFillClrLst meth="repeat">
+      <a:schemeClr val="dk1"/>
+    </dgm:txFillClrLst>
+    <dgm:txEffectClrLst/>
+  </dgm:styleLbl>
+  <dgm:styleLbl name="trAlignAcc1">
+    <dgm:fillClrLst meth="repeat">
+      <a:schemeClr val="lt1">
+        <a:alpha val="40000"/>
+      </a:schemeClr>
+    </dgm:fillClrLst>
+    <dgm:linClrLst meth="repeat">
+      <a:schemeClr val="accent1"/>
+    </dgm:linClrLst>
+    <dgm:effectClrLst/>
+    <dgm:txLinClrLst/>
+    <dgm:txFillClrLst meth="repeat">
+      <a:schemeClr val="dk1"/>
+    </dgm:txFillClrLst>
+    <dgm:txEffectClrLst/>
+  </dgm:styleLbl>
+  <dgm:styleLbl name="bgAcc1">
+    <dgm:fillClrLst meth="repeat">
+      <a:schemeClr val="lt1">
+        <a:alpha val="90000"/>
+      </a:schemeClr>
+    </dgm:fillClrLst>
+    <dgm:linClrLst meth="repeat">
+      <a:schemeClr val="accent1"/>
+    </dgm:linClrLst>
+    <dgm:effectClrLst/>
+    <dgm:txLinClrLst/>
+    <dgm:txFillClrLst meth="repeat">
+      <a:schemeClr val="dk1"/>
+    </dgm:txFillClrLst>
+    <dgm:txEffectClrLst/>
+  </dgm:styleLbl>
+  <dgm:styleLbl name="solidFgAcc1">
+    <dgm:fillClrLst meth="repeat">
+      <a:schemeClr val="lt1"/>
+    </dgm:fillClrLst>
+    <dgm:linClrLst meth="repeat">
+      <a:schemeClr val="accent1"/>
+    </dgm:linClrLst>
+    <dgm:effectClrLst/>
+    <dgm:txLinClrLst/>
+    <dgm:txFillClrLst meth="repeat">
+      <a:schemeClr val="dk1"/>
+    </dgm:txFillClrLst>
+    <dgm:txEffectClrLst/>
+  </dgm:styleLbl>
+  <dgm:styleLbl name="solidAlignAcc1">
+    <dgm:fillClrLst meth="repeat">
+      <a:schemeClr val="lt1"/>
+    </dgm:fillClrLst>
+    <dgm:linClrLst meth="repeat">
+      <a:schemeClr val="accent1"/>
+    </dgm:linClrLst>
+    <dgm:effectClrLst/>
+    <dgm:txLinClrLst/>
+    <dgm:txFillClrLst meth="repeat">
+      <a:schemeClr val="dk1"/>
+    </dgm:txFillClrLst>
+    <dgm:txEffectClrLst/>
+  </dgm:styleLbl>
+  <dgm:styleLbl name="solidBgAcc1">
+    <dgm:fillClrLst meth="repeat">
+      <a:schemeClr val="lt1"/>
+    </dgm:fillClrLst>
+    <dgm:linClrLst meth="repeat">
+      <a:schemeClr val="accent1"/>
+    </dgm:linClrLst>
+    <dgm:effectClrLst/>
+    <dgm:txLinClrLst/>
+    <dgm:txFillClrLst meth="repeat">
+      <a:schemeClr val="dk1"/>
+    </dgm:txFillClrLst>
+    <dgm:txEffectClrLst/>
+  </dgm:styleLbl>
+  <dgm:styleLbl name="fgAccFollowNode1">
+    <dgm:fillClrLst meth="repeat">
+      <a:schemeClr val="accent1">
+        <a:alpha val="90000"/>
+        <a:tint val="40000"/>
+      </a:schemeClr>
+    </dgm:fillClrLst>
+    <dgm:linClrLst meth="repeat">
+      <a:schemeClr val="accent1">
+        <a:alpha val="90000"/>
+        <a:tint val="40000"/>
+      </a:schemeClr>
+    </dgm:linClrLst>
+    <dgm:effectClrLst/>
+    <dgm:txLinClrLst/>
+    <dgm:txFillClrLst meth="repeat">
+      <a:schemeClr val="dk1"/>
+    </dgm:txFillClrLst>
+    <dgm:txEffectClrLst/>
+  </dgm:styleLbl>
+  <dgm:styleLbl name="alignAccFollowNode1">
+    <dgm:fillClrLst meth="repeat">
+      <a:schemeClr val="accent1">
+        <a:alpha val="90000"/>
+        <a:tint val="40000"/>
+      </a:schemeClr>
+    </dgm:fillClrLst>
+    <dgm:linClrLst meth="repeat">
+      <a:schemeClr val="accent1">
+        <a:alpha val="90000"/>
+        <a:tint val="40000"/>
+      </a:schemeClr>
+    </dgm:linClrLst>
+    <dgm:effectClrLst/>
+    <dgm:txLinClrLst/>
+    <dgm:txFillClrLst meth="repeat">
+      <a:schemeClr val="dk1"/>
+    </dgm:txFillClrLst>
+    <dgm:txEffectClrLst/>
+  </dgm:styleLbl>
+  <dgm:styleLbl name="bgAccFollowNode1">
+    <dgm:fillClrLst meth="repeat">
+      <a:schemeClr val="accent1">
+        <a:alpha val="90000"/>
+        <a:tint val="40000"/>
+      </a:schemeClr>
+    </dgm:fillClrLst>
+    <dgm:linClrLst meth="repeat">
+      <a:schemeClr val="accent1">
+        <a:alpha val="90000"/>
+        <a:tint val="40000"/>
+      </a:schemeClr>
+    </dgm:linClrLst>
+    <dgm:effectClrLst/>
+    <dgm:txLinClrLst/>
+    <dgm:txFillClrLst meth="repeat">
+      <a:schemeClr val="dk1"/>
+    </dgm:txFillClrLst>
+    <dgm:txEffectClrLst/>
+  </dgm:styleLbl>
+  <dgm:styleLbl name="fgAcc0">
+    <dgm:fillClrLst meth="repeat">
+      <a:schemeClr val="lt1">
+        <a:alpha val="90000"/>
+      </a:schemeClr>
+    </dgm:fillClrLst>
+    <dgm:linClrLst meth="repeat">
+      <a:schemeClr val="accent1"/>
+    </dgm:linClrLst>
+    <dgm:effectClrLst/>
+    <dgm:txLinClrLst/>
+    <dgm:txFillClrLst meth="repeat">
+      <a:schemeClr val="dk1"/>
+    </dgm:txFillClrLst>
+    <dgm:txEffectClrLst/>
+  </dgm:styleLbl>
+  <dgm:styleLbl name="fgAcc2">
+    <dgm:fillClrLst meth="repeat">
+      <a:schemeClr val="lt1">
+        <a:alpha val="90000"/>
+      </a:schemeClr>
+    </dgm:fillClrLst>
+    <dgm:linClrLst meth="repeat">
+      <a:schemeClr val="accent1"/>
+    </dgm:linClrLst>
+    <dgm:effectClrLst/>
+    <dgm:txLinClrLst/>
+    <dgm:txFillClrLst meth="repeat">
+      <a:schemeClr val="dk1"/>
+    </dgm:txFillClrLst>
+    <dgm:txEffectClrLst/>
+  </dgm:styleLbl>
+  <dgm:styleLbl name="fgAcc3">
+    <dgm:fillClrLst meth="repeat">
+      <a:schemeClr val="lt1">
+        <a:alpha val="90000"/>
+      </a:schemeClr>
+    </dgm:fillClrLst>
+    <dgm:linClrLst meth="repeat">
+      <a:schemeClr val="accent1"/>
+    </dgm:linClrLst>
+    <dgm:effectClrLst/>
+    <dgm:txLinClrLst/>
+    <dgm:txFillClrLst meth="repeat">
+      <a:schemeClr val="dk1"/>
+    </dgm:txFillClrLst>
+    <dgm:txEffectClrLst/>
+  </dgm:styleLbl>
+  <dgm:styleLbl name="fgAcc4">
+    <dgm:fillClrLst meth="repeat">
+      <a:schemeClr val="lt1">
+        <a:alpha val="90000"/>
+      </a:schemeClr>
+    </dgm:fillClrLst>
+    <dgm:linClrLst meth="repeat">
+      <a:schemeClr val="accent1"/>
+    </dgm:linClrLst>
+    <dgm:effectClrLst/>
+    <dgm:txLinClrLst/>
+    <dgm:txFillClrLst meth="repeat">
+      <a:schemeClr val="dk1"/>
+    </dgm:txFillClrLst>
+    <dgm:txEffectClrLst/>
+  </dgm:styleLbl>
+  <dgm:styleLbl name="bgShp">
+    <dgm:fillClrLst meth="repeat">
+      <a:schemeClr val="accent1">
+        <a:tint val="40000"/>
+      </a:schemeClr>
+    </dgm:fillClrLst>
+    <dgm:linClrLst meth="repeat">
+      <a:schemeClr val="accent1"/>
+    </dgm:linClrLst>
+    <dgm:effectClrLst/>
+    <dgm:txLinClrLst/>
+    <dgm:txFillClrLst meth="repeat">
+      <a:schemeClr val="dk1"/>
+    </dgm:txFillClrLst>
+    <dgm:txEffectClrLst/>
+  </dgm:styleLbl>
+  <dgm:styleLbl name="dkBgShp">
+    <dgm:fillClrLst meth="repeat">
+      <a:schemeClr val="accent1">
+        <a:shade val="80000"/>
+      </a:schemeClr>
+    </dgm:fillClrLst>
+    <dgm:linClrLst meth="repeat">
+      <a:schemeClr val="accent1"/>
+    </dgm:linClrLst>
+    <dgm:effectClrLst/>
+    <dgm:txLinClrLst/>
+    <dgm:txFillClrLst meth="repeat">
+      <a:schemeClr val="lt1"/>
+    </dgm:txFillClrLst>
+    <dgm:txEffectClrLst/>
+  </dgm:styleLbl>
+  <dgm:styleLbl name="trBgShp">
+    <dgm:fillClrLst meth="repeat">
+      <a:schemeClr val="accent1">
+        <a:tint val="50000"/>
+        <a:alpha val="40000"/>
+      </a:schemeClr>
+    </dgm:fillClrLst>
+    <dgm:linClrLst meth="repeat">
+      <a:schemeClr val="accent1"/>
+    </dgm:linClrLst>
+    <dgm:effectClrLst/>
+    <dgm:txLinClrLst/>
+    <dgm:txFillClrLst meth="repeat">
+      <a:schemeClr val="lt1"/>
+    </dgm:txFillClrLst>
+    <dgm:txEffectClrLst/>
+  </dgm:styleLbl>
+  <dgm:styleLbl name="fgShp">
+    <dgm:fillClrLst meth="repeat">
+      <a:schemeClr val="accent1">
+        <a:tint val="60000"/>
+      </a:schemeClr>
+    </dgm:fillClrLst>
+    <dgm:linClrLst meth="repeat">
+      <a:schemeClr val="lt1"/>
+    </dgm:linClrLst>
+    <dgm:effectClrLst/>
+    <dgm:txLinClrLst/>
+    <dgm:txFillClrLst meth="repeat">
+      <a:schemeClr val="dk1"/>
+    </dgm:txFillClrLst>
+    <dgm:txEffectClrLst/>
+  </dgm:styleLbl>
+  <dgm:styleLbl name="revTx">
+    <dgm:fillClrLst meth="repeat">
+      <a:schemeClr val="lt1">
+        <a:alpha val="0"/>
+      </a:schemeClr>
+    </dgm:fillClrLst>
+    <dgm:linClrLst meth="repeat">
+      <a:schemeClr val="dk1">
+        <a:alpha val="0"/>
+      </a:schemeClr>
+    </dgm:linClrLst>
+    <dgm:effectClrLst/>
+    <dgm:txLinClrLst/>
+    <dgm:txFillClrLst meth="repeat">
+      <a:schemeClr val="tx1"/>
+    </dgm:txFillClrLst>
+    <dgm:txEffectClrLst/>
+  </dgm:styleLbl>
+</dgm:colorsDef>
+</file>
+
+<file path=ppt/diagrams/data1.xml><?xml version="1.0" encoding="utf-8"?>
+<dgm:dataModel xmlns:dgm="http://schemas.openxmlformats.org/drawingml/2006/diagram" xmlns:a="http://schemas.openxmlformats.org/drawingml/2006/main">
+  <dgm:ptLst>
+    <dgm:pt modelId="{F78621DA-98DE-4737-A155-3FBA526A6560}" type="doc">
+      <dgm:prSet loTypeId="urn:microsoft.com/office/officeart/2005/8/layout/cycle5" loCatId="cycle" qsTypeId="urn:microsoft.com/office/officeart/2005/8/quickstyle/simple1" qsCatId="simple" csTypeId="urn:microsoft.com/office/officeart/2005/8/colors/accent1_2" csCatId="accent1" phldr="1"/>
+      <dgm:spPr/>
+      <dgm:t>
+        <a:bodyPr/>
+        <a:lstStyle/>
+        <a:p>
+          <a:endParaRPr kumimoji="1" lang="ja-JP" altLang="en-US"/>
+        </a:p>
+      </dgm:t>
+    </dgm:pt>
+    <dgm:pt modelId="{322510E2-C66E-4246-9F75-DB7D58148E05}">
+      <dgm:prSet phldrT="[テキスト]"/>
+      <dgm:spPr/>
+      <dgm:t>
+        <a:bodyPr/>
+        <a:lstStyle/>
+        <a:p>
+          <a:r>
+            <a:rPr kumimoji="1" lang="en-US" altLang="ja-JP" dirty="0"/>
+            <a:t>[0]</a:t>
+          </a:r>
+        </a:p>
+        <a:p>
+          <a:r>
+            <a:rPr kumimoji="1" lang="ja-JP" altLang="en-US" dirty="0"/>
+            <a:t>データ１</a:t>
+          </a:r>
+        </a:p>
+      </dgm:t>
+    </dgm:pt>
+    <dgm:pt modelId="{DBFF9165-FC1E-4F1A-B5B8-54FB96EF47D0}" type="parTrans" cxnId="{5CF42903-1DDC-4C41-BF10-9E2E9DAD47AA}">
+      <dgm:prSet/>
+      <dgm:spPr/>
+      <dgm:t>
+        <a:bodyPr/>
+        <a:lstStyle/>
+        <a:p>
+          <a:endParaRPr kumimoji="1" lang="ja-JP" altLang="en-US"/>
+        </a:p>
+      </dgm:t>
+    </dgm:pt>
+    <dgm:pt modelId="{96CCF726-6B43-499A-83B0-09A79FB20542}" type="sibTrans" cxnId="{5CF42903-1DDC-4C41-BF10-9E2E9DAD47AA}">
+      <dgm:prSet/>
+      <dgm:spPr/>
+      <dgm:t>
+        <a:bodyPr/>
+        <a:lstStyle/>
+        <a:p>
+          <a:endParaRPr kumimoji="1" lang="ja-JP" altLang="en-US"/>
+        </a:p>
+      </dgm:t>
+    </dgm:pt>
+    <dgm:pt modelId="{F009DB3F-0488-4FCC-B325-80C5D27A1251}">
+      <dgm:prSet phldrT="[テキスト]"/>
+      <dgm:spPr/>
+      <dgm:t>
+        <a:bodyPr/>
+        <a:lstStyle/>
+        <a:p>
+          <a:r>
+            <a:rPr kumimoji="1" lang="en-US" altLang="ja-JP" dirty="0"/>
+            <a:t>[1]</a:t>
+          </a:r>
+        </a:p>
+        <a:p>
+          <a:r>
+            <a:rPr kumimoji="1" lang="ja-JP" altLang="en-US" dirty="0"/>
+            <a:t>空き</a:t>
+          </a:r>
+        </a:p>
+      </dgm:t>
+    </dgm:pt>
+    <dgm:pt modelId="{E9B45D84-48E3-4214-BE85-8A3EAC4639D1}" type="parTrans" cxnId="{3BC624FF-A54D-451D-80D9-30175FF9E5DD}">
+      <dgm:prSet/>
+      <dgm:spPr/>
+      <dgm:t>
+        <a:bodyPr/>
+        <a:lstStyle/>
+        <a:p>
+          <a:endParaRPr kumimoji="1" lang="ja-JP" altLang="en-US"/>
+        </a:p>
+      </dgm:t>
+    </dgm:pt>
+    <dgm:pt modelId="{8B739F00-8AEA-42D7-AE29-85F1645CF8B9}" type="sibTrans" cxnId="{3BC624FF-A54D-451D-80D9-30175FF9E5DD}">
+      <dgm:prSet/>
+      <dgm:spPr/>
+      <dgm:t>
+        <a:bodyPr/>
+        <a:lstStyle/>
+        <a:p>
+          <a:endParaRPr kumimoji="1" lang="ja-JP" altLang="en-US"/>
+        </a:p>
+      </dgm:t>
+    </dgm:pt>
+    <dgm:pt modelId="{D4C88156-7866-4E92-A107-D6ABA625DAF2}">
+      <dgm:prSet phldrT="[テキスト]"/>
+      <dgm:spPr/>
+      <dgm:t>
+        <a:bodyPr/>
+        <a:lstStyle/>
+        <a:p>
+          <a:r>
+            <a:rPr kumimoji="1" lang="en-US" altLang="ja-JP" dirty="0"/>
+            <a:t>[2]</a:t>
+          </a:r>
+        </a:p>
+        <a:p>
+          <a:r>
+            <a:rPr kumimoji="1" lang="ja-JP" altLang="en-US" dirty="0"/>
+            <a:t>空き</a:t>
+          </a:r>
+        </a:p>
+      </dgm:t>
+    </dgm:pt>
+    <dgm:pt modelId="{D1715BA5-0509-4C15-BD7C-9661B5D1DFC6}" type="parTrans" cxnId="{1DF04F60-6CAD-4B2E-8ECA-ADAFA4CE61AF}">
+      <dgm:prSet/>
+      <dgm:spPr/>
+      <dgm:t>
+        <a:bodyPr/>
+        <a:lstStyle/>
+        <a:p>
+          <a:endParaRPr kumimoji="1" lang="ja-JP" altLang="en-US"/>
+        </a:p>
+      </dgm:t>
+    </dgm:pt>
+    <dgm:pt modelId="{E119FA1F-345A-41E0-A525-ED2F8A7DF06F}" type="sibTrans" cxnId="{1DF04F60-6CAD-4B2E-8ECA-ADAFA4CE61AF}">
+      <dgm:prSet/>
+      <dgm:spPr/>
+      <dgm:t>
+        <a:bodyPr/>
+        <a:lstStyle/>
+        <a:p>
+          <a:endParaRPr kumimoji="1" lang="ja-JP" altLang="en-US"/>
+        </a:p>
+      </dgm:t>
+    </dgm:pt>
+    <dgm:pt modelId="{C250C18A-D6CD-42C9-BD19-4EFEBCE84A50}">
+      <dgm:prSet phldrT="[テキスト]"/>
+      <dgm:spPr/>
+      <dgm:t>
+        <a:bodyPr/>
+        <a:lstStyle/>
+        <a:p>
+          <a:r>
+            <a:rPr kumimoji="1" lang="en-US" altLang="ja-JP" dirty="0"/>
+            <a:t>[3]</a:t>
+          </a:r>
+        </a:p>
+        <a:p>
+          <a:r>
+            <a:rPr kumimoji="1" lang="ja-JP" altLang="en-US" dirty="0"/>
+            <a:t>データ２</a:t>
+          </a:r>
+        </a:p>
+      </dgm:t>
+    </dgm:pt>
+    <dgm:pt modelId="{66DC6D86-99DF-4963-BF89-3C3406827221}" type="parTrans" cxnId="{52B7AC6C-E8DE-4235-90CA-51E072F74651}">
+      <dgm:prSet/>
+      <dgm:spPr/>
+      <dgm:t>
+        <a:bodyPr/>
+        <a:lstStyle/>
+        <a:p>
+          <a:endParaRPr kumimoji="1" lang="ja-JP" altLang="en-US"/>
+        </a:p>
+      </dgm:t>
+    </dgm:pt>
+    <dgm:pt modelId="{04BC8051-6652-4389-B0C1-19942FB32101}" type="sibTrans" cxnId="{52B7AC6C-E8DE-4235-90CA-51E072F74651}">
+      <dgm:prSet/>
+      <dgm:spPr/>
+      <dgm:t>
+        <a:bodyPr/>
+        <a:lstStyle/>
+        <a:p>
+          <a:endParaRPr kumimoji="1" lang="ja-JP" altLang="en-US"/>
+        </a:p>
+      </dgm:t>
+    </dgm:pt>
+    <dgm:pt modelId="{F232A69B-B1A3-4238-88E6-CD29F9B697E7}">
+      <dgm:prSet phldrT="[テキスト]"/>
+      <dgm:spPr/>
+      <dgm:t>
+        <a:bodyPr/>
+        <a:lstStyle/>
+        <a:p>
+          <a:r>
+            <a:rPr kumimoji="1" lang="en-US" altLang="ja-JP" dirty="0"/>
+            <a:t>[4]</a:t>
+          </a:r>
+        </a:p>
+        <a:p>
+          <a:r>
+            <a:rPr kumimoji="1" lang="ja-JP" altLang="en-US" dirty="0"/>
+            <a:t>データ３</a:t>
+          </a:r>
+        </a:p>
+      </dgm:t>
+    </dgm:pt>
+    <dgm:pt modelId="{15C5AD7B-E4A0-44C6-AF86-154DA7D88A5F}" type="parTrans" cxnId="{ECC9154B-E5C4-42FB-B8B2-FE512DB92DFE}">
+      <dgm:prSet/>
+      <dgm:spPr/>
+      <dgm:t>
+        <a:bodyPr/>
+        <a:lstStyle/>
+        <a:p>
+          <a:endParaRPr kumimoji="1" lang="ja-JP" altLang="en-US"/>
+        </a:p>
+      </dgm:t>
+    </dgm:pt>
+    <dgm:pt modelId="{346C0105-29DC-43A0-BE83-B866CED1D912}" type="sibTrans" cxnId="{ECC9154B-E5C4-42FB-B8B2-FE512DB92DFE}">
+      <dgm:prSet/>
+      <dgm:spPr/>
+      <dgm:t>
+        <a:bodyPr/>
+        <a:lstStyle/>
+        <a:p>
+          <a:endParaRPr kumimoji="1" lang="ja-JP" altLang="en-US"/>
+        </a:p>
+      </dgm:t>
+    </dgm:pt>
+    <dgm:pt modelId="{8629BC10-BD2F-4E22-966F-F112607BD29B}" type="pres">
+      <dgm:prSet presAssocID="{F78621DA-98DE-4737-A155-3FBA526A6560}" presName="cycle" presStyleCnt="0">
+        <dgm:presLayoutVars>
+          <dgm:dir/>
+          <dgm:resizeHandles val="exact"/>
+        </dgm:presLayoutVars>
+      </dgm:prSet>
+      <dgm:spPr/>
+    </dgm:pt>
+    <dgm:pt modelId="{8D57C528-DD23-4726-ADDB-08B222FDF048}" type="pres">
+      <dgm:prSet presAssocID="{322510E2-C66E-4246-9F75-DB7D58148E05}" presName="node" presStyleLbl="node1" presStyleIdx="0" presStyleCnt="5">
+        <dgm:presLayoutVars>
+          <dgm:bulletEnabled val="1"/>
+        </dgm:presLayoutVars>
+      </dgm:prSet>
+      <dgm:spPr/>
+    </dgm:pt>
+    <dgm:pt modelId="{513E25E2-42FC-4381-972D-1D7360E826DE}" type="pres">
+      <dgm:prSet presAssocID="{322510E2-C66E-4246-9F75-DB7D58148E05}" presName="spNode" presStyleCnt="0"/>
+      <dgm:spPr/>
+    </dgm:pt>
+    <dgm:pt modelId="{02E2A525-433A-44B7-8533-39CD8C4081DB}" type="pres">
+      <dgm:prSet presAssocID="{96CCF726-6B43-499A-83B0-09A79FB20542}" presName="sibTrans" presStyleLbl="sibTrans1D1" presStyleIdx="0" presStyleCnt="5"/>
+      <dgm:spPr/>
+    </dgm:pt>
+    <dgm:pt modelId="{B16BCE7C-EFAA-4193-A565-C60AB83E2E49}" type="pres">
+      <dgm:prSet presAssocID="{F009DB3F-0488-4FCC-B325-80C5D27A1251}" presName="node" presStyleLbl="node1" presStyleIdx="1" presStyleCnt="5">
+        <dgm:presLayoutVars>
+          <dgm:bulletEnabled val="1"/>
+        </dgm:presLayoutVars>
+      </dgm:prSet>
+      <dgm:spPr/>
+    </dgm:pt>
+    <dgm:pt modelId="{84712916-803C-48FF-AD4E-74D68A472897}" type="pres">
+      <dgm:prSet presAssocID="{F009DB3F-0488-4FCC-B325-80C5D27A1251}" presName="spNode" presStyleCnt="0"/>
+      <dgm:spPr/>
+    </dgm:pt>
+    <dgm:pt modelId="{D38753C0-5CCE-4EA8-8226-3A0AEDF573EB}" type="pres">
+      <dgm:prSet presAssocID="{8B739F00-8AEA-42D7-AE29-85F1645CF8B9}" presName="sibTrans" presStyleLbl="sibTrans1D1" presStyleIdx="1" presStyleCnt="5"/>
+      <dgm:spPr/>
+    </dgm:pt>
+    <dgm:pt modelId="{396CFCC9-DD87-44AC-BA2C-CB693D611578}" type="pres">
+      <dgm:prSet presAssocID="{D4C88156-7866-4E92-A107-D6ABA625DAF2}" presName="node" presStyleLbl="node1" presStyleIdx="2" presStyleCnt="5">
+        <dgm:presLayoutVars>
+          <dgm:bulletEnabled val="1"/>
+        </dgm:presLayoutVars>
+      </dgm:prSet>
+      <dgm:spPr/>
+    </dgm:pt>
+    <dgm:pt modelId="{0EA23156-0A36-48FC-BA46-8743630B05AF}" type="pres">
+      <dgm:prSet presAssocID="{D4C88156-7866-4E92-A107-D6ABA625DAF2}" presName="spNode" presStyleCnt="0"/>
+      <dgm:spPr/>
+    </dgm:pt>
+    <dgm:pt modelId="{D8D59009-16EE-4E6C-B791-56AEE240D26E}" type="pres">
+      <dgm:prSet presAssocID="{E119FA1F-345A-41E0-A525-ED2F8A7DF06F}" presName="sibTrans" presStyleLbl="sibTrans1D1" presStyleIdx="2" presStyleCnt="5"/>
+      <dgm:spPr/>
+    </dgm:pt>
+    <dgm:pt modelId="{15FEC346-A5E9-48C3-A64D-E7F878F99481}" type="pres">
+      <dgm:prSet presAssocID="{C250C18A-D6CD-42C9-BD19-4EFEBCE84A50}" presName="node" presStyleLbl="node1" presStyleIdx="3" presStyleCnt="5">
+        <dgm:presLayoutVars>
+          <dgm:bulletEnabled val="1"/>
+        </dgm:presLayoutVars>
+      </dgm:prSet>
+      <dgm:spPr/>
+    </dgm:pt>
+    <dgm:pt modelId="{BD713BA2-401C-4730-B0A2-5169F87959DF}" type="pres">
+      <dgm:prSet presAssocID="{C250C18A-D6CD-42C9-BD19-4EFEBCE84A50}" presName="spNode" presStyleCnt="0"/>
+      <dgm:spPr/>
+    </dgm:pt>
+    <dgm:pt modelId="{5783C2C1-F472-4FCF-A25F-E706F3F2F703}" type="pres">
+      <dgm:prSet presAssocID="{04BC8051-6652-4389-B0C1-19942FB32101}" presName="sibTrans" presStyleLbl="sibTrans1D1" presStyleIdx="3" presStyleCnt="5"/>
+      <dgm:spPr/>
+    </dgm:pt>
+    <dgm:pt modelId="{0354585E-A298-49AB-BBDD-4A069BDC6A02}" type="pres">
+      <dgm:prSet presAssocID="{F232A69B-B1A3-4238-88E6-CD29F9B697E7}" presName="node" presStyleLbl="node1" presStyleIdx="4" presStyleCnt="5">
+        <dgm:presLayoutVars>
+          <dgm:bulletEnabled val="1"/>
+        </dgm:presLayoutVars>
+      </dgm:prSet>
+      <dgm:spPr/>
+    </dgm:pt>
+    <dgm:pt modelId="{E15C42C4-B462-400B-A806-926EE3F0AD7E}" type="pres">
+      <dgm:prSet presAssocID="{F232A69B-B1A3-4238-88E6-CD29F9B697E7}" presName="spNode" presStyleCnt="0"/>
+      <dgm:spPr/>
+    </dgm:pt>
+    <dgm:pt modelId="{47A68A92-9214-4188-AC1C-3AFC58A78268}" type="pres">
+      <dgm:prSet presAssocID="{346C0105-29DC-43A0-BE83-B866CED1D912}" presName="sibTrans" presStyleLbl="sibTrans1D1" presStyleIdx="4" presStyleCnt="5"/>
+      <dgm:spPr/>
+    </dgm:pt>
+  </dgm:ptLst>
+  <dgm:cxnLst>
+    <dgm:cxn modelId="{5CF42903-1DDC-4C41-BF10-9E2E9DAD47AA}" srcId="{F78621DA-98DE-4737-A155-3FBA526A6560}" destId="{322510E2-C66E-4246-9F75-DB7D58148E05}" srcOrd="0" destOrd="0" parTransId="{DBFF9165-FC1E-4F1A-B5B8-54FB96EF47D0}" sibTransId="{96CCF726-6B43-499A-83B0-09A79FB20542}"/>
+    <dgm:cxn modelId="{DD1C431F-8B8D-4F71-AC29-A371009DAA5C}" type="presOf" srcId="{E119FA1F-345A-41E0-A525-ED2F8A7DF06F}" destId="{D8D59009-16EE-4E6C-B791-56AEE240D26E}" srcOrd="0" destOrd="0" presId="urn:microsoft.com/office/officeart/2005/8/layout/cycle5"/>
+    <dgm:cxn modelId="{BA9A9A21-6F4C-4032-8A2C-FBF86A1D4811}" type="presOf" srcId="{C250C18A-D6CD-42C9-BD19-4EFEBCE84A50}" destId="{15FEC346-A5E9-48C3-A64D-E7F878F99481}" srcOrd="0" destOrd="0" presId="urn:microsoft.com/office/officeart/2005/8/layout/cycle5"/>
+    <dgm:cxn modelId="{D2FA832E-A601-4295-AFC0-3182714656C2}" type="presOf" srcId="{F232A69B-B1A3-4238-88E6-CD29F9B697E7}" destId="{0354585E-A298-49AB-BBDD-4A069BDC6A02}" srcOrd="0" destOrd="0" presId="urn:microsoft.com/office/officeart/2005/8/layout/cycle5"/>
+    <dgm:cxn modelId="{0FD78E5C-4141-4ABC-9358-7005C38D189B}" type="presOf" srcId="{346C0105-29DC-43A0-BE83-B866CED1D912}" destId="{47A68A92-9214-4188-AC1C-3AFC58A78268}" srcOrd="0" destOrd="0" presId="urn:microsoft.com/office/officeart/2005/8/layout/cycle5"/>
+    <dgm:cxn modelId="{CC2CE95F-1E55-4616-BA9C-832E1E915C35}" type="presOf" srcId="{F78621DA-98DE-4737-A155-3FBA526A6560}" destId="{8629BC10-BD2F-4E22-966F-F112607BD29B}" srcOrd="0" destOrd="0" presId="urn:microsoft.com/office/officeart/2005/8/layout/cycle5"/>
+    <dgm:cxn modelId="{1DF04F60-6CAD-4B2E-8ECA-ADAFA4CE61AF}" srcId="{F78621DA-98DE-4737-A155-3FBA526A6560}" destId="{D4C88156-7866-4E92-A107-D6ABA625DAF2}" srcOrd="2" destOrd="0" parTransId="{D1715BA5-0509-4C15-BD7C-9661B5D1DFC6}" sibTransId="{E119FA1F-345A-41E0-A525-ED2F8A7DF06F}"/>
+    <dgm:cxn modelId="{0ACE9663-2F6C-42E8-8C9A-AA2B80B08FDD}" type="presOf" srcId="{96CCF726-6B43-499A-83B0-09A79FB20542}" destId="{02E2A525-433A-44B7-8533-39CD8C4081DB}" srcOrd="0" destOrd="0" presId="urn:microsoft.com/office/officeart/2005/8/layout/cycle5"/>
+    <dgm:cxn modelId="{18809166-D311-4E5D-AB2E-67E96E829EDB}" type="presOf" srcId="{D4C88156-7866-4E92-A107-D6ABA625DAF2}" destId="{396CFCC9-DD87-44AC-BA2C-CB693D611578}" srcOrd="0" destOrd="0" presId="urn:microsoft.com/office/officeart/2005/8/layout/cycle5"/>
+    <dgm:cxn modelId="{ECC9154B-E5C4-42FB-B8B2-FE512DB92DFE}" srcId="{F78621DA-98DE-4737-A155-3FBA526A6560}" destId="{F232A69B-B1A3-4238-88E6-CD29F9B697E7}" srcOrd="4" destOrd="0" parTransId="{15C5AD7B-E4A0-44C6-AF86-154DA7D88A5F}" sibTransId="{346C0105-29DC-43A0-BE83-B866CED1D912}"/>
+    <dgm:cxn modelId="{52B7AC6C-E8DE-4235-90CA-51E072F74651}" srcId="{F78621DA-98DE-4737-A155-3FBA526A6560}" destId="{C250C18A-D6CD-42C9-BD19-4EFEBCE84A50}" srcOrd="3" destOrd="0" parTransId="{66DC6D86-99DF-4963-BF89-3C3406827221}" sibTransId="{04BC8051-6652-4389-B0C1-19942FB32101}"/>
+    <dgm:cxn modelId="{3E080D9D-4776-478E-AE15-BAD2DEB58812}" type="presOf" srcId="{322510E2-C66E-4246-9F75-DB7D58148E05}" destId="{8D57C528-DD23-4726-ADDB-08B222FDF048}" srcOrd="0" destOrd="0" presId="urn:microsoft.com/office/officeart/2005/8/layout/cycle5"/>
+    <dgm:cxn modelId="{F4A893B2-A438-4F3E-A5D5-721A00078EA4}" type="presOf" srcId="{F009DB3F-0488-4FCC-B325-80C5D27A1251}" destId="{B16BCE7C-EFAA-4193-A565-C60AB83E2E49}" srcOrd="0" destOrd="0" presId="urn:microsoft.com/office/officeart/2005/8/layout/cycle5"/>
+    <dgm:cxn modelId="{11D4D4C2-2A4A-4140-A825-F244E0F7899B}" type="presOf" srcId="{8B739F00-8AEA-42D7-AE29-85F1645CF8B9}" destId="{D38753C0-5CCE-4EA8-8226-3A0AEDF573EB}" srcOrd="0" destOrd="0" presId="urn:microsoft.com/office/officeart/2005/8/layout/cycle5"/>
+    <dgm:cxn modelId="{550342E2-C9D5-4BC0-9D53-317B1FE6B7CC}" type="presOf" srcId="{04BC8051-6652-4389-B0C1-19942FB32101}" destId="{5783C2C1-F472-4FCF-A25F-E706F3F2F703}" srcOrd="0" destOrd="0" presId="urn:microsoft.com/office/officeart/2005/8/layout/cycle5"/>
+    <dgm:cxn modelId="{3BC624FF-A54D-451D-80D9-30175FF9E5DD}" srcId="{F78621DA-98DE-4737-A155-3FBA526A6560}" destId="{F009DB3F-0488-4FCC-B325-80C5D27A1251}" srcOrd="1" destOrd="0" parTransId="{E9B45D84-48E3-4214-BE85-8A3EAC4639D1}" sibTransId="{8B739F00-8AEA-42D7-AE29-85F1645CF8B9}"/>
+    <dgm:cxn modelId="{2F13AF19-350F-476A-9B0F-6D2C23A0F14B}" type="presParOf" srcId="{8629BC10-BD2F-4E22-966F-F112607BD29B}" destId="{8D57C528-DD23-4726-ADDB-08B222FDF048}" srcOrd="0" destOrd="0" presId="urn:microsoft.com/office/officeart/2005/8/layout/cycle5"/>
+    <dgm:cxn modelId="{3AD228AF-FD58-43F1-8B59-F739E890F97E}" type="presParOf" srcId="{8629BC10-BD2F-4E22-966F-F112607BD29B}" destId="{513E25E2-42FC-4381-972D-1D7360E826DE}" srcOrd="1" destOrd="0" presId="urn:microsoft.com/office/officeart/2005/8/layout/cycle5"/>
+    <dgm:cxn modelId="{1050013A-C2A2-45D8-98FF-FE7D648E278F}" type="presParOf" srcId="{8629BC10-BD2F-4E22-966F-F112607BD29B}" destId="{02E2A525-433A-44B7-8533-39CD8C4081DB}" srcOrd="2" destOrd="0" presId="urn:microsoft.com/office/officeart/2005/8/layout/cycle5"/>
+    <dgm:cxn modelId="{77DADA9A-882D-410D-A215-ED512ACEB2EC}" type="presParOf" srcId="{8629BC10-BD2F-4E22-966F-F112607BD29B}" destId="{B16BCE7C-EFAA-4193-A565-C60AB83E2E49}" srcOrd="3" destOrd="0" presId="urn:microsoft.com/office/officeart/2005/8/layout/cycle5"/>
+    <dgm:cxn modelId="{DAAAB2EC-73F7-4671-B5EA-2F259A0BD897}" type="presParOf" srcId="{8629BC10-BD2F-4E22-966F-F112607BD29B}" destId="{84712916-803C-48FF-AD4E-74D68A472897}" srcOrd="4" destOrd="0" presId="urn:microsoft.com/office/officeart/2005/8/layout/cycle5"/>
+    <dgm:cxn modelId="{C27486EF-1516-4AF0-BBFE-00D80DA158B6}" type="presParOf" srcId="{8629BC10-BD2F-4E22-966F-F112607BD29B}" destId="{D38753C0-5CCE-4EA8-8226-3A0AEDF573EB}" srcOrd="5" destOrd="0" presId="urn:microsoft.com/office/officeart/2005/8/layout/cycle5"/>
+    <dgm:cxn modelId="{C102AD46-767C-40B3-8392-82F10448B099}" type="presParOf" srcId="{8629BC10-BD2F-4E22-966F-F112607BD29B}" destId="{396CFCC9-DD87-44AC-BA2C-CB693D611578}" srcOrd="6" destOrd="0" presId="urn:microsoft.com/office/officeart/2005/8/layout/cycle5"/>
+    <dgm:cxn modelId="{DBF735DF-AF03-467E-9F10-6709981A66F2}" type="presParOf" srcId="{8629BC10-BD2F-4E22-966F-F112607BD29B}" destId="{0EA23156-0A36-48FC-BA46-8743630B05AF}" srcOrd="7" destOrd="0" presId="urn:microsoft.com/office/officeart/2005/8/layout/cycle5"/>
+    <dgm:cxn modelId="{52B39464-BDAD-4A01-9DFB-AC38EBF1060C}" type="presParOf" srcId="{8629BC10-BD2F-4E22-966F-F112607BD29B}" destId="{D8D59009-16EE-4E6C-B791-56AEE240D26E}" srcOrd="8" destOrd="0" presId="urn:microsoft.com/office/officeart/2005/8/layout/cycle5"/>
+    <dgm:cxn modelId="{89D7C66A-C6D8-49CD-B42C-3CC68C8761CF}" type="presParOf" srcId="{8629BC10-BD2F-4E22-966F-F112607BD29B}" destId="{15FEC346-A5E9-48C3-A64D-E7F878F99481}" srcOrd="9" destOrd="0" presId="urn:microsoft.com/office/officeart/2005/8/layout/cycle5"/>
+    <dgm:cxn modelId="{8C853F25-A93E-4B10-B285-61F48192DD15}" type="presParOf" srcId="{8629BC10-BD2F-4E22-966F-F112607BD29B}" destId="{BD713BA2-401C-4730-B0A2-5169F87959DF}" srcOrd="10" destOrd="0" presId="urn:microsoft.com/office/officeart/2005/8/layout/cycle5"/>
+    <dgm:cxn modelId="{6D25DBF9-508A-4297-8E1E-FF2635F1784D}" type="presParOf" srcId="{8629BC10-BD2F-4E22-966F-F112607BD29B}" destId="{5783C2C1-F472-4FCF-A25F-E706F3F2F703}" srcOrd="11" destOrd="0" presId="urn:microsoft.com/office/officeart/2005/8/layout/cycle5"/>
+    <dgm:cxn modelId="{AE7612E8-1213-4A6E-83F3-E95F3E4800B8}" type="presParOf" srcId="{8629BC10-BD2F-4E22-966F-F112607BD29B}" destId="{0354585E-A298-49AB-BBDD-4A069BDC6A02}" srcOrd="12" destOrd="0" presId="urn:microsoft.com/office/officeart/2005/8/layout/cycle5"/>
+    <dgm:cxn modelId="{D9F4EE71-E346-4B47-82CF-36967609383A}" type="presParOf" srcId="{8629BC10-BD2F-4E22-966F-F112607BD29B}" destId="{E15C42C4-B462-400B-A806-926EE3F0AD7E}" srcOrd="13" destOrd="0" presId="urn:microsoft.com/office/officeart/2005/8/layout/cycle5"/>
+    <dgm:cxn modelId="{35FD6971-D8DD-42ED-A84A-9483F91E480B}" type="presParOf" srcId="{8629BC10-BD2F-4E22-966F-F112607BD29B}" destId="{47A68A92-9214-4188-AC1C-3AFC58A78268}" srcOrd="14" destOrd="0" presId="urn:microsoft.com/office/officeart/2005/8/layout/cycle5"/>
+  </dgm:cxnLst>
+  <dgm:bg/>
+  <dgm:whole/>
+  <dgm:extLst>
+    <a:ext uri="http://schemas.microsoft.com/office/drawing/2008/diagram">
+      <dsp:dataModelExt xmlns:dsp="http://schemas.microsoft.com/office/drawing/2008/diagram" relId="rId6" minVer="http://schemas.openxmlformats.org/drawingml/2006/diagram"/>
+    </a:ext>
+  </dgm:extLst>
+</dgm:dataModel>
+</file>
+
+<file path=ppt/diagrams/drawing1.xml><?xml version="1.0" encoding="utf-8"?>
+<dsp:drawing xmlns:dgm="http://schemas.openxmlformats.org/drawingml/2006/diagram" xmlns:dsp="http://schemas.microsoft.com/office/drawing/2008/diagram" xmlns:a="http://schemas.openxmlformats.org/drawingml/2006/main">
+  <dsp:spTree>
+    <dsp:nvGrpSpPr>
+      <dsp:cNvPr id="0" name=""/>
+      <dsp:cNvGrpSpPr/>
+    </dsp:nvGrpSpPr>
+    <dsp:grpSpPr/>
+    <dsp:sp modelId="{8D57C528-DD23-4726-ADDB-08B222FDF048}">
+      <dsp:nvSpPr>
+        <dsp:cNvPr id="0" name=""/>
+        <dsp:cNvSpPr/>
+      </dsp:nvSpPr>
+      <dsp:spPr>
+        <a:xfrm>
+          <a:off x="1515046" y="1105"/>
+          <a:ext cx="758448" cy="492991"/>
+        </a:xfrm>
+        <a:prstGeom prst="roundRect">
+          <a:avLst/>
+        </a:prstGeom>
+        <a:solidFill>
+          <a:schemeClr val="accent1">
+            <a:hueOff val="0"/>
+            <a:satOff val="0"/>
+            <a:lumOff val="0"/>
+            <a:alphaOff val="0"/>
+          </a:schemeClr>
+        </a:solidFill>
+        <a:ln w="19050" cap="flat" cmpd="sng" algn="ctr">
+          <a:solidFill>
+            <a:schemeClr val="lt1">
+              <a:hueOff val="0"/>
+              <a:satOff val="0"/>
+              <a:lumOff val="0"/>
+              <a:alphaOff val="0"/>
+            </a:schemeClr>
+          </a:solidFill>
+          <a:prstDash val="solid"/>
+          <a:miter lim="800000"/>
+        </a:ln>
+        <a:effectLst/>
+      </dsp:spPr>
+      <dsp:style>
+        <a:lnRef idx="2">
+          <a:scrgbClr r="0" g="0" b="0"/>
+        </a:lnRef>
+        <a:fillRef idx="1">
+          <a:scrgbClr r="0" g="0" b="0"/>
+        </a:fillRef>
+        <a:effectRef idx="0">
+          <a:scrgbClr r="0" g="0" b="0"/>
+        </a:effectRef>
+        <a:fontRef idx="minor">
+          <a:schemeClr val="lt1"/>
+        </a:fontRef>
+      </dsp:style>
+      <dsp:txBody>
+        <a:bodyPr spcFirstLastPara="0" vert="horz" wrap="square" lIns="30480" tIns="30480" rIns="30480" bIns="30480" numCol="1" spcCol="1270" anchor="ctr" anchorCtr="0">
+          <a:noAutofit/>
+        </a:bodyPr>
+        <a:lstStyle/>
+        <a:p>
+          <a:pPr marL="0" lvl="0" indent="0" algn="ctr" defTabSz="355600">
+            <a:lnSpc>
+              <a:spcPct val="90000"/>
+            </a:lnSpc>
+            <a:spcBef>
+              <a:spcPct val="0"/>
+            </a:spcBef>
+            <a:spcAft>
+              <a:spcPct val="35000"/>
+            </a:spcAft>
+            <a:buNone/>
+          </a:pPr>
+          <a:r>
+            <a:rPr kumimoji="1" lang="en-US" altLang="ja-JP" sz="800" kern="1200" dirty="0"/>
+            <a:t>[0]</a:t>
+          </a:r>
+        </a:p>
+        <a:p>
+          <a:pPr marL="0" lvl="0" indent="0" algn="ctr" defTabSz="355600">
+            <a:lnSpc>
+              <a:spcPct val="90000"/>
+            </a:lnSpc>
+            <a:spcBef>
+              <a:spcPct val="0"/>
+            </a:spcBef>
+            <a:spcAft>
+              <a:spcPct val="35000"/>
+            </a:spcAft>
+            <a:buNone/>
+          </a:pPr>
+          <a:r>
+            <a:rPr kumimoji="1" lang="ja-JP" altLang="en-US" sz="800" kern="1200" dirty="0"/>
+            <a:t>データ１</a:t>
+          </a:r>
+        </a:p>
+      </dsp:txBody>
+      <dsp:txXfrm>
+        <a:off x="1539112" y="25171"/>
+        <a:ext cx="710316" cy="444859"/>
+      </dsp:txXfrm>
+    </dsp:sp>
+    <dsp:sp modelId="{02E2A525-433A-44B7-8533-39CD8C4081DB}">
+      <dsp:nvSpPr>
+        <dsp:cNvPr id="0" name=""/>
+        <dsp:cNvSpPr/>
+      </dsp:nvSpPr>
+      <dsp:spPr>
+        <a:xfrm>
+          <a:off x="909488" y="247600"/>
+          <a:ext cx="1969563" cy="1969563"/>
+        </a:xfrm>
+        <a:custGeom>
+          <a:avLst/>
+          <a:gdLst/>
+          <a:ahLst/>
+          <a:cxnLst/>
+          <a:rect l="0" t="0" r="0" b="0"/>
+          <a:pathLst>
+            <a:path>
+              <a:moveTo>
+                <a:pt x="1465572" y="125342"/>
+              </a:moveTo>
+              <a:arcTo wR="984781" hR="984781" stAng="17953423" swAng="1211559"/>
+            </a:path>
+          </a:pathLst>
+        </a:custGeom>
+        <a:noFill/>
+        <a:ln w="12700" cap="flat" cmpd="sng" algn="ctr">
+          <a:solidFill>
+            <a:schemeClr val="accent1">
+              <a:hueOff val="0"/>
+              <a:satOff val="0"/>
+              <a:lumOff val="0"/>
+              <a:alphaOff val="0"/>
+            </a:schemeClr>
+          </a:solidFill>
+          <a:prstDash val="solid"/>
+          <a:miter lim="800000"/>
+          <a:tailEnd type="arrow"/>
+        </a:ln>
+        <a:effectLst/>
+      </dsp:spPr>
+      <dsp:style>
+        <a:lnRef idx="1">
+          <a:scrgbClr r="0" g="0" b="0"/>
+        </a:lnRef>
+        <a:fillRef idx="0">
+          <a:scrgbClr r="0" g="0" b="0"/>
+        </a:fillRef>
+        <a:effectRef idx="0">
+          <a:scrgbClr r="0" g="0" b="0"/>
+        </a:effectRef>
+        <a:fontRef idx="minor"/>
+      </dsp:style>
+    </dsp:sp>
+    <dsp:sp modelId="{B16BCE7C-EFAA-4193-A565-C60AB83E2E49}">
+      <dsp:nvSpPr>
+        <dsp:cNvPr id="0" name=""/>
+        <dsp:cNvSpPr/>
+      </dsp:nvSpPr>
+      <dsp:spPr>
+        <a:xfrm>
+          <a:off x="2451629" y="681572"/>
+          <a:ext cx="758448" cy="492991"/>
+        </a:xfrm>
+        <a:prstGeom prst="roundRect">
+          <a:avLst/>
+        </a:prstGeom>
+        <a:solidFill>
+          <a:schemeClr val="accent1">
+            <a:hueOff val="0"/>
+            <a:satOff val="0"/>
+            <a:lumOff val="0"/>
+            <a:alphaOff val="0"/>
+          </a:schemeClr>
+        </a:solidFill>
+        <a:ln w="19050" cap="flat" cmpd="sng" algn="ctr">
+          <a:solidFill>
+            <a:schemeClr val="lt1">
+              <a:hueOff val="0"/>
+              <a:satOff val="0"/>
+              <a:lumOff val="0"/>
+              <a:alphaOff val="0"/>
+            </a:schemeClr>
+          </a:solidFill>
+          <a:prstDash val="solid"/>
+          <a:miter lim="800000"/>
+        </a:ln>
+        <a:effectLst/>
+      </dsp:spPr>
+      <dsp:style>
+        <a:lnRef idx="2">
+          <a:scrgbClr r="0" g="0" b="0"/>
+        </a:lnRef>
+        <a:fillRef idx="1">
+          <a:scrgbClr r="0" g="0" b="0"/>
+        </a:fillRef>
+        <a:effectRef idx="0">
+          <a:scrgbClr r="0" g="0" b="0"/>
+        </a:effectRef>
+        <a:fontRef idx="minor">
+          <a:schemeClr val="lt1"/>
+        </a:fontRef>
+      </dsp:style>
+      <dsp:txBody>
+        <a:bodyPr spcFirstLastPara="0" vert="horz" wrap="square" lIns="30480" tIns="30480" rIns="30480" bIns="30480" numCol="1" spcCol="1270" anchor="ctr" anchorCtr="0">
+          <a:noAutofit/>
+        </a:bodyPr>
+        <a:lstStyle/>
+        <a:p>
+          <a:pPr marL="0" lvl="0" indent="0" algn="ctr" defTabSz="355600">
+            <a:lnSpc>
+              <a:spcPct val="90000"/>
+            </a:lnSpc>
+            <a:spcBef>
+              <a:spcPct val="0"/>
+            </a:spcBef>
+            <a:spcAft>
+              <a:spcPct val="35000"/>
+            </a:spcAft>
+            <a:buNone/>
+          </a:pPr>
+          <a:r>
+            <a:rPr kumimoji="1" lang="en-US" altLang="ja-JP" sz="800" kern="1200" dirty="0"/>
+            <a:t>[1]</a:t>
+          </a:r>
+        </a:p>
+        <a:p>
+          <a:pPr marL="0" lvl="0" indent="0" algn="ctr" defTabSz="355600">
+            <a:lnSpc>
+              <a:spcPct val="90000"/>
+            </a:lnSpc>
+            <a:spcBef>
+              <a:spcPct val="0"/>
+            </a:spcBef>
+            <a:spcAft>
+              <a:spcPct val="35000"/>
+            </a:spcAft>
+            <a:buNone/>
+          </a:pPr>
+          <a:r>
+            <a:rPr kumimoji="1" lang="ja-JP" altLang="en-US" sz="800" kern="1200" dirty="0"/>
+            <a:t>空き</a:t>
+          </a:r>
+        </a:p>
+      </dsp:txBody>
+      <dsp:txXfrm>
+        <a:off x="2475695" y="705638"/>
+        <a:ext cx="710316" cy="444859"/>
+      </dsp:txXfrm>
+    </dsp:sp>
+    <dsp:sp modelId="{D38753C0-5CCE-4EA8-8226-3A0AEDF573EB}">
+      <dsp:nvSpPr>
+        <dsp:cNvPr id="0" name=""/>
+        <dsp:cNvSpPr/>
+      </dsp:nvSpPr>
+      <dsp:spPr>
+        <a:xfrm>
+          <a:off x="909488" y="247600"/>
+          <a:ext cx="1969563" cy="1969563"/>
+        </a:xfrm>
+        <a:custGeom>
+          <a:avLst/>
+          <a:gdLst/>
+          <a:ahLst/>
+          <a:cxnLst/>
+          <a:rect l="0" t="0" r="0" b="0"/>
+          <a:pathLst>
+            <a:path>
+              <a:moveTo>
+                <a:pt x="1967201" y="1052949"/>
+              </a:moveTo>
+              <a:arcTo wR="984781" hR="984781" stAng="21838156" swAng="1359742"/>
+            </a:path>
+          </a:pathLst>
+        </a:custGeom>
+        <a:noFill/>
+        <a:ln w="12700" cap="flat" cmpd="sng" algn="ctr">
+          <a:solidFill>
+            <a:schemeClr val="accent1">
+              <a:hueOff val="0"/>
+              <a:satOff val="0"/>
+              <a:lumOff val="0"/>
+              <a:alphaOff val="0"/>
+            </a:schemeClr>
+          </a:solidFill>
+          <a:prstDash val="solid"/>
+          <a:miter lim="800000"/>
+          <a:tailEnd type="arrow"/>
+        </a:ln>
+        <a:effectLst/>
+      </dsp:spPr>
+      <dsp:style>
+        <a:lnRef idx="1">
+          <a:scrgbClr r="0" g="0" b="0"/>
+        </a:lnRef>
+        <a:fillRef idx="0">
+          <a:scrgbClr r="0" g="0" b="0"/>
+        </a:fillRef>
+        <a:effectRef idx="0">
+          <a:scrgbClr r="0" g="0" b="0"/>
+        </a:effectRef>
+        <a:fontRef idx="minor"/>
+      </dsp:style>
+    </dsp:sp>
+    <dsp:sp modelId="{396CFCC9-DD87-44AC-BA2C-CB693D611578}">
+      <dsp:nvSpPr>
+        <dsp:cNvPr id="0" name=""/>
+        <dsp:cNvSpPr/>
+      </dsp:nvSpPr>
+      <dsp:spPr>
+        <a:xfrm>
+          <a:off x="2093886" y="1782591"/>
+          <a:ext cx="758448" cy="492991"/>
+        </a:xfrm>
+        <a:prstGeom prst="roundRect">
+          <a:avLst/>
+        </a:prstGeom>
+        <a:solidFill>
+          <a:schemeClr val="accent1">
+            <a:hueOff val="0"/>
+            <a:satOff val="0"/>
+            <a:lumOff val="0"/>
+            <a:alphaOff val="0"/>
+          </a:schemeClr>
+        </a:solidFill>
+        <a:ln w="19050" cap="flat" cmpd="sng" algn="ctr">
+          <a:solidFill>
+            <a:schemeClr val="lt1">
+              <a:hueOff val="0"/>
+              <a:satOff val="0"/>
+              <a:lumOff val="0"/>
+              <a:alphaOff val="0"/>
+            </a:schemeClr>
+          </a:solidFill>
+          <a:prstDash val="solid"/>
+          <a:miter lim="800000"/>
+        </a:ln>
+        <a:effectLst/>
+      </dsp:spPr>
+      <dsp:style>
+        <a:lnRef idx="2">
+          <a:scrgbClr r="0" g="0" b="0"/>
+        </a:lnRef>
+        <a:fillRef idx="1">
+          <a:scrgbClr r="0" g="0" b="0"/>
+        </a:fillRef>
+        <a:effectRef idx="0">
+          <a:scrgbClr r="0" g="0" b="0"/>
+        </a:effectRef>
+        <a:fontRef idx="minor">
+          <a:schemeClr val="lt1"/>
+        </a:fontRef>
+      </dsp:style>
+      <dsp:txBody>
+        <a:bodyPr spcFirstLastPara="0" vert="horz" wrap="square" lIns="30480" tIns="30480" rIns="30480" bIns="30480" numCol="1" spcCol="1270" anchor="ctr" anchorCtr="0">
+          <a:noAutofit/>
+        </a:bodyPr>
+        <a:lstStyle/>
+        <a:p>
+          <a:pPr marL="0" lvl="0" indent="0" algn="ctr" defTabSz="355600">
+            <a:lnSpc>
+              <a:spcPct val="90000"/>
+            </a:lnSpc>
+            <a:spcBef>
+              <a:spcPct val="0"/>
+            </a:spcBef>
+            <a:spcAft>
+              <a:spcPct val="35000"/>
+            </a:spcAft>
+            <a:buNone/>
+          </a:pPr>
+          <a:r>
+            <a:rPr kumimoji="1" lang="en-US" altLang="ja-JP" sz="800" kern="1200" dirty="0"/>
+            <a:t>[2]</a:t>
+          </a:r>
+        </a:p>
+        <a:p>
+          <a:pPr marL="0" lvl="0" indent="0" algn="ctr" defTabSz="355600">
+            <a:lnSpc>
+              <a:spcPct val="90000"/>
+            </a:lnSpc>
+            <a:spcBef>
+              <a:spcPct val="0"/>
+            </a:spcBef>
+            <a:spcAft>
+              <a:spcPct val="35000"/>
+            </a:spcAft>
+            <a:buNone/>
+          </a:pPr>
+          <a:r>
+            <a:rPr kumimoji="1" lang="ja-JP" altLang="en-US" sz="800" kern="1200" dirty="0"/>
+            <a:t>空き</a:t>
+          </a:r>
+        </a:p>
+      </dsp:txBody>
+      <dsp:txXfrm>
+        <a:off x="2117952" y="1806657"/>
+        <a:ext cx="710316" cy="444859"/>
+      </dsp:txXfrm>
+    </dsp:sp>
+    <dsp:sp modelId="{D8D59009-16EE-4E6C-B791-56AEE240D26E}">
+      <dsp:nvSpPr>
+        <dsp:cNvPr id="0" name=""/>
+        <dsp:cNvSpPr/>
+      </dsp:nvSpPr>
+      <dsp:spPr>
+        <a:xfrm>
+          <a:off x="909488" y="247600"/>
+          <a:ext cx="1969563" cy="1969563"/>
+        </a:xfrm>
+        <a:custGeom>
+          <a:avLst/>
+          <a:gdLst/>
+          <a:ahLst/>
+          <a:cxnLst/>
+          <a:rect l="0" t="0" r="0" b="0"/>
+          <a:pathLst>
+            <a:path>
+              <a:moveTo>
+                <a:pt x="1105638" y="1962118"/>
+              </a:moveTo>
+              <a:arcTo wR="984781" hR="984781" stAng="4977037" swAng="845926"/>
+            </a:path>
+          </a:pathLst>
+        </a:custGeom>
+        <a:noFill/>
+        <a:ln w="12700" cap="flat" cmpd="sng" algn="ctr">
+          <a:solidFill>
+            <a:schemeClr val="accent1">
+              <a:hueOff val="0"/>
+              <a:satOff val="0"/>
+              <a:lumOff val="0"/>
+              <a:alphaOff val="0"/>
+            </a:schemeClr>
+          </a:solidFill>
+          <a:prstDash val="solid"/>
+          <a:miter lim="800000"/>
+          <a:tailEnd type="arrow"/>
+        </a:ln>
+        <a:effectLst/>
+      </dsp:spPr>
+      <dsp:style>
+        <a:lnRef idx="1">
+          <a:scrgbClr r="0" g="0" b="0"/>
+        </a:lnRef>
+        <a:fillRef idx="0">
+          <a:scrgbClr r="0" g="0" b="0"/>
+        </a:fillRef>
+        <a:effectRef idx="0">
+          <a:scrgbClr r="0" g="0" b="0"/>
+        </a:effectRef>
+        <a:fontRef idx="minor"/>
+      </dsp:style>
+    </dsp:sp>
+    <dsp:sp modelId="{15FEC346-A5E9-48C3-A64D-E7F878F99481}">
+      <dsp:nvSpPr>
+        <dsp:cNvPr id="0" name=""/>
+        <dsp:cNvSpPr/>
+      </dsp:nvSpPr>
+      <dsp:spPr>
+        <a:xfrm>
+          <a:off x="936206" y="1782591"/>
+          <a:ext cx="758448" cy="492991"/>
+        </a:xfrm>
+        <a:prstGeom prst="roundRect">
+          <a:avLst/>
+        </a:prstGeom>
+        <a:solidFill>
+          <a:schemeClr val="accent1">
+            <a:hueOff val="0"/>
+            <a:satOff val="0"/>
+            <a:lumOff val="0"/>
+            <a:alphaOff val="0"/>
+          </a:schemeClr>
+        </a:solidFill>
+        <a:ln w="19050" cap="flat" cmpd="sng" algn="ctr">
+          <a:solidFill>
+            <a:schemeClr val="lt1">
+              <a:hueOff val="0"/>
+              <a:satOff val="0"/>
+              <a:lumOff val="0"/>
+              <a:alphaOff val="0"/>
+            </a:schemeClr>
+          </a:solidFill>
+          <a:prstDash val="solid"/>
+          <a:miter lim="800000"/>
+        </a:ln>
+        <a:effectLst/>
+      </dsp:spPr>
+      <dsp:style>
+        <a:lnRef idx="2">
+          <a:scrgbClr r="0" g="0" b="0"/>
+        </a:lnRef>
+        <a:fillRef idx="1">
+          <a:scrgbClr r="0" g="0" b="0"/>
+        </a:fillRef>
+        <a:effectRef idx="0">
+          <a:scrgbClr r="0" g="0" b="0"/>
+        </a:effectRef>
+        <a:fontRef idx="minor">
+          <a:schemeClr val="lt1"/>
+        </a:fontRef>
+      </dsp:style>
+      <dsp:txBody>
+        <a:bodyPr spcFirstLastPara="0" vert="horz" wrap="square" lIns="30480" tIns="30480" rIns="30480" bIns="30480" numCol="1" spcCol="1270" anchor="ctr" anchorCtr="0">
+          <a:noAutofit/>
+        </a:bodyPr>
+        <a:lstStyle/>
+        <a:p>
+          <a:pPr marL="0" lvl="0" indent="0" algn="ctr" defTabSz="355600">
+            <a:lnSpc>
+              <a:spcPct val="90000"/>
+            </a:lnSpc>
+            <a:spcBef>
+              <a:spcPct val="0"/>
+            </a:spcBef>
+            <a:spcAft>
+              <a:spcPct val="35000"/>
+            </a:spcAft>
+            <a:buNone/>
+          </a:pPr>
+          <a:r>
+            <a:rPr kumimoji="1" lang="en-US" altLang="ja-JP" sz="800" kern="1200" dirty="0"/>
+            <a:t>[3]</a:t>
+          </a:r>
+        </a:p>
+        <a:p>
+          <a:pPr marL="0" lvl="0" indent="0" algn="ctr" defTabSz="355600">
+            <a:lnSpc>
+              <a:spcPct val="90000"/>
+            </a:lnSpc>
+            <a:spcBef>
+              <a:spcPct val="0"/>
+            </a:spcBef>
+            <a:spcAft>
+              <a:spcPct val="35000"/>
+            </a:spcAft>
+            <a:buNone/>
+          </a:pPr>
+          <a:r>
+            <a:rPr kumimoji="1" lang="ja-JP" altLang="en-US" sz="800" kern="1200" dirty="0"/>
+            <a:t>データ２</a:t>
+          </a:r>
+        </a:p>
+      </dsp:txBody>
+      <dsp:txXfrm>
+        <a:off x="960272" y="1806657"/>
+        <a:ext cx="710316" cy="444859"/>
+      </dsp:txXfrm>
+    </dsp:sp>
+    <dsp:sp modelId="{5783C2C1-F472-4FCF-A25F-E706F3F2F703}">
+      <dsp:nvSpPr>
+        <dsp:cNvPr id="0" name=""/>
+        <dsp:cNvSpPr/>
+      </dsp:nvSpPr>
+      <dsp:spPr>
+        <a:xfrm>
+          <a:off x="909488" y="247600"/>
+          <a:ext cx="1969563" cy="1969563"/>
+        </a:xfrm>
+        <a:custGeom>
+          <a:avLst/>
+          <a:gdLst/>
+          <a:ahLst/>
+          <a:cxnLst/>
+          <a:rect l="0" t="0" r="0" b="0"/>
+          <a:pathLst>
+            <a:path>
+              <a:moveTo>
+                <a:pt x="104478" y="1426212"/>
+              </a:moveTo>
+              <a:arcTo wR="984781" hR="984781" stAng="9202102" swAng="1359742"/>
+            </a:path>
+          </a:pathLst>
+        </a:custGeom>
+        <a:noFill/>
+        <a:ln w="12700" cap="flat" cmpd="sng" algn="ctr">
+          <a:solidFill>
+            <a:schemeClr val="accent1">
+              <a:hueOff val="0"/>
+              <a:satOff val="0"/>
+              <a:lumOff val="0"/>
+              <a:alphaOff val="0"/>
+            </a:schemeClr>
+          </a:solidFill>
+          <a:prstDash val="solid"/>
+          <a:miter lim="800000"/>
+          <a:tailEnd type="arrow"/>
+        </a:ln>
+        <a:effectLst/>
+      </dsp:spPr>
+      <dsp:style>
+        <a:lnRef idx="1">
+          <a:scrgbClr r="0" g="0" b="0"/>
+        </a:lnRef>
+        <a:fillRef idx="0">
+          <a:scrgbClr r="0" g="0" b="0"/>
+        </a:fillRef>
+        <a:effectRef idx="0">
+          <a:scrgbClr r="0" g="0" b="0"/>
+        </a:effectRef>
+        <a:fontRef idx="minor"/>
+      </dsp:style>
+    </dsp:sp>
+    <dsp:sp modelId="{0354585E-A298-49AB-BBDD-4A069BDC6A02}">
+      <dsp:nvSpPr>
+        <dsp:cNvPr id="0" name=""/>
+        <dsp:cNvSpPr/>
+      </dsp:nvSpPr>
+      <dsp:spPr>
+        <a:xfrm>
+          <a:off x="578463" y="681572"/>
+          <a:ext cx="758448" cy="492991"/>
+        </a:xfrm>
+        <a:prstGeom prst="roundRect">
+          <a:avLst/>
+        </a:prstGeom>
+        <a:solidFill>
+          <a:schemeClr val="accent1">
+            <a:hueOff val="0"/>
+            <a:satOff val="0"/>
+            <a:lumOff val="0"/>
+            <a:alphaOff val="0"/>
+          </a:schemeClr>
+        </a:solidFill>
+        <a:ln w="19050" cap="flat" cmpd="sng" algn="ctr">
+          <a:solidFill>
+            <a:schemeClr val="lt1">
+              <a:hueOff val="0"/>
+              <a:satOff val="0"/>
+              <a:lumOff val="0"/>
+              <a:alphaOff val="0"/>
+            </a:schemeClr>
+          </a:solidFill>
+          <a:prstDash val="solid"/>
+          <a:miter lim="800000"/>
+        </a:ln>
+        <a:effectLst/>
+      </dsp:spPr>
+      <dsp:style>
+        <a:lnRef idx="2">
+          <a:scrgbClr r="0" g="0" b="0"/>
+        </a:lnRef>
+        <a:fillRef idx="1">
+          <a:scrgbClr r="0" g="0" b="0"/>
+        </a:fillRef>
+        <a:effectRef idx="0">
+          <a:scrgbClr r="0" g="0" b="0"/>
+        </a:effectRef>
+        <a:fontRef idx="minor">
+          <a:schemeClr val="lt1"/>
+        </a:fontRef>
+      </dsp:style>
+      <dsp:txBody>
+        <a:bodyPr spcFirstLastPara="0" vert="horz" wrap="square" lIns="30480" tIns="30480" rIns="30480" bIns="30480" numCol="1" spcCol="1270" anchor="ctr" anchorCtr="0">
+          <a:noAutofit/>
+        </a:bodyPr>
+        <a:lstStyle/>
+        <a:p>
+          <a:pPr marL="0" lvl="0" indent="0" algn="ctr" defTabSz="355600">
+            <a:lnSpc>
+              <a:spcPct val="90000"/>
+            </a:lnSpc>
+            <a:spcBef>
+              <a:spcPct val="0"/>
+            </a:spcBef>
+            <a:spcAft>
+              <a:spcPct val="35000"/>
+            </a:spcAft>
+            <a:buNone/>
+          </a:pPr>
+          <a:r>
+            <a:rPr kumimoji="1" lang="en-US" altLang="ja-JP" sz="800" kern="1200" dirty="0"/>
+            <a:t>[4]</a:t>
+          </a:r>
+        </a:p>
+        <a:p>
+          <a:pPr marL="0" lvl="0" indent="0" algn="ctr" defTabSz="355600">
+            <a:lnSpc>
+              <a:spcPct val="90000"/>
+            </a:lnSpc>
+            <a:spcBef>
+              <a:spcPct val="0"/>
+            </a:spcBef>
+            <a:spcAft>
+              <a:spcPct val="35000"/>
+            </a:spcAft>
+            <a:buNone/>
+          </a:pPr>
+          <a:r>
+            <a:rPr kumimoji="1" lang="ja-JP" altLang="en-US" sz="800" kern="1200" dirty="0"/>
+            <a:t>データ３</a:t>
+          </a:r>
+        </a:p>
+      </dsp:txBody>
+      <dsp:txXfrm>
+        <a:off x="602529" y="705638"/>
+        <a:ext cx="710316" cy="444859"/>
+      </dsp:txXfrm>
+    </dsp:sp>
+    <dsp:sp modelId="{47A68A92-9214-4188-AC1C-3AFC58A78268}">
+      <dsp:nvSpPr>
+        <dsp:cNvPr id="0" name=""/>
+        <dsp:cNvSpPr/>
+      </dsp:nvSpPr>
+      <dsp:spPr>
+        <a:xfrm>
+          <a:off x="909488" y="247600"/>
+          <a:ext cx="1969563" cy="1969563"/>
+        </a:xfrm>
+        <a:custGeom>
+          <a:avLst/>
+          <a:gdLst/>
+          <a:ahLst/>
+          <a:cxnLst/>
+          <a:rect l="0" t="0" r="0" b="0"/>
+          <a:pathLst>
+            <a:path>
+              <a:moveTo>
+                <a:pt x="236882" y="344124"/>
+              </a:moveTo>
+              <a:arcTo wR="984781" hR="984781" stAng="13235018" swAng="1211559"/>
+            </a:path>
+          </a:pathLst>
+        </a:custGeom>
+        <a:noFill/>
+        <a:ln w="12700" cap="flat" cmpd="sng" algn="ctr">
+          <a:solidFill>
+            <a:schemeClr val="accent1">
+              <a:hueOff val="0"/>
+              <a:satOff val="0"/>
+              <a:lumOff val="0"/>
+              <a:alphaOff val="0"/>
+            </a:schemeClr>
+          </a:solidFill>
+          <a:prstDash val="solid"/>
+          <a:miter lim="800000"/>
+          <a:tailEnd type="arrow"/>
+        </a:ln>
+        <a:effectLst/>
+      </dsp:spPr>
+      <dsp:style>
+        <a:lnRef idx="1">
+          <a:scrgbClr r="0" g="0" b="0"/>
+        </a:lnRef>
+        <a:fillRef idx="0">
+          <a:scrgbClr r="0" g="0" b="0"/>
+        </a:fillRef>
+        <a:effectRef idx="0">
+          <a:scrgbClr r="0" g="0" b="0"/>
+        </a:effectRef>
+        <a:fontRef idx="minor"/>
+      </dsp:style>
+    </dsp:sp>
+  </dsp:spTree>
+</dsp:drawing>
+</file>
+
+<file path=ppt/diagrams/layout1.xml><?xml version="1.0" encoding="utf-8"?>
+<dgm:layoutDef xmlns:dgm="http://schemas.openxmlformats.org/drawingml/2006/diagram" xmlns:a="http://schemas.openxmlformats.org/drawingml/2006/main" uniqueId="urn:microsoft.com/office/officeart/2005/8/layout/cycle5">
+  <dgm:title val=""/>
+  <dgm:desc val=""/>
+  <dgm:catLst>
+    <dgm:cat type="cycle" pri="3000"/>
+  </dgm:catLst>
+  <dgm:sampData>
+    <dgm:dataModel>
+      <dgm:ptLst>
+        <dgm:pt modelId="0" type="doc"/>
+        <dgm:pt modelId="1">
+          <dgm:prSet phldr="1"/>
+        </dgm:pt>
+        <dgm:pt modelId="2">
+          <dgm:prSet phldr="1"/>
+        </dgm:pt>
+        <dgm:pt modelId="3">
+          <dgm:prSet phldr="1"/>
+        </dgm:pt>
+        <dgm:pt modelId="4">
+          <dgm:prSet phldr="1"/>
+        </dgm:pt>
+        <dgm:pt modelId="5">
+          <dgm:prSet phldr="1"/>
+        </dgm:pt>
+      </dgm:ptLst>
+      <dgm:cxnLst>
+        <dgm:cxn modelId="6" srcId="0" destId="1" srcOrd="0" destOrd="0"/>
+        <dgm:cxn modelId="7" srcId="0" destId="2" srcOrd="1" destOrd="0"/>
+        <dgm:cxn modelId="8" srcId="0" destId="3" srcOrd="2" destOrd="0"/>
+        <dgm:cxn modelId="9" srcId="0" destId="4" srcOrd="3" destOrd="0"/>
+        <dgm:cxn modelId="10" srcId="0" destId="5" srcOrd="4" destOrd="0"/>
+      </dgm:cxnLst>
+      <dgm:bg/>
+      <dgm:whole/>
+    </dgm:dataModel>
+  </dgm:sampData>
+  <dgm:styleData>
+    <dgm:dataModel>
+      <dgm:ptLst>
+        <dgm:pt modelId="0" type="doc"/>
+        <dgm:pt modelId="1"/>
+        <dgm:pt modelId="2"/>
+        <dgm:pt modelId="3"/>
+      </dgm:ptLst>
+      <dgm:cxnLst>
+        <dgm:cxn modelId="4" srcId="0" destId="1" srcOrd="0" destOrd="0"/>
+        <dgm:cxn modelId="5" srcId="0" destId="2" srcOrd="1" destOrd="0"/>
+        <dgm:cxn modelId="6" srcId="0" destId="3" srcOrd="2" destOrd="0"/>
+      </dgm:cxnLst>
+      <dgm:bg/>
+      <dgm:whole/>
+    </dgm:dataModel>
+  </dgm:styleData>
+  <dgm:clrData>
+    <dgm:dataModel>
+      <dgm:ptLst>
+        <dgm:pt modelId="0" type="doc"/>
+        <dgm:pt modelId="1"/>
+        <dgm:pt modelId="2"/>
+        <dgm:pt modelId="3"/>
+        <dgm:pt modelId="4"/>
+        <dgm:pt modelId="5"/>
+        <dgm:pt modelId="6"/>
+      </dgm:ptLst>
+      <dgm:cxnLst>
+        <dgm:cxn modelId="7" srcId="0" destId="1" srcOrd="0" destOrd="0"/>
+        <dgm:cxn modelId="8" srcId="0" destId="2" srcOrd="1" destOrd="0"/>
+        <dgm:cxn modelId="9" srcId="0" destId="3" srcOrd="2" destOrd="0"/>
+        <dgm:cxn modelId="10" srcId="0" destId="4" srcOrd="3" destOrd="0"/>
+        <dgm:cxn modelId="11" srcId="0" destId="5" srcOrd="4" destOrd="0"/>
+        <dgm:cxn modelId="12" srcId="0" destId="6" srcOrd="5" destOrd="0"/>
+      </dgm:cxnLst>
+      <dgm:bg/>
+      <dgm:whole/>
+    </dgm:dataModel>
+  </dgm:clrData>
+  <dgm:layoutNode name="cycle">
+    <dgm:varLst>
+      <dgm:dir/>
+      <dgm:resizeHandles val="exact"/>
+    </dgm:varLst>
+    <dgm:choose name="Name0">
+      <dgm:if name="Name1" func="var" arg="dir" op="equ" val="norm">
+        <dgm:choose name="Name2">
+          <dgm:if name="Name3" axis="ch" ptType="node" func="cnt" op="gt" val="2">
+            <dgm:alg type="cycle">
+              <dgm:param type="stAng" val="0"/>
+              <dgm:param type="spanAng" val="360"/>
+            </dgm:alg>
+          </dgm:if>
+          <dgm:else name="Name4">
+            <dgm:alg type="cycle">
+              <dgm:param type="stAng" val="-90"/>
+              <dgm:param type="spanAng" val="360"/>
+            </dgm:alg>
+          </dgm:else>
+        </dgm:choose>
+      </dgm:if>
+      <dgm:else name="Name5">
+        <dgm:choose name="Name6">
+          <dgm:if name="Name7" axis="ch" ptType="node" func="cnt" op="gt" val="2">
+            <dgm:alg type="cycle">
+              <dgm:param type="stAng" val="0"/>
+              <dgm:param type="spanAng" val="-360"/>
+            </dgm:alg>
+          </dgm:if>
+          <dgm:else name="Name8">
+            <dgm:alg type="cycle">
+              <dgm:param type="stAng" val="90"/>
+              <dgm:param type="spanAng" val="-360"/>
+            </dgm:alg>
+          </dgm:else>
+        </dgm:choose>
+      </dgm:else>
+    </dgm:choose>
+    <dgm:shape xmlns:r="http://schemas.openxmlformats.org/officeDocument/2006/relationships" r:blip="">
+      <dgm:adjLst/>
+    </dgm:shape>
+    <dgm:presOf/>
+    <dgm:choose name="Name9">
+      <dgm:if name="Name10" func="var" arg="dir" op="equ" val="norm">
+        <dgm:constrLst>
+          <dgm:constr type="w" for="ch" forName="node" refType="w"/>
+          <dgm:constr type="w" for="ch" ptType="sibTrans" refType="w" refFor="ch" refForName="node" op="equ" fact="0.3"/>
+          <dgm:constr type="diam" for="ch" ptType="sibTrans" refType="diam" op="equ"/>
+          <dgm:constr type="sibSp" refType="w" refFor="ch" refForName="node" op="equ" fact="0.15"/>
+          <dgm:constr type="w" for="ch" forName="spNode" refType="sibSp" fact="1.6"/>
+          <dgm:constr type="primFontSz" for="ch" forName="node" op="equ" val="65"/>
+        </dgm:constrLst>
+      </dgm:if>
+      <dgm:else name="Name11">
+        <dgm:constrLst>
+          <dgm:constr type="w" for="ch" forName="node" refType="w"/>
+          <dgm:constr type="w" for="ch" ptType="sibTrans" refType="w" refFor="ch" refForName="node" op="equ" fact="0.3"/>
+          <dgm:constr type="diam" for="ch" ptType="sibTrans" refType="diam" fact="-1"/>
+          <dgm:constr type="diam" for="ch" refType="diam" op="equ" fact="-1"/>
+          <dgm:constr type="sibSp" refType="w" refFor="ch" refForName="node" op="equ" fact="0.15"/>
+          <dgm:constr type="w" for="ch" forName="spNode" refType="sibSp" fact="1.6"/>
+          <dgm:constr type="primFontSz" for="ch" forName="node" op="equ" val="65"/>
+        </dgm:constrLst>
+      </dgm:else>
+    </dgm:choose>
+    <dgm:ruleLst/>
+    <dgm:forEach name="Name12" axis="ch" ptType="node">
+      <dgm:layoutNode name="node">
+        <dgm:varLst>
+          <dgm:bulletEnabled val="1"/>
+        </dgm:varLst>
+        <dgm:alg type="tx"/>
+        <dgm:shape xmlns:r="http://schemas.openxmlformats.org/officeDocument/2006/relationships" type="roundRect" r:blip="">
+          <dgm:adjLst/>
+        </dgm:shape>
+        <dgm:presOf axis="desOrSelf" ptType="node"/>
+        <dgm:constrLst>
+          <dgm:constr type="h" refType="w" fact="0.65"/>
+          <dgm:constr type="tMarg" refType="primFontSz" fact="0.3"/>
+          <dgm:constr type="bMarg" refType="primFontSz" fact="0.3"/>
+          <dgm:constr type="lMarg" refType="primFontSz" fact="0.3"/>
+          <dgm:constr type="rMarg" refType="primFontSz" fact="0.3"/>
+        </dgm:constrLst>
+        <dgm:ruleLst>
+          <dgm:rule type="primFontSz" val="5" fact="NaN" max="NaN"/>
+        </dgm:ruleLst>
+      </dgm:layoutNode>
+      <dgm:choose name="Name13">
+        <dgm:if name="Name14" axis="par ch" ptType="doc node" func="cnt" op="gt" val="1">
+          <dgm:layoutNode name="spNode">
+            <dgm:alg type="sp"/>
+            <dgm:shape xmlns:r="http://schemas.openxmlformats.org/officeDocument/2006/relationships" r:blip="">
+              <dgm:adjLst/>
+            </dgm:shape>
+            <dgm:presOf/>
+            <dgm:constrLst>
+              <dgm:constr type="h" refType="w"/>
+            </dgm:constrLst>
+            <dgm:ruleLst/>
+          </dgm:layoutNode>
+          <dgm:forEach name="Name15" axis="followSib" ptType="sibTrans" hideLastTrans="0" cnt="1">
+            <dgm:layoutNode name="sibTrans">
+              <dgm:alg type="conn">
+                <dgm:param type="dim" val="1D"/>
+                <dgm:param type="connRout" val="curve"/>
+                <dgm:param type="begPts" val="radial"/>
+                <dgm:param type="endPts" val="radial"/>
+              </dgm:alg>
+              <dgm:shape xmlns:r="http://schemas.openxmlformats.org/officeDocument/2006/relationships" type="conn" r:blip="">
+                <dgm:adjLst/>
+              </dgm:shape>
+              <dgm:presOf axis="self"/>
+              <dgm:constrLst>
+                <dgm:constr type="h" refType="w" fact="0.65"/>
+                <dgm:constr type="connDist"/>
+                <dgm:constr type="begPad" refType="connDist" fact="0.2"/>
+                <dgm:constr type="endPad" refType="connDist" fact="0.2"/>
+              </dgm:constrLst>
+              <dgm:ruleLst/>
+            </dgm:layoutNode>
+          </dgm:forEach>
+        </dgm:if>
+        <dgm:else name="Name16"/>
+      </dgm:choose>
+    </dgm:forEach>
+  </dgm:layoutNode>
+</dgm:layoutDef>
+</file>
+
+<file path=ppt/diagrams/quickStyle1.xml><?xml version="1.0" encoding="utf-8"?>
+<dgm:styleDef xmlns:dgm="http://schemas.openxmlformats.org/drawingml/2006/diagram" xmlns:a="http://schemas.openxmlformats.org/drawingml/2006/main" uniqueId="urn:microsoft.com/office/officeart/2005/8/quickstyle/simple1">
+  <dgm:title val=""/>
+  <dgm:desc val=""/>
+  <dgm:catLst>
+    <dgm:cat type="simple" pri="10100"/>
+  </dgm:catLst>
+  <dgm:scene3d>
+    <a:camera prst="orthographicFront"/>
+    <a:lightRig rig="threePt" dir="t"/>
+  </dgm:scene3d>
+  <dgm:styleLbl name="node0">
+    <dgm:scene3d>
+      <a:camera prst="orthographicFront"/>
+      <a:lightRig rig="threePt" dir="t"/>
+    </dgm:scene3d>
+    <dgm:sp3d/>
+    <dgm:txPr/>
+    <dgm:style>
+      <a:lnRef idx="2">
+        <a:scrgbClr r="0" g="0" b="0"/>
+      </a:lnRef>
+      <a:fillRef idx="1">
+        <a:scrgbClr r="0" g="0" b="0"/>
+      </a:fillRef>
+      <a:effectRef idx="0">
+        <a:scrgbClr r="0" g="0" b="0"/>
+      </a:effectRef>
+      <a:fontRef idx="minor">
+        <a:schemeClr val="lt1"/>
+      </a:fontRef>
+    </dgm:style>
+  </dgm:styleLbl>
+  <dgm:styleLbl name="lnNode1">
+    <dgm:scene3d>
+      <a:camera prst="orthographicFront"/>
+      <a:lightRig rig="threePt" dir="t"/>
+    </dgm:scene3d>
+    <dgm:sp3d/>
+    <dgm:txPr/>
+    <dgm:style>
+      <a:lnRef idx="2">
+        <a:scrgbClr r="0" g="0" b="0"/>
+      </a:lnRef>
+      <a:fillRef idx="1">
+        <a:scrgbClr r="0" g="0" b="0"/>
+      </a:fillRef>
+      <a:effectRef idx="0">
+        <a:scrgbClr r="0" g="0" b="0"/>
+      </a:effectRef>
+      <a:fontRef idx="minor">
+        <a:schemeClr val="lt1"/>
+      </a:fontRef>
+    </dgm:style>
+  </dgm:styleLbl>
+  <dgm:styleLbl name="vennNode1">
+    <dgm:scene3d>
+      <a:camera prst="orthographicFront"/>
+      <a:lightRig rig="threePt" dir="t"/>
+    </dgm:scene3d>
+    <dgm:sp3d/>
+    <dgm:txPr/>
+    <dgm:style>
+      <a:lnRef idx="2">
+        <a:scrgbClr r="0" g="0" b="0"/>
+      </a:lnRef>
+      <a:fillRef idx="1">
+        <a:scrgbClr r="0" g="0" b="0"/>
+      </a:fillRef>
+      <a:effectRef idx="0">
+        <a:scrgbClr r="0" g="0" b="0"/>
+      </a:effectRef>
+      <a:fontRef idx="minor">
+        <a:schemeClr val="tx1"/>
+      </a:fontRef>
+    </dgm:style>
+  </dgm:styleLbl>
+  <dgm:styleLbl name="alignNode1">
+    <dgm:scene3d>
+      <a:camera prst="orthographicFront"/>
+      <a:lightRig rig="threePt" dir="t"/>
+    </dgm:scene3d>
+    <dgm:sp3d/>
+    <dgm:txPr/>
+    <dgm:style>
+      <a:lnRef idx="2">
+        <a:scrgbClr r="0" g="0" b="0"/>
+      </a:lnRef>
+      <a:fillRef idx="1">
+        <a:scrgbClr r="0" g="0" b="0"/>
+      </a:fillRef>
+      <a:effectRef idx="0">
+        <a:scrgbClr r="0" g="0" b="0"/>
+      </a:effectRef>
+      <a:fontRef idx="minor">
+        <a:schemeClr val="lt1"/>
+      </a:fontRef>
+    </dgm:style>
+  </dgm:styleLbl>
+  <dgm:styleLbl name="node1">
+    <dgm:scene3d>
+      <a:camera prst="orthographicFront"/>
+      <a:lightRig rig="threePt" dir="t"/>
+    </dgm:scene3d>
+    <dgm:sp3d/>
+    <dgm:txPr/>
+    <dgm:style>
+      <a:lnRef idx="2">
+        <a:scrgbClr r="0" g="0" b="0"/>
+      </a:lnRef>
+      <a:fillRef idx="1">
+        <a:scrgbClr r="0" g="0" b="0"/>
+      </a:fillRef>
+      <a:effectRef idx="0">
+        <a:scrgbClr r="0" g="0" b="0"/>
+      </a:effectRef>
+      <a:fontRef idx="minor">
+        <a:schemeClr val="lt1"/>
+      </a:fontRef>
+    </dgm:style>
+  </dgm:styleLbl>
+  <dgm:styleLbl name="node2">
+    <dgm:scene3d>
+      <a:camera prst="orthographicFront"/>
+      <a:lightRig rig="threePt" dir="t"/>
+    </dgm:scene3d>
+    <dgm:sp3d/>
+    <dgm:txPr/>
+    <dgm:style>
+      <a:lnRef idx="2">
+        <a:scrgbClr r="0" g="0" b="0"/>
+      </a:lnRef>
+      <a:fillRef idx="1">
+        <a:scrgbClr r="0" g="0" b="0"/>
+      </a:fillRef>
+      <a:effectRef idx="0">
+        <a:scrgbClr r="0" g="0" b="0"/>
+      </a:effectRef>
+      <a:fontRef idx="minor">
+        <a:schemeClr val="lt1"/>
+      </a:fontRef>
+    </dgm:style>
+  </dgm:styleLbl>
+  <dgm:styleLbl name="node3">
+    <dgm:scene3d>
+      <a:camera prst="orthographicFront"/>
+      <a:lightRig rig="threePt" dir="t"/>
+    </dgm:scene3d>
+    <dgm:sp3d/>
+    <dgm:txPr/>
+    <dgm:style>
+      <a:lnRef idx="2">
+        <a:scrgbClr r="0" g="0" b="0"/>
+      </a:lnRef>
+      <a:fillRef idx="1">
+        <a:scrgbClr r="0" g="0" b="0"/>
+      </a:fillRef>
+      <a:effectRef idx="0">
+        <a:scrgbClr r="0" g="0" b="0"/>
+      </a:effectRef>
+      <a:fontRef idx="minor">
+        <a:schemeClr val="lt1"/>
+      </a:fontRef>
+    </dgm:style>
+  </dgm:styleLbl>
+  <dgm:styleLbl name="node4">
+    <dgm:scene3d>
+      <a:camera prst="orthographicFront"/>
+      <a:lightRig rig="threePt" dir="t"/>
+    </dgm:scene3d>
+    <dgm:sp3d/>
+    <dgm:txPr/>
+    <dgm:style>
+      <a:lnRef idx="2">
+        <a:scrgbClr r="0" g="0" b="0"/>
+      </a:lnRef>
+      <a:fillRef idx="1">
+        <a:scrgbClr r="0" g="0" b="0"/>
+      </a:fillRef>
+      <a:effectRef idx="0">
+        <a:scrgbClr r="0" g="0" b="0"/>
+      </a:effectRef>
+      <a:fontRef idx="minor">
+        <a:schemeClr val="lt1"/>
+      </a:fontRef>
+    </dgm:style>
+  </dgm:styleLbl>
+  <dgm:styleLbl name="fgImgPlace1">
+    <dgm:scene3d>
+      <a:camera prst="orthographicFront"/>
+      <a:lightRig rig="threePt" dir="t"/>
+    </dgm:scene3d>
+    <dgm:sp3d/>
+    <dgm:txPr/>
+    <dgm:style>
+      <a:lnRef idx="2">
+        <a:scrgbClr r="0" g="0" b="0"/>
+      </a:lnRef>
+      <a:fillRef idx="1">
+        <a:scrgbClr r="0" g="0" b="0"/>
+      </a:fillRef>
+      <a:effectRef idx="0">
+        <a:scrgbClr r="0" g="0" b="0"/>
+      </a:effectRef>
+      <a:fontRef idx="minor"/>
+    </dgm:style>
+  </dgm:styleLbl>
+  <dgm:styleLbl name="alignImgPlace1">
+    <dgm:scene3d>
+      <a:camera prst="orthographicFront"/>
+      <a:lightRig rig="threePt" dir="t"/>
+    </dgm:scene3d>
+    <dgm:sp3d/>
+    <dgm:txPr/>
+    <dgm:style>
+      <a:lnRef idx="2">
+        <a:scrgbClr r="0" g="0" b="0"/>
+      </a:lnRef>
+      <a:fillRef idx="1">
+        <a:scrgbClr r="0" g="0" b="0"/>
+      </a:fillRef>
+      <a:effectRef idx="0">
+        <a:scrgbClr r="0" g="0" b="0"/>
+      </a:effectRef>
+      <a:fontRef idx="minor"/>
+    </dgm:style>
+  </dgm:styleLbl>
+  <dgm:styleLbl name="bgImgPlace1">
+    <dgm:scene3d>
+      <a:camera prst="orthographicFront"/>
+      <a:lightRig rig="threePt" dir="t"/>
+    </dgm:scene3d>
+    <dgm:sp3d/>
+    <dgm:txPr/>
+    <dgm:style>
+      <a:lnRef idx="2">
+        <a:scrgbClr r="0" g="0" b="0"/>
+      </a:lnRef>
+      <a:fillRef idx="1">
+        <a:scrgbClr r="0" g="0" b="0"/>
+      </a:fillRef>
+      <a:effectRef idx="0">
+        <a:scrgbClr r="0" g="0" b="0"/>
+      </a:effectRef>
+      <a:fontRef idx="minor"/>
+    </dgm:style>
+  </dgm:styleLbl>
+  <dgm:styleLbl name="sibTrans2D1">
+    <dgm:scene3d>
+      <a:camera prst="orthographicFront"/>
+      <a:lightRig rig="threePt" dir="t"/>
+    </dgm:scene3d>
+    <dgm:sp3d/>
+    <dgm:txPr/>
+    <dgm:style>
+      <a:lnRef idx="0">
+        <a:scrgbClr r="0" g="0" b="0"/>
+      </a:lnRef>
+      <a:fillRef idx="1">
+        <a:scrgbClr r="0" g="0" b="0"/>
+      </a:fillRef>
+      <a:effectRef idx="0">
+        <a:scrgbClr r="0" g="0" b="0"/>
+      </a:effectRef>
+      <a:fontRef idx="minor">
+        <a:schemeClr val="lt1"/>
+      </a:fontRef>
+    </dgm:style>
+  </dgm:styleLbl>
+  <dgm:styleLbl name="fgSibTrans2D1">
+    <dgm:scene3d>
+      <a:camera prst="orthographicFront"/>
+      <a:lightRig rig="threePt" dir="t"/>
+    </dgm:scene3d>
+    <dgm:sp3d/>
+    <dgm:txPr/>
+    <dgm:style>
+      <a:lnRef idx="0">
+        <a:scrgbClr r="0" g="0" b="0"/>
+      </a:lnRef>
+      <a:fillRef idx="1">
+        <a:scrgbClr r="0" g="0" b="0"/>
+      </a:fillRef>
+      <a:effectRef idx="0">
+        <a:scrgbClr r="0" g="0" b="0"/>
+      </a:effectRef>
+      <a:fontRef idx="minor">
+        <a:schemeClr val="lt1"/>
+      </a:fontRef>
+    </dgm:style>
+  </dgm:styleLbl>
+  <dgm:styleLbl name="bgSibTrans2D1">
+    <dgm:scene3d>
+      <a:camera prst="orthographicFront"/>
+      <a:lightRig rig="threePt" dir="t"/>
+    </dgm:scene3d>
+    <dgm:sp3d/>
+    <dgm:txPr/>
+    <dgm:style>
+      <a:lnRef idx="0">
+        <a:scrgbClr r="0" g="0" b="0"/>
+      </a:lnRef>
+      <a:fillRef idx="1">
+        <a:scrgbClr r="0" g="0" b="0"/>
+      </a:fillRef>
+      <a:effectRef idx="0">
+        <a:scrgbClr r="0" g="0" b="0"/>
+      </a:effectRef>
+      <a:fontRef idx="minor">
+        <a:schemeClr val="lt1"/>
+      </a:fontRef>
+    </dgm:style>
+  </dgm:styleLbl>
+  <dgm:styleLbl name="sibTrans1D1">
+    <dgm:scene3d>
+      <a:camera prst="orthographicFront"/>
+      <a:lightRig rig="threePt" dir="t"/>
+    </dgm:scene3d>
+    <dgm:sp3d/>
+    <dgm:txPr/>
+    <dgm:style>
+      <a:lnRef idx="1">
+        <a:scrgbClr r="0" g="0" b="0"/>
+      </a:lnRef>
+      <a:fillRef idx="0">
+        <a:scrgbClr r="0" g="0" b="0"/>
+      </a:fillRef>
+      <a:effectRef idx="0">
+        <a:scrgbClr r="0" g="0" b="0"/>
+      </a:effectRef>
+      <a:fontRef idx="minor"/>
+    </dgm:style>
+  </dgm:styleLbl>
+  <dgm:styleLbl name="callout">
+    <dgm:scene3d>
+      <a:camera prst="orthographicFront"/>
+      <a:lightRig rig="threePt" dir="t"/>
+    </dgm:scene3d>
+    <dgm:sp3d/>
+    <dgm:txPr/>
+    <dgm:style>
+      <a:lnRef idx="2">
+        <a:scrgbClr r="0" g="0" b="0"/>
+      </a:lnRef>
+      <a:fillRef idx="1">
+        <a:scrgbClr r="0" g="0" b="0"/>
+      </a:fillRef>
+      <a:effectRef idx="0">
+        <a:scrgbClr r="0" g="0" b="0"/>
+      </a:effectRef>
+      <a:fontRef idx="minor"/>
+    </dgm:style>
+  </dgm:styleLbl>
+  <dgm:styleLbl name="asst0">
+    <dgm:scene3d>
+      <a:camera prst="orthographicFront"/>
+      <a:lightRig rig="threePt" dir="t"/>
+    </dgm:scene3d>
+    <dgm:sp3d/>
+    <dgm:txPr/>
+    <dgm:style>
+      <a:lnRef idx="2">
+        <a:scrgbClr r="0" g="0" b="0"/>
+      </a:lnRef>
+      <a:fillRef idx="1">
+        <a:scrgbClr r="0" g="0" b="0"/>
+      </a:fillRef>
+      <a:effectRef idx="0">
+        <a:scrgbClr r="0" g="0" b="0"/>
+      </a:effectRef>
+      <a:fontRef idx="minor">
+        <a:schemeClr val="lt1"/>
+      </a:fontRef>
+    </dgm:style>
+  </dgm:styleLbl>
+  <dgm:styleLbl name="asst1">
+    <dgm:scene3d>
+      <a:camera prst="orthographicFront"/>
+      <a:lightRig rig="threePt" dir="t"/>
+    </dgm:scene3d>
+    <dgm:sp3d/>
+    <dgm:txPr/>
+    <dgm:style>
+      <a:lnRef idx="2">
+        <a:scrgbClr r="0" g="0" b="0"/>
+      </a:lnRef>
+      <a:fillRef idx="1">
+        <a:scrgbClr r="0" g="0" b="0"/>
+      </a:fillRef>
+      <a:effectRef idx="0">
+        <a:scrgbClr r="0" g="0" b="0"/>
+      </a:effectRef>
+      <a:fontRef idx="minor">
+        <a:schemeClr val="lt1"/>
+      </a:fontRef>
+    </dgm:style>
+  </dgm:styleLbl>
+  <dgm:styleLbl name="asst2">
+    <dgm:scene3d>
+      <a:camera prst="orthographicFront"/>
+      <a:lightRig rig="threePt" dir="t"/>
+    </dgm:scene3d>
+    <dgm:sp3d/>
+    <dgm:txPr/>
+    <dgm:style>
+      <a:lnRef idx="2">
+        <a:scrgbClr r="0" g="0" b="0"/>
+      </a:lnRef>
+      <a:fillRef idx="1">
+        <a:scrgbClr r="0" g="0" b="0"/>
+      </a:fillRef>
+      <a:effectRef idx="0">
+        <a:scrgbClr r="0" g="0" b="0"/>
+      </a:effectRef>
+      <a:fontRef idx="minor">
+        <a:schemeClr val="lt1"/>
+      </a:fontRef>
+    </dgm:style>
+  </dgm:styleLbl>
+  <dgm:styleLbl name="asst3">
+    <dgm:scene3d>
+      <a:camera prst="orthographicFront"/>
+      <a:lightRig rig="threePt" dir="t"/>
+    </dgm:scene3d>
+    <dgm:sp3d/>
+    <dgm:txPr/>
+    <dgm:style>
+      <a:lnRef idx="2">
+        <a:scrgbClr r="0" g="0" b="0"/>
+      </a:lnRef>
+      <a:fillRef idx="1">
+        <a:scrgbClr r="0" g="0" b="0"/>
+      </a:fillRef>
+      <a:effectRef idx="0">
+        <a:scrgbClr r="0" g="0" b="0"/>
+      </a:effectRef>
+      <a:fontRef idx="minor">
+        <a:schemeClr val="lt1"/>
+      </a:fontRef>
+    </dgm:style>
+  </dgm:styleLbl>
+  <dgm:styleLbl name="asst4">
+    <dgm:scene3d>
+      <a:camera prst="orthographicFront"/>
+      <a:lightRig rig="threePt" dir="t"/>
+    </dgm:scene3d>
+    <dgm:sp3d/>
+    <dgm:txPr/>
+    <dgm:style>
+      <a:lnRef idx="2">
+        <a:scrgbClr r="0" g="0" b="0"/>
+      </a:lnRef>
+      <a:fillRef idx="1">
+        <a:scrgbClr r="0" g="0" b="0"/>
+      </a:fillRef>
+      <a:effectRef idx="0">
+        <a:scrgbClr r="0" g="0" b="0"/>
+      </a:effectRef>
+      <a:fontRef idx="minor">
+        <a:schemeClr val="lt1"/>
+      </a:fontRef>
+    </dgm:style>
+  </dgm:styleLbl>
+  <dgm:styleLbl name="parChTrans2D1">
+    <dgm:scene3d>
+      <a:camera prst="orthographicFront"/>
+      <a:lightRig rig="threePt" dir="t"/>
+    </dgm:scene3d>
+    <dgm:sp3d/>
+    <dgm:txPr/>
+    <dgm:style>
+      <a:lnRef idx="2">
+        <a:scrgbClr r="0" g="0" b="0"/>
+      </a:lnRef>
+      <a:fillRef idx="1">
+        <a:scrgbClr r="0" g="0" b="0"/>
+      </a:fillRef>
+      <a:effectRef idx="0">
+        <a:scrgbClr r="0" g="0" b="0"/>
+      </a:effectRef>
+      <a:fontRef idx="minor">
+        <a:schemeClr val="lt1"/>
+      </a:fontRef>
+    </dgm:style>
+  </dgm:styleLbl>
+  <dgm:styleLbl name="parChTrans2D2">
+    <dgm:scene3d>
+      <a:camera prst="orthographicFront"/>
+      <a:lightRig rig="threePt" dir="t"/>
+    </dgm:scene3d>
+    <dgm:sp3d/>
+    <dgm:txPr/>
+    <dgm:style>
+      <a:lnRef idx="2">
+        <a:scrgbClr r="0" g="0" b="0"/>
+      </a:lnRef>
+      <a:fillRef idx="1">
+        <a:scrgbClr r="0" g="0" b="0"/>
+      </a:fillRef>
+      <a:effectRef idx="0">
+        <a:scrgbClr r="0" g="0" b="0"/>
+      </a:effectRef>
+      <a:fontRef idx="minor">
+        <a:schemeClr val="lt1"/>
+      </a:fontRef>
+    </dgm:style>
+  </dgm:styleLbl>
+  <dgm:styleLbl name="parChTrans2D3">
+    <dgm:scene3d>
+      <a:camera prst="orthographicFront"/>
+      <a:lightRig rig="threePt" dir="t"/>
+    </dgm:scene3d>
+    <dgm:sp3d/>
+    <dgm:txPr/>
+    <dgm:style>
+      <a:lnRef idx="2">
+        <a:scrgbClr r="0" g="0" b="0"/>
+      </a:lnRef>
+      <a:fillRef idx="1">
+        <a:scrgbClr r="0" g="0" b="0"/>
+      </a:fillRef>
+      <a:effectRef idx="0">
+        <a:scrgbClr r="0" g="0" b="0"/>
+      </a:effectRef>
+      <a:fontRef idx="minor">
+        <a:schemeClr val="lt1"/>
+      </a:fontRef>
+    </dgm:style>
+  </dgm:styleLbl>
+  <dgm:styleLbl name="parChTrans2D4">
+    <dgm:scene3d>
+      <a:camera prst="orthographicFront"/>
+      <a:lightRig rig="threePt" dir="t"/>
+    </dgm:scene3d>
+    <dgm:sp3d/>
+    <dgm:txPr/>
+    <dgm:style>
+      <a:lnRef idx="2">
+        <a:scrgbClr r="0" g="0" b="0"/>
+      </a:lnRef>
+      <a:fillRef idx="1">
+        <a:scrgbClr r="0" g="0" b="0"/>
+      </a:fillRef>
+      <a:effectRef idx="0">
+        <a:scrgbClr r="0" g="0" b="0"/>
+      </a:effectRef>
+      <a:fontRef idx="minor">
+        <a:schemeClr val="lt1"/>
+      </a:fontRef>
+    </dgm:style>
+  </dgm:styleLbl>
+  <dgm:styleLbl name="parChTrans1D1">
+    <dgm:scene3d>
+      <a:camera prst="orthographicFront"/>
+      <a:lightRig rig="threePt" dir="t"/>
+    </dgm:scene3d>
+    <dgm:sp3d/>
+    <dgm:txPr/>
+    <dgm:style>
+      <a:lnRef idx="2">
+        <a:scrgbClr r="0" g="0" b="0"/>
+      </a:lnRef>
+      <a:fillRef idx="0">
+        <a:scrgbClr r="0" g="0" b="0"/>
+      </a:fillRef>
+      <a:effectRef idx="0">
+        <a:scrgbClr r="0" g="0" b="0"/>
+      </a:effectRef>
+      <a:fontRef idx="minor"/>
+    </dgm:style>
+  </dgm:styleLbl>
+  <dgm:styleLbl name="parChTrans1D2">
+    <dgm:scene3d>
+      <a:camera prst="orthographicFront"/>
+      <a:lightRig rig="threePt" dir="t"/>
+    </dgm:scene3d>
+    <dgm:sp3d/>
+    <dgm:txPr/>
+    <dgm:style>
+      <a:lnRef idx="2">
+        <a:scrgbClr r="0" g="0" b="0"/>
+      </a:lnRef>
+      <a:fillRef idx="0">
+        <a:scrgbClr r="0" g="0" b="0"/>
+      </a:fillRef>
+      <a:effectRef idx="0">
+        <a:scrgbClr r="0" g="0" b="0"/>
+      </a:effectRef>
+      <a:fontRef idx="minor"/>
+    </dgm:style>
+  </dgm:styleLbl>
+  <dgm:styleLbl name="parChTrans1D3">
+    <dgm:scene3d>
+      <a:camera prst="orthographicFront"/>
+      <a:lightRig rig="threePt" dir="t"/>
+    </dgm:scene3d>
+    <dgm:sp3d/>
+    <dgm:txPr/>
+    <dgm:style>
+      <a:lnRef idx="2">
+        <a:scrgbClr r="0" g="0" b="0"/>
+      </a:lnRef>
+      <a:fillRef idx="0">
+        <a:scrgbClr r="0" g="0" b="0"/>
+      </a:fillRef>
+      <a:effectRef idx="0">
+        <a:scrgbClr r="0" g="0" b="0"/>
+      </a:effectRef>
+      <a:fontRef idx="minor"/>
+    </dgm:style>
+  </dgm:styleLbl>
+  <dgm:styleLbl name="parChTrans1D4">
+    <dgm:scene3d>
+      <a:camera prst="orthographicFront"/>
+      <a:lightRig rig="threePt" dir="t"/>
+    </dgm:scene3d>
+    <dgm:sp3d/>
+    <dgm:txPr/>
+    <dgm:style>
+      <a:lnRef idx="2">
+        <a:scrgbClr r="0" g="0" b="0"/>
+      </a:lnRef>
+      <a:fillRef idx="0">
+        <a:scrgbClr r="0" g="0" b="0"/>
+      </a:fillRef>
+      <a:effectRef idx="0">
+        <a:scrgbClr r="0" g="0" b="0"/>
+      </a:effectRef>
+      <a:fontRef idx="minor"/>
+    </dgm:style>
+  </dgm:styleLbl>
+  <dgm:styleLbl name="fgAcc1">
+    <dgm:scene3d>
+      <a:camera prst="orthographicFront"/>
+      <a:lightRig rig="threePt" dir="t"/>
+    </dgm:scene3d>
+    <dgm:sp3d/>
+    <dgm:txPr/>
+    <dgm:style>
+      <a:lnRef idx="2">
+        <a:scrgbClr r="0" g="0" b="0"/>
+      </a:lnRef>
+      <a:fillRef idx="1">
+        <a:scrgbClr r="0" g="0" b="0"/>
+      </a:fillRef>
+      <a:effectRef idx="0">
+        <a:scrgbClr r="0" g="0" b="0"/>
+      </a:effectRef>
+      <a:fontRef idx="minor"/>
+    </dgm:style>
+  </dgm:styleLbl>
+  <dgm:styleLbl name="conFgAcc1">
+    <dgm:scene3d>
+      <a:camera prst="orthographicFront"/>
+      <a:lightRig rig="threePt" dir="t"/>
+    </dgm:scene3d>
+    <dgm:sp3d/>
+    <dgm:txPr/>
+    <dgm:style>
+      <a:lnRef idx="2">
+        <a:scrgbClr r="0" g="0" b="0"/>
+      </a:lnRef>
+      <a:fillRef idx="1">
+        <a:scrgbClr r="0" g="0" b="0"/>
+      </a:fillRef>
+      <a:effectRef idx="0">
+        <a:scrgbClr r="0" g="0" b="0"/>
+      </a:effectRef>
+      <a:fontRef idx="minor"/>
+    </dgm:style>
+  </dgm:styleLbl>
+  <dgm:styleLbl name="alignAcc1">
+    <dgm:scene3d>
+      <a:camera prst="orthographicFront"/>
+      <a:lightRig rig="threePt" dir="t"/>
+    </dgm:scene3d>
+    <dgm:sp3d/>
+    <dgm:txPr/>
+    <dgm:style>
+      <a:lnRef idx="2">
+        <a:scrgbClr r="0" g="0" b="0"/>
+      </a:lnRef>
+      <a:fillRef idx="1">
+        <a:scrgbClr r="0" g="0" b="0"/>
+      </a:fillRef>
+      <a:effectRef idx="0">
+        <a:scrgbClr r="0" g="0" b="0"/>
+      </a:effectRef>
+      <a:fontRef idx="minor"/>
+    </dgm:style>
+  </dgm:styleLbl>
+  <dgm:styleLbl name="trAlignAcc1">
+    <dgm:scene3d>
+      <a:camera prst="orthographicFront"/>
+      <a:lightRig rig="threePt" dir="t"/>
+    </dgm:scene3d>
+    <dgm:sp3d/>
+    <dgm:txPr/>
+    <dgm:style>
+      <a:lnRef idx="1">
+        <a:scrgbClr r="0" g="0" b="0"/>
+      </a:lnRef>
+      <a:fillRef idx="1">
+        <a:scrgbClr r="0" g="0" b="0"/>
+      </a:fillRef>
+      <a:effectRef idx="0">
+        <a:scrgbClr r="0" g="0" b="0"/>
+      </a:effectRef>
+      <a:fontRef idx="minor"/>
+    </dgm:style>
+  </dgm:styleLbl>
+  <dgm:styleLbl name="bgAcc1">
+    <dgm:scene3d>
+      <a:camera prst="orthographicFront"/>
+      <a:lightRig rig="threePt" dir="t"/>
+    </dgm:scene3d>
+    <dgm:sp3d/>
+    <dgm:txPr/>
+    <dgm:style>
+      <a:lnRef idx="2">
+        <a:scrgbClr r="0" g="0" b="0"/>
+      </a:lnRef>
+      <a:fillRef idx="1">
+        <a:scrgbClr r="0" g="0" b="0"/>
+      </a:fillRef>
+      <a:effectRef idx="0">
+        <a:scrgbClr r="0" g="0" b="0"/>
+      </a:effectRef>
+      <a:fontRef idx="minor"/>
+    </dgm:style>
+  </dgm:styleLbl>
+  <dgm:styleLbl name="solidFgAcc1">
+    <dgm:scene3d>
+      <a:camera prst="orthographicFront"/>
+      <a:lightRig rig="threePt" dir="t"/>
+    </dgm:scene3d>
+    <dgm:sp3d/>
+    <dgm:txPr/>
+    <dgm:style>
+      <a:lnRef idx="2">
+        <a:scrgbClr r="0" g="0" b="0"/>
+      </a:lnRef>
+      <a:fillRef idx="1">
+        <a:scrgbClr r="0" g="0" b="0"/>
+      </a:fillRef>
+      <a:effectRef idx="0">
+        <a:scrgbClr r="0" g="0" b="0"/>
+      </a:effectRef>
+      <a:fontRef idx="minor"/>
+    </dgm:style>
+  </dgm:styleLbl>
+  <dgm:styleLbl name="solidAlignAcc1">
+    <dgm:scene3d>
+      <a:camera prst="orthographicFront"/>
+      <a:lightRig rig="threePt" dir="t"/>
+    </dgm:scene3d>
+    <dgm:sp3d/>
+    <dgm:txPr/>
+    <dgm:style>
+      <a:lnRef idx="2">
+        <a:scrgbClr r="0" g="0" b="0"/>
+      </a:lnRef>
+      <a:fillRef idx="1">
+        <a:scrgbClr r="0" g="0" b="0"/>
+      </a:fillRef>
+      <a:effectRef idx="0">
+        <a:scrgbClr r="0" g="0" b="0"/>
+      </a:effectRef>
+      <a:fontRef idx="minor"/>
+    </dgm:style>
+  </dgm:styleLbl>
+  <dgm:styleLbl name="solidBgAcc1">
+    <dgm:scene3d>
+      <a:camera prst="orthographicFront"/>
+      <a:lightRig rig="threePt" dir="t"/>
+    </dgm:scene3d>
+    <dgm:sp3d/>
+    <dgm:txPr/>
+    <dgm:style>
+      <a:lnRef idx="2">
+        <a:scrgbClr r="0" g="0" b="0"/>
+      </a:lnRef>
+      <a:fillRef idx="1">
+        <a:scrgbClr r="0" g="0" b="0"/>
+      </a:fillRef>
+      <a:effectRef idx="0">
+        <a:scrgbClr r="0" g="0" b="0"/>
+      </a:effectRef>
+      <a:fontRef idx="minor"/>
+    </dgm:style>
+  </dgm:styleLbl>
+  <dgm:styleLbl name="fgAccFollowNode1">
+    <dgm:scene3d>
+      <a:camera prst="orthographicFront"/>
+      <a:lightRig rig="threePt" dir="t"/>
+    </dgm:scene3d>
+    <dgm:sp3d/>
+    <dgm:txPr/>
+    <dgm:style>
+      <a:lnRef idx="2">
+        <a:scrgbClr r="0" g="0" b="0"/>
+      </a:lnRef>
+      <a:fillRef idx="1">
+        <a:scrgbClr r="0" g="0" b="0"/>
+      </a:fillRef>
+      <a:effectRef idx="0">
+        <a:scrgbClr r="0" g="0" b="0"/>
+      </a:effectRef>
+      <a:fontRef idx="minor"/>
+    </dgm:style>
+  </dgm:styleLbl>
+  <dgm:styleLbl name="alignAccFollowNode1">
+    <dgm:scene3d>
+      <a:camera prst="orthographicFront"/>
+      <a:lightRig rig="threePt" dir="t"/>
+    </dgm:scene3d>
+    <dgm:sp3d/>
+    <dgm:txPr/>
+    <dgm:style>
+      <a:lnRef idx="2">
+        <a:scrgbClr r="0" g="0" b="0"/>
+      </a:lnRef>
+      <a:fillRef idx="1">
+        <a:scrgbClr r="0" g="0" b="0"/>
+      </a:fillRef>
+      <a:effectRef idx="0">
+        <a:scrgbClr r="0" g="0" b="0"/>
+      </a:effectRef>
+      <a:fontRef idx="minor"/>
+    </dgm:style>
+  </dgm:styleLbl>
+  <dgm:styleLbl name="bgAccFollowNode1">
+    <dgm:scene3d>
+      <a:camera prst="orthographicFront"/>
+      <a:lightRig rig="threePt" dir="t"/>
+    </dgm:scene3d>
+    <dgm:sp3d/>
+    <dgm:txPr/>
+    <dgm:style>
+      <a:lnRef idx="2">
+        <a:scrgbClr r="0" g="0" b="0"/>
+      </a:lnRef>
+      <a:fillRef idx="1">
+        <a:scrgbClr r="0" g="0" b="0"/>
+      </a:fillRef>
+      <a:effectRef idx="0">
+        <a:scrgbClr r="0" g="0" b="0"/>
+      </a:effectRef>
+      <a:fontRef idx="minor"/>
+    </dgm:style>
+  </dgm:styleLbl>
+  <dgm:styleLbl name="fgAcc0">
+    <dgm:scene3d>
+      <a:camera prst="orthographicFront"/>
+      <a:lightRig rig="threePt" dir="t"/>
+    </dgm:scene3d>
+    <dgm:sp3d/>
+    <dgm:txPr/>
+    <dgm:style>
+      <a:lnRef idx="2">
+        <a:scrgbClr r="0" g="0" b="0"/>
+      </a:lnRef>
+      <a:fillRef idx="1">
+        <a:scrgbClr r="0" g="0" b="0"/>
+      </a:fillRef>
+      <a:effectRef idx="0">
+        <a:scrgbClr r="0" g="0" b="0"/>
+      </a:effectRef>
+      <a:fontRef idx="minor"/>
+    </dgm:style>
+  </dgm:styleLbl>
+  <dgm:styleLbl name="fgAcc2">
+    <dgm:scene3d>
+      <a:camera prst="orthographicFront"/>
+      <a:lightRig rig="threePt" dir="t"/>
+    </dgm:scene3d>
+    <dgm:sp3d/>
+    <dgm:txPr/>
+    <dgm:style>
+      <a:lnRef idx="2">
+        <a:scrgbClr r="0" g="0" b="0"/>
+      </a:lnRef>
+      <a:fillRef idx="1">
+        <a:scrgbClr r="0" g="0" b="0"/>
+      </a:fillRef>
+      <a:effectRef idx="0">
+        <a:scrgbClr r="0" g="0" b="0"/>
+      </a:effectRef>
+      <a:fontRef idx="minor"/>
+    </dgm:style>
+  </dgm:styleLbl>
+  <dgm:styleLbl name="fgAcc3">
+    <dgm:scene3d>
+      <a:camera prst="orthographicFront"/>
+      <a:lightRig rig="threePt" dir="t"/>
+    </dgm:scene3d>
+    <dgm:sp3d/>
+    <dgm:txPr/>
+    <dgm:style>
+      <a:lnRef idx="2">
+        <a:scrgbClr r="0" g="0" b="0"/>
+      </a:lnRef>
+      <a:fillRef idx="1">
+        <a:scrgbClr r="0" g="0" b="0"/>
+      </a:fillRef>
+      <a:effectRef idx="0">
+        <a:scrgbClr r="0" g="0" b="0"/>
+      </a:effectRef>
+      <a:fontRef idx="minor"/>
+    </dgm:style>
+  </dgm:styleLbl>
+  <dgm:styleLbl name="fgAcc4">
+    <dgm:scene3d>
+      <a:camera prst="orthographicFront"/>
+      <a:lightRig rig="threePt" dir="t"/>
+    </dgm:scene3d>
+    <dgm:sp3d/>
+    <dgm:txPr/>
+    <dgm:style>
+      <a:lnRef idx="2">
+        <a:scrgbClr r="0" g="0" b="0"/>
+      </a:lnRef>
+      <a:fillRef idx="1">
+        <a:scrgbClr r="0" g="0" b="0"/>
+      </a:fillRef>
+      <a:effectRef idx="0">
+        <a:scrgbClr r="0" g="0" b="0"/>
+      </a:effectRef>
+      <a:fontRef idx="minor"/>
+    </dgm:style>
+  </dgm:styleLbl>
+  <dgm:styleLbl name="bgShp">
+    <dgm:scene3d>
+      <a:camera prst="orthographicFront"/>
+      <a:lightRig rig="threePt" dir="t"/>
+    </dgm:scene3d>
+    <dgm:sp3d/>
+    <dgm:txPr/>
+    <dgm:style>
+      <a:lnRef idx="0">
+        <a:scrgbClr r="0" g="0" b="0"/>
+      </a:lnRef>
+      <a:fillRef idx="1">
+        <a:scrgbClr r="0" g="0" b="0"/>
+      </a:fillRef>
+      <a:effectRef idx="0">
+        <a:scrgbClr r="0" g="0" b="0"/>
+      </a:effectRef>
+      <a:fontRef idx="minor"/>
+    </dgm:style>
+  </dgm:styleLbl>
+  <dgm:styleLbl name="dkBgShp">
+    <dgm:scene3d>
+      <a:camera prst="orthographicFront"/>
+      <a:lightRig rig="threePt" dir="t"/>
+    </dgm:scene3d>
+    <dgm:sp3d/>
+    <dgm:txPr/>
+    <dgm:style>
+      <a:lnRef idx="0">
+        <a:scrgbClr r="0" g="0" b="0"/>
+      </a:lnRef>
+      <a:fillRef idx="1">
+        <a:scrgbClr r="0" g="0" b="0"/>
+      </a:fillRef>
+      <a:effectRef idx="0">
+        <a:scrgbClr r="0" g="0" b="0"/>
+      </a:effectRef>
+      <a:fontRef idx="minor"/>
+    </dgm:style>
+  </dgm:styleLbl>
+  <dgm:styleLbl name="trBgShp">
+    <dgm:scene3d>
+      <a:camera prst="orthographicFront"/>
+      <a:lightRig rig="threePt" dir="t"/>
+    </dgm:scene3d>
+    <dgm:sp3d/>
+    <dgm:txPr/>
+    <dgm:style>
+      <a:lnRef idx="0">
+        <a:scrgbClr r="0" g="0" b="0"/>
+      </a:lnRef>
+      <a:fillRef idx="1">
+        <a:scrgbClr r="0" g="0" b="0"/>
+      </a:fillRef>
+      <a:effectRef idx="0">
+        <a:scrgbClr r="0" g="0" b="0"/>
+      </a:effectRef>
+      <a:fontRef idx="minor"/>
+    </dgm:style>
+  </dgm:styleLbl>
+  <dgm:styleLbl name="fgShp">
+    <dgm:scene3d>
+      <a:camera prst="orthographicFront"/>
+      <a:lightRig rig="threePt" dir="t"/>
+    </dgm:scene3d>
+    <dgm:sp3d/>
+    <dgm:txPr/>
+    <dgm:style>
+      <a:lnRef idx="2">
+        <a:scrgbClr r="0" g="0" b="0"/>
+      </a:lnRef>
+      <a:fillRef idx="1">
+        <a:scrgbClr r="0" g="0" b="0"/>
+      </a:fillRef>
+      <a:effectRef idx="0">
+        <a:scrgbClr r="0" g="0" b="0"/>
+      </a:effectRef>
+      <a:fontRef idx="minor"/>
+    </dgm:style>
+  </dgm:styleLbl>
+  <dgm:styleLbl name="revTx">
+    <dgm:scene3d>
+      <a:camera prst="orthographicFront"/>
+      <a:lightRig rig="threePt" dir="t"/>
+    </dgm:scene3d>
+    <dgm:sp3d/>
+    <dgm:txPr/>
+    <dgm:style>
+      <a:lnRef idx="0">
+        <a:scrgbClr r="0" g="0" b="0"/>
+      </a:lnRef>
+      <a:fillRef idx="0">
+        <a:scrgbClr r="0" g="0" b="0"/>
+      </a:fillRef>
+      <a:effectRef idx="0">
+        <a:scrgbClr r="0" g="0" b="0"/>
+      </a:effectRef>
+      <a:fontRef idx="minor"/>
+    </dgm:style>
+  </dgm:styleLbl>
+</dgm:styleDef>
+</file>
+
+<file path=ppt/notesMasters/notesMaster1.xml><?xml version="1.0" encoding="utf-8"?>
+<p:notesMaster xmlns:a="http://schemas.openxmlformats.org/drawingml/2006/main" xmlns:r="http://schemas.openxmlformats.org/officeDocument/2006/relationships" xmlns:p="http://schemas.openxmlformats.org/presentationml/2006/main">
+  <p:cSld>
+    <p:bg>
+      <p:bgRef idx="1001">
+        <a:schemeClr val="bg1"/>
+      </p:bgRef>
+    </p:bg>
+    <p:spTree>
+      <p:nvGrpSpPr>
+        <p:cNvPr id="1" name=""/>
+        <p:cNvGrpSpPr/>
+        <p:nvPr/>
+      </p:nvGrpSpPr>
+      <p:grpSpPr>
+        <a:xfrm>
+          <a:off x="0" y="0"/>
+          <a:ext cx="0" cy="0"/>
+          <a:chOff x="0" y="0"/>
+          <a:chExt cx="0" cy="0"/>
+        </a:xfrm>
+      </p:grpSpPr>
+      <p:sp>
+        <p:nvSpPr>
+          <p:cNvPr id="2" name="ヘッダー プレースホルダー 1"/>
+          <p:cNvSpPr>
+            <a:spLocks noGrp="1"/>
+          </p:cNvSpPr>
+          <p:nvPr>
+            <p:ph type="hdr" sz="quarter"/>
+          </p:nvPr>
+        </p:nvSpPr>
+        <p:spPr>
+          <a:xfrm>
+            <a:off x="0" y="0"/>
+            <a:ext cx="2971800" cy="458788"/>
+          </a:xfrm>
+          <a:prstGeom prst="rect">
+            <a:avLst/>
+          </a:prstGeom>
+        </p:spPr>
+        <p:txBody>
+          <a:bodyPr vert="horz" lIns="91440" tIns="45720" rIns="91440" bIns="45720" rtlCol="0"/>
+          <a:lstStyle>
+            <a:lvl1pPr algn="l">
+              <a:defRPr sz="1200"/>
+            </a:lvl1pPr>
+          </a:lstStyle>
+          <a:p>
+            <a:endParaRPr kumimoji="1" lang="ja-JP" altLang="en-US"/>
+          </a:p>
+        </p:txBody>
+      </p:sp>
+      <p:sp>
+        <p:nvSpPr>
+          <p:cNvPr id="3" name="日付プレースホルダー 2"/>
+          <p:cNvSpPr>
+            <a:spLocks noGrp="1"/>
+          </p:cNvSpPr>
+          <p:nvPr>
+            <p:ph type="dt" idx="1"/>
+          </p:nvPr>
+        </p:nvSpPr>
+        <p:spPr>
+          <a:xfrm>
+            <a:off x="3884613" y="0"/>
+            <a:ext cx="2971800" cy="458788"/>
+          </a:xfrm>
+          <a:prstGeom prst="rect">
+            <a:avLst/>
+          </a:prstGeom>
+        </p:spPr>
+        <p:txBody>
+          <a:bodyPr vert="horz" lIns="91440" tIns="45720" rIns="91440" bIns="45720" rtlCol="0"/>
+          <a:lstStyle>
+            <a:lvl1pPr algn="r">
+              <a:defRPr sz="1200"/>
+            </a:lvl1pPr>
+          </a:lstStyle>
+          <a:p>
+            <a:fld id="{8C8C1AF5-5307-4BEA-AC27-AC42AC02FE6C}" type="datetimeFigureOut">
+              <a:rPr kumimoji="1" lang="ja-JP" altLang="en-US" smtClean="0"/>
+              <a:t>2026/10/15</a:t>
+            </a:fld>
+            <a:endParaRPr kumimoji="1" lang="ja-JP" altLang="en-US"/>
+          </a:p>
+        </p:txBody>
+      </p:sp>
+      <p:sp>
+        <p:nvSpPr>
+          <p:cNvPr id="4" name="スライド イメージ プレースホルダー 3"/>
+          <p:cNvSpPr>
+            <a:spLocks noGrp="1" noRot="1" noChangeAspect="1"/>
+          </p:cNvSpPr>
+          <p:nvPr>
+            <p:ph type="sldImg" idx="2"/>
+          </p:nvPr>
+        </p:nvSpPr>
+        <p:spPr>
+          <a:xfrm>
+            <a:off x="685800" y="1143000"/>
+            <a:ext cx="5486400" cy="3086100"/>
+          </a:xfrm>
+          <a:prstGeom prst="rect">
+            <a:avLst/>
+          </a:prstGeom>
+          <a:noFill/>
+          <a:ln w="12700">
+            <a:solidFill>
+              <a:prstClr val="black"/>
+            </a:solidFill>
+          </a:ln>
+        </p:spPr>
+        <p:txBody>
+          <a:bodyPr vert="horz" lIns="91440" tIns="45720" rIns="91440" bIns="45720" rtlCol="0" anchor="ctr"/>
+          <a:lstStyle/>
+          <a:p>
+            <a:endParaRPr lang="ja-JP" altLang="en-US"/>
+          </a:p>
+        </p:txBody>
+      </p:sp>
+      <p:sp>
+        <p:nvSpPr>
+          <p:cNvPr id="5" name="ノート プレースホルダー 4"/>
+          <p:cNvSpPr>
+            <a:spLocks noGrp="1"/>
+          </p:cNvSpPr>
+          <p:nvPr>
+            <p:ph type="body" sz="quarter" idx="3"/>
+          </p:nvPr>
+        </p:nvSpPr>
+        <p:spPr>
+          <a:xfrm>
+            <a:off x="685800" y="4400550"/>
+            <a:ext cx="5486400" cy="3600450"/>
+          </a:xfrm>
+          <a:prstGeom prst="rect">
+            <a:avLst/>
+          </a:prstGeom>
+        </p:spPr>
+        <p:txBody>
+          <a:bodyPr vert="horz" lIns="91440" tIns="45720" rIns="91440" bIns="45720" rtlCol="0"/>
+          <a:lstStyle/>
+          <a:p>
+            <a:pPr lvl="0"/>
+            <a:r>
+              <a:rPr kumimoji="1" lang="ja-JP" altLang="en-US"/>
+              <a:t>マスター テキストの書式設定</a:t>
+            </a:r>
+          </a:p>
+          <a:p>
+            <a:pPr lvl="1"/>
+            <a:r>
+              <a:rPr kumimoji="1" lang="ja-JP" altLang="en-US"/>
+              <a:t>第 </a:t>
+            </a:r>
+            <a:r>
+              <a:rPr kumimoji="1" lang="en-US" altLang="ja-JP"/>
+              <a:t>2 </a:t>
+            </a:r>
+            <a:r>
+              <a:rPr kumimoji="1" lang="ja-JP" altLang="en-US"/>
+              <a:t>レベル</a:t>
+            </a:r>
+          </a:p>
+          <a:p>
+            <a:pPr lvl="2"/>
+            <a:r>
+              <a:rPr kumimoji="1" lang="ja-JP" altLang="en-US"/>
+              <a:t>第 </a:t>
+            </a:r>
+            <a:r>
+              <a:rPr kumimoji="1" lang="en-US" altLang="ja-JP"/>
+              <a:t>3 </a:t>
+            </a:r>
+            <a:r>
+              <a:rPr kumimoji="1" lang="ja-JP" altLang="en-US"/>
+              <a:t>レベル</a:t>
+            </a:r>
+          </a:p>
+          <a:p>
+            <a:pPr lvl="3"/>
+            <a:r>
+              <a:rPr kumimoji="1" lang="ja-JP" altLang="en-US"/>
+              <a:t>第 </a:t>
+            </a:r>
+            <a:r>
+              <a:rPr kumimoji="1" lang="en-US" altLang="ja-JP"/>
+              <a:t>4 </a:t>
+            </a:r>
+            <a:r>
+              <a:rPr kumimoji="1" lang="ja-JP" altLang="en-US"/>
+              <a:t>レベル</a:t>
+            </a:r>
+          </a:p>
+          <a:p>
+            <a:pPr lvl="4"/>
+            <a:r>
+              <a:rPr kumimoji="1" lang="ja-JP" altLang="en-US"/>
+              <a:t>第 </a:t>
+            </a:r>
+            <a:r>
+              <a:rPr kumimoji="1" lang="en-US" altLang="ja-JP"/>
+              <a:t>5 </a:t>
+            </a:r>
+            <a:r>
+              <a:rPr kumimoji="1" lang="ja-JP" altLang="en-US"/>
+              <a:t>レベル</a:t>
+            </a:r>
+          </a:p>
+        </p:txBody>
+      </p:sp>
+      <p:sp>
+        <p:nvSpPr>
+          <p:cNvPr id="6" name="フッター プレースホルダー 5"/>
+          <p:cNvSpPr>
+            <a:spLocks noGrp="1"/>
+          </p:cNvSpPr>
+          <p:nvPr>
+            <p:ph type="ftr" sz="quarter" idx="4"/>
+          </p:nvPr>
+        </p:nvSpPr>
+        <p:spPr>
+          <a:xfrm>
+            <a:off x="0" y="8685213"/>
+            <a:ext cx="2971800" cy="458787"/>
+          </a:xfrm>
+          <a:prstGeom prst="rect">
+            <a:avLst/>
+          </a:prstGeom>
+        </p:spPr>
+        <p:txBody>
+          <a:bodyPr vert="horz" lIns="91440" tIns="45720" rIns="91440" bIns="45720" rtlCol="0" anchor="b"/>
+          <a:lstStyle>
+            <a:lvl1pPr algn="l">
+              <a:defRPr sz="1200"/>
+            </a:lvl1pPr>
+          </a:lstStyle>
+          <a:p>
+            <a:endParaRPr kumimoji="1" lang="ja-JP" altLang="en-US"/>
+          </a:p>
+        </p:txBody>
+      </p:sp>
+      <p:sp>
+        <p:nvSpPr>
+          <p:cNvPr id="7" name="スライド番号プレースホルダー 6"/>
+          <p:cNvSpPr>
+            <a:spLocks noGrp="1"/>
+          </p:cNvSpPr>
+          <p:nvPr>
+            <p:ph type="sldNum" sz="quarter" idx="5"/>
+          </p:nvPr>
+        </p:nvSpPr>
+        <p:spPr>
+          <a:xfrm>
+            <a:off x="3884613" y="8685213"/>
+            <a:ext cx="2971800" cy="458787"/>
+          </a:xfrm>
+          <a:prstGeom prst="rect">
+            <a:avLst/>
+          </a:prstGeom>
+        </p:spPr>
+        <p:txBody>
+          <a:bodyPr vert="horz" lIns="91440" tIns="45720" rIns="91440" bIns="45720" rtlCol="0" anchor="b"/>
+          <a:lstStyle>
+            <a:lvl1pPr algn="r">
+              <a:defRPr sz="1200"/>
+            </a:lvl1pPr>
+          </a:lstStyle>
+          <a:p>
+            <a:fld id="{E0B12A8F-3087-4354-AA38-8C50AF9724C0}" type="slidenum">
+              <a:rPr kumimoji="1" lang="ja-JP" altLang="en-US" smtClean="0"/>
+              <a:t>‹#›</a:t>
+            </a:fld>
+            <a:endParaRPr kumimoji="1" lang="ja-JP" altLang="en-US"/>
+          </a:p>
+        </p:txBody>
+      </p:sp>
+    </p:spTree>
+    <p:extLst>
+      <p:ext uri="{BB962C8B-B14F-4D97-AF65-F5344CB8AC3E}">
+        <p14:creationId xmlns:p14="http://schemas.microsoft.com/office/powerpoint/2010/main" val="2518451534"/>
+      </p:ext>
+    </p:extLst>
+  </p:cSld>
+  <p:clrMap bg1="lt1" tx1="dk1" bg2="lt2" tx2="dk2" accent1="accent1" accent2="accent2" accent3="accent3" accent4="accent4" accent5="accent5" accent6="accent6" hlink="hlink" folHlink="folHlink"/>
+  <p:notesStyle>
+    <a:lvl1pPr marL="0" algn="l" defTabSz="914400" rtl="0" eaLnBrk="1" latinLnBrk="0" hangingPunct="1">
+      <a:defRPr kumimoji="1" sz="1200" kern="1200">
+        <a:solidFill>
+          <a:schemeClr val="tx1"/>
+        </a:solidFill>
+        <a:latin typeface="+mn-lt"/>
+        <a:ea typeface="+mn-ea"/>
+        <a:cs typeface="+mn-cs"/>
+      </a:defRPr>
+    </a:lvl1pPr>
+    <a:lvl2pPr marL="457200" algn="l" defTabSz="914400" rtl="0" eaLnBrk="1" latinLnBrk="0" hangingPunct="1">
+      <a:defRPr kumimoji="1" sz="1200" kern="1200">
+        <a:solidFill>
+          <a:schemeClr val="tx1"/>
+        </a:solidFill>
+        <a:latin typeface="+mn-lt"/>
+        <a:ea typeface="+mn-ea"/>
+        <a:cs typeface="+mn-cs"/>
+      </a:defRPr>
+    </a:lvl2pPr>
+    <a:lvl3pPr marL="914400" algn="l" defTabSz="914400" rtl="0" eaLnBrk="1" latinLnBrk="0" hangingPunct="1">
+      <a:defRPr kumimoji="1" sz="1200" kern="1200">
+        <a:solidFill>
+          <a:schemeClr val="tx1"/>
+        </a:solidFill>
+        <a:latin typeface="+mn-lt"/>
+        <a:ea typeface="+mn-ea"/>
+        <a:cs typeface="+mn-cs"/>
+      </a:defRPr>
+    </a:lvl3pPr>
+    <a:lvl4pPr marL="1371600" algn="l" defTabSz="914400" rtl="0" eaLnBrk="1" latinLnBrk="0" hangingPunct="1">
+      <a:defRPr kumimoji="1" sz="1200" kern="1200">
+        <a:solidFill>
+          <a:schemeClr val="tx1"/>
+        </a:solidFill>
+        <a:latin typeface="+mn-lt"/>
+        <a:ea typeface="+mn-ea"/>
+        <a:cs typeface="+mn-cs"/>
+      </a:defRPr>
+    </a:lvl4pPr>
+    <a:lvl5pPr marL="1828800" algn="l" defTabSz="914400" rtl="0" eaLnBrk="1" latinLnBrk="0" hangingPunct="1">
+      <a:defRPr kumimoji="1" sz="1200" kern="1200">
+        <a:solidFill>
+          <a:schemeClr val="tx1"/>
+        </a:solidFill>
+        <a:latin typeface="+mn-lt"/>
+        <a:ea typeface="+mn-ea"/>
+        <a:cs typeface="+mn-cs"/>
+      </a:defRPr>
+    </a:lvl5pPr>
+    <a:lvl6pPr marL="2286000" algn="l" defTabSz="914400" rtl="0" eaLnBrk="1" latinLnBrk="0" hangingPunct="1">
+      <a:defRPr kumimoji="1" sz="1200" kern="1200">
+        <a:solidFill>
+          <a:schemeClr val="tx1"/>
+        </a:solidFill>
+        <a:latin typeface="+mn-lt"/>
+        <a:ea typeface="+mn-ea"/>
+        <a:cs typeface="+mn-cs"/>
+      </a:defRPr>
+    </a:lvl6pPr>
+    <a:lvl7pPr marL="2743200" algn="l" defTabSz="914400" rtl="0" eaLnBrk="1" latinLnBrk="0" hangingPunct="1">
+      <a:defRPr kumimoji="1" sz="1200" kern="1200">
+        <a:solidFill>
+          <a:schemeClr val="tx1"/>
+        </a:solidFill>
+        <a:latin typeface="+mn-lt"/>
+        <a:ea typeface="+mn-ea"/>
+        <a:cs typeface="+mn-cs"/>
+      </a:defRPr>
+    </a:lvl7pPr>
+    <a:lvl8pPr marL="3200400" algn="l" defTabSz="914400" rtl="0" eaLnBrk="1" latinLnBrk="0" hangingPunct="1">
+      <a:defRPr kumimoji="1" sz="1200" kern="1200">
+        <a:solidFill>
+          <a:schemeClr val="tx1"/>
+        </a:solidFill>
+        <a:latin typeface="+mn-lt"/>
+        <a:ea typeface="+mn-ea"/>
+        <a:cs typeface="+mn-cs"/>
+      </a:defRPr>
+    </a:lvl8pPr>
+    <a:lvl9pPr marL="3657600" algn="l" defTabSz="914400" rtl="0" eaLnBrk="1" latinLnBrk="0" hangingPunct="1">
+      <a:defRPr kumimoji="1" sz="1200" kern="1200">
+        <a:solidFill>
+          <a:schemeClr val="tx1"/>
+        </a:solidFill>
+        <a:latin typeface="+mn-lt"/>
+        <a:ea typeface="+mn-ea"/>
+        <a:cs typeface="+mn-cs"/>
+      </a:defRPr>
+    </a:lvl9pPr>
+  </p:notesStyle>
+</p:notesMaster>
+</file>
+
+<file path=ppt/notesSlides/notesSlide1.xml><?xml version="1.0" encoding="utf-8"?>
+<p:notes xmlns:a="http://schemas.openxmlformats.org/drawingml/2006/main" xmlns:r="http://schemas.openxmlformats.org/officeDocument/2006/relationships" xmlns:p="http://schemas.openxmlformats.org/presentationml/2006/main">
+  <p:cSld>
+    <p:spTree>
+      <p:nvGrpSpPr>
+        <p:cNvPr id="1" name=""/>
+        <p:cNvGrpSpPr/>
+        <p:nvPr/>
+      </p:nvGrpSpPr>
+      <p:grpSpPr>
+        <a:xfrm>
+          <a:off x="0" y="0"/>
+          <a:ext cx="0" cy="0"/>
+          <a:chOff x="0" y="0"/>
+          <a:chExt cx="0" cy="0"/>
+        </a:xfrm>
+      </p:grpSpPr>
+      <p:sp>
+        <p:nvSpPr>
+          <p:cNvPr id="2" name="スライド イメージ プレースホルダー 1"/>
+          <p:cNvSpPr>
+            <a:spLocks noGrp="1" noRot="1" noChangeAspect="1"/>
+          </p:cNvSpPr>
+          <p:nvPr>
+            <p:ph type="sldImg"/>
+          </p:nvPr>
+        </p:nvSpPr>
+        <p:spPr/>
+      </p:sp>
+      <p:sp>
+        <p:nvSpPr>
+          <p:cNvPr id="3" name="ノート プレースホルダー 2"/>
+          <p:cNvSpPr>
+            <a:spLocks noGrp="1"/>
+          </p:cNvSpPr>
+          <p:nvPr>
+            <p:ph type="body" idx="1"/>
+          </p:nvPr>
+        </p:nvSpPr>
+        <p:spPr/>
+        <p:txBody>
+          <a:bodyPr/>
+          <a:lstStyle/>
+          <a:p>
+            <a:endParaRPr kumimoji="1" lang="ja-JP" altLang="en-US" dirty="0"/>
+          </a:p>
+        </p:txBody>
+      </p:sp>
+      <p:sp>
+        <p:nvSpPr>
+          <p:cNvPr id="4" name="スライド番号プレースホルダー 3"/>
+          <p:cNvSpPr>
+            <a:spLocks noGrp="1"/>
+          </p:cNvSpPr>
+          <p:nvPr>
+            <p:ph type="sldNum" sz="quarter" idx="5"/>
+          </p:nvPr>
+        </p:nvSpPr>
+        <p:spPr/>
+        <p:txBody>
+          <a:bodyPr/>
+          <a:lstStyle/>
+          <a:p>
+            <a:fld id="{E0B12A8F-3087-4354-AA38-8C50AF9724C0}" type="slidenum">
+              <a:rPr kumimoji="1" lang="ja-JP" altLang="en-US" smtClean="0"/>
+              <a:t>4</a:t>
+            </a:fld>
+            <a:endParaRPr kumimoji="1" lang="ja-JP" altLang="en-US"/>
+          </a:p>
+        </p:txBody>
+      </p:sp>
+    </p:spTree>
+    <p:extLst>
+      <p:ext uri="{BB962C8B-B14F-4D97-AF65-F5344CB8AC3E}">
+        <p14:creationId xmlns:p14="http://schemas.microsoft.com/office/powerpoint/2010/main" val="3879083273"/>
+      </p:ext>
+    </p:extLst>
+  </p:cSld>
+  <p:clrMapOvr>
+    <a:masterClrMapping/>
+  </p:clrMapOvr>
+</p:notes>
 </file>
 
 <file path=ppt/slideLayouts/slideLayout1.xml><?xml version="1.0" encoding="utf-8"?>
@@ -339,7 +4136,7 @@
           <a:p>
             <a:fld id="{B3191E36-DE35-43E6-928F-4F0F238BF226}" type="datetimeFigureOut">
               <a:rPr kumimoji="1" lang="ja-JP" altLang="en-US" smtClean="0"/>
-              <a:t>2026/10/8</a:t>
+              <a:t>2026/10/15</a:t>
             </a:fld>
             <a:endParaRPr kumimoji="1" lang="ja-JP" altLang="en-US"/>
           </a:p>
@@ -569,7 +4366,7 @@
           <a:p>
             <a:fld id="{B3191E36-DE35-43E6-928F-4F0F238BF226}" type="datetimeFigureOut">
               <a:rPr kumimoji="1" lang="ja-JP" altLang="en-US" smtClean="0"/>
-              <a:t>2026/10/8</a:t>
+              <a:t>2026/10/15</a:t>
             </a:fld>
             <a:endParaRPr kumimoji="1" lang="ja-JP" altLang="en-US"/>
           </a:p>
@@ -809,7 +4606,7 @@
           <a:p>
             <a:fld id="{B3191E36-DE35-43E6-928F-4F0F238BF226}" type="datetimeFigureOut">
               <a:rPr kumimoji="1" lang="ja-JP" altLang="en-US" smtClean="0"/>
-              <a:t>2026/10/8</a:t>
+              <a:t>2026/10/15</a:t>
             </a:fld>
             <a:endParaRPr kumimoji="1" lang="ja-JP" altLang="en-US"/>
           </a:p>
@@ -1039,7 +4836,7 @@
           <a:p>
             <a:fld id="{B3191E36-DE35-43E6-928F-4F0F238BF226}" type="datetimeFigureOut">
               <a:rPr kumimoji="1" lang="ja-JP" altLang="en-US" smtClean="0"/>
-              <a:t>2026/10/8</a:t>
+              <a:t>2026/10/15</a:t>
             </a:fld>
             <a:endParaRPr kumimoji="1" lang="ja-JP" altLang="en-US"/>
           </a:p>
@@ -1314,7 +5111,7 @@
           <a:p>
             <a:fld id="{B3191E36-DE35-43E6-928F-4F0F238BF226}" type="datetimeFigureOut">
               <a:rPr kumimoji="1" lang="ja-JP" altLang="en-US" smtClean="0"/>
-              <a:t>2026/10/8</a:t>
+              <a:t>2026/10/15</a:t>
             </a:fld>
             <a:endParaRPr kumimoji="1" lang="ja-JP" altLang="en-US"/>
           </a:p>
@@ -1643,7 +5440,7 @@
           <a:p>
             <a:fld id="{B3191E36-DE35-43E6-928F-4F0F238BF226}" type="datetimeFigureOut">
               <a:rPr kumimoji="1" lang="ja-JP" altLang="en-US" smtClean="0"/>
-              <a:t>2026/10/8</a:t>
+              <a:t>2026/10/15</a:t>
             </a:fld>
             <a:endParaRPr kumimoji="1" lang="ja-JP" altLang="en-US"/>
           </a:p>
@@ -2119,7 +5916,7 @@
           <a:p>
             <a:fld id="{B3191E36-DE35-43E6-928F-4F0F238BF226}" type="datetimeFigureOut">
               <a:rPr kumimoji="1" lang="ja-JP" altLang="en-US" smtClean="0"/>
-              <a:t>2026/10/8</a:t>
+              <a:t>2026/10/15</a:t>
             </a:fld>
             <a:endParaRPr kumimoji="1" lang="ja-JP" altLang="en-US"/>
           </a:p>
@@ -2260,7 +6057,7 @@
           <a:p>
             <a:fld id="{B3191E36-DE35-43E6-928F-4F0F238BF226}" type="datetimeFigureOut">
               <a:rPr kumimoji="1" lang="ja-JP" altLang="en-US" smtClean="0"/>
-              <a:t>2026/10/8</a:t>
+              <a:t>2026/10/15</a:t>
             </a:fld>
             <a:endParaRPr kumimoji="1" lang="ja-JP" altLang="en-US"/>
           </a:p>
@@ -2373,7 +6170,7 @@
           <a:p>
             <a:fld id="{B3191E36-DE35-43E6-928F-4F0F238BF226}" type="datetimeFigureOut">
               <a:rPr kumimoji="1" lang="ja-JP" altLang="en-US" smtClean="0"/>
-              <a:t>2026/10/8</a:t>
+              <a:t>2026/10/15</a:t>
             </a:fld>
             <a:endParaRPr kumimoji="1" lang="ja-JP" altLang="en-US"/>
           </a:p>
@@ -2716,7 +6513,7 @@
           <a:p>
             <a:fld id="{B3191E36-DE35-43E6-928F-4F0F238BF226}" type="datetimeFigureOut">
               <a:rPr kumimoji="1" lang="ja-JP" altLang="en-US" smtClean="0"/>
-              <a:t>2026/10/8</a:t>
+              <a:t>2026/10/15</a:t>
             </a:fld>
             <a:endParaRPr kumimoji="1" lang="ja-JP" altLang="en-US"/>
           </a:p>
@@ -3004,7 +6801,7 @@
           <a:p>
             <a:fld id="{B3191E36-DE35-43E6-928F-4F0F238BF226}" type="datetimeFigureOut">
               <a:rPr kumimoji="1" lang="ja-JP" altLang="en-US" smtClean="0"/>
-              <a:t>2026/10/8</a:t>
+              <a:t>2026/10/15</a:t>
             </a:fld>
             <a:endParaRPr kumimoji="1" lang="ja-JP" altLang="en-US"/>
           </a:p>
@@ -3277,7 +7074,7 @@
           <a:p>
             <a:fld id="{B3191E36-DE35-43E6-928F-4F0F238BF226}" type="datetimeFigureOut">
               <a:rPr kumimoji="1" lang="ja-JP" altLang="en-US" smtClean="0"/>
-              <a:t>2026/10/8</a:t>
+              <a:t>2026/10/15</a:t>
             </a:fld>
             <a:endParaRPr kumimoji="1" lang="ja-JP" altLang="en-US"/>
           </a:p>
@@ -3723,31 +7520,6 @@
           </a:p>
         </p:txBody>
       </p:sp>
-      <p:sp>
-        <p:nvSpPr>
-          <p:cNvPr id="3" name="字幕 2">
-            <a:extLst>
-              <a:ext uri="{FF2B5EF4-FFF2-40B4-BE49-F238E27FC236}">
-                <a16:creationId xmlns:a16="http://schemas.microsoft.com/office/drawing/2014/main" id="{14F923B0-1A1F-E9B4-81C8-C650E768663C}"/>
-              </a:ext>
-            </a:extLst>
-          </p:cNvPr>
-          <p:cNvSpPr>
-            <a:spLocks noGrp="1"/>
-          </p:cNvSpPr>
-          <p:nvPr>
-            <p:ph type="subTitle" idx="1"/>
-          </p:nvPr>
-        </p:nvSpPr>
-        <p:spPr/>
-        <p:txBody>
-          <a:bodyPr/>
-          <a:lstStyle/>
-          <a:p>
-            <a:endParaRPr kumimoji="1" lang="ja-JP" altLang="en-US"/>
-          </a:p>
-        </p:txBody>
-      </p:sp>
     </p:spTree>
     <p:extLst>
       <p:ext uri="{BB962C8B-B14F-4D97-AF65-F5344CB8AC3E}">
@@ -3912,7 +7684,7 @@
             <a:pPr lvl="1"/>
             <a:r>
               <a:rPr lang="ja-JP" altLang="en-US" dirty="0"/>
-              <a:t>ランクは</a:t>
+              <a:t>ランクは「</a:t>
             </a:r>
             <a:r>
               <a:rPr lang="en-US" altLang="ja-JP" dirty="0"/>
@@ -3920,15 +7692,51 @@
             </a:r>
             <a:r>
               <a:rPr lang="ja-JP" altLang="en-US" dirty="0"/>
-              <a:t>点以上</a:t>
+              <a:t>点以下 </a:t>
             </a:r>
             <a:r>
               <a:rPr lang="en-US" altLang="ja-JP" dirty="0"/>
-              <a:t>y</a:t>
+              <a:t>&amp; y</a:t>
             </a:r>
             <a:r>
               <a:rPr lang="ja-JP" altLang="en-US" dirty="0"/>
-              <a:t>点未満の形</a:t>
+              <a:t>点より大きい」の形</a:t>
+            </a:r>
+            <a:endParaRPr lang="en-US" altLang="ja-JP" dirty="0"/>
+          </a:p>
+          <a:p>
+            <a:pPr lvl="2"/>
+            <a:r>
+              <a:rPr lang="en-US" altLang="ja-JP" dirty="0"/>
+              <a:t>100</a:t>
+            </a:r>
+            <a:r>
+              <a:rPr lang="ja-JP" altLang="en-US" dirty="0"/>
+              <a:t>以下</a:t>
+            </a:r>
+            <a:r>
+              <a:rPr lang="en-US" altLang="ja-JP" dirty="0"/>
+              <a:t>80</a:t>
+            </a:r>
+            <a:r>
+              <a:rPr lang="ja-JP" altLang="en-US" dirty="0"/>
+              <a:t>より大きい → </a:t>
+            </a:r>
+            <a:r>
+              <a:rPr lang="en-US" altLang="ja-JP" dirty="0"/>
+              <a:t>100</a:t>
+            </a:r>
+            <a:r>
+              <a:rPr lang="ja-JP" altLang="en-US" dirty="0"/>
+              <a:t>以下 </a:t>
+            </a:r>
+            <a:r>
+              <a:rPr lang="en-US" altLang="ja-JP" dirty="0"/>
+              <a:t>79</a:t>
+            </a:r>
+            <a:r>
+              <a:rPr lang="ja-JP" altLang="en-US" dirty="0"/>
+              <a:t>以上</a:t>
             </a:r>
             <a:endParaRPr lang="en-US" altLang="ja-JP" dirty="0"/>
           </a:p>
@@ -3940,20 +7748,9 @@
             </a:r>
             <a:r>
               <a:rPr lang="ja-JP" altLang="en-US" dirty="0"/>
-              <a:t>は点数の高い順に並んでいる→ 値が大きすぎれば、下限を下げる</a:t>
-            </a:r>
-            <a:r>
-              <a:rPr lang="en-US" altLang="ja-JP" dirty="0"/>
-              <a:t>(</a:t>
-            </a:r>
-            <a:r>
-              <a:rPr lang="ja-JP" altLang="en-US" dirty="0"/>
-              <a:t>インデックスは下がる</a:t>
-            </a:r>
-            <a:r>
-              <a:rPr lang="en-US" altLang="ja-JP" dirty="0"/>
-              <a:t>)</a:t>
-            </a:r>
+              <a:t>は点数の高い順に並んでいる→ 値が大きすぎれば、点数下限を上げる →インデックスは下がる</a:t>
+            </a:r>
+            <a:endParaRPr lang="en-US" altLang="ja-JP" dirty="0"/>
           </a:p>
           <a:p>
             <a:pPr lvl="1"/>
@@ -4070,8 +7867,13 @@
             </a:r>
             <a:r>
               <a:rPr kumimoji="1" lang="en-US" altLang="ja-JP" dirty="0"/>
-              <a:t>:</a:t>
-            </a:r>
+              <a:t>: </a:t>
+            </a:r>
+            <a:r>
+              <a:rPr kumimoji="1" lang="ja-JP" altLang="en-US" dirty="0"/>
+              <a:t>ハッシュ法を使って配列に格納する</a:t>
+            </a:r>
+            <a:endParaRPr kumimoji="1" lang="en-US" altLang="ja-JP" dirty="0"/>
           </a:p>
           <a:p>
             <a:r>
@@ -4211,8 +8013,24 @@
               <a:t>38: </a:t>
             </a:r>
             <a:r>
-              <a:rPr lang="ja-JP" altLang="en-US"/>
-              <a:t>ハッシュ法</a:t>
+              <a:rPr lang="ja-JP" altLang="en-US" dirty="0"/>
+              <a:t>ハッシュ</a:t>
+            </a:r>
+            <a:r>
+              <a:rPr lang="en-US" altLang="ja-JP" dirty="0"/>
+              <a:t>(</a:t>
+            </a:r>
+            <a:r>
+              <a:rPr lang="ja-JP" altLang="en-US" dirty="0"/>
+              <a:t>チェーン</a:t>
+            </a:r>
+            <a:r>
+              <a:rPr lang="en-US" altLang="ja-JP" dirty="0"/>
+              <a:t>)</a:t>
+            </a:r>
+            <a:r>
+              <a:rPr lang="ja-JP" altLang="en-US" dirty="0"/>
+              <a:t>法</a:t>
             </a:r>
             <a:endParaRPr kumimoji="1" lang="ja-JP" altLang="en-US" dirty="0"/>
           </a:p>
@@ -4247,8 +8065,13 @@
             </a:r>
             <a:r>
               <a:rPr kumimoji="1" lang="en-US" altLang="ja-JP" dirty="0"/>
-              <a:t>:</a:t>
-            </a:r>
+              <a:t>: </a:t>
+            </a:r>
+            <a:r>
+              <a:rPr lang="ja-JP" altLang="en-US" dirty="0"/>
+              <a:t>ハッシュ探索</a:t>
+            </a:r>
+            <a:endParaRPr kumimoji="1" lang="en-US" altLang="ja-JP" dirty="0"/>
           </a:p>
           <a:p>
             <a:r>
@@ -4261,33 +8084,1176 @@
             <a:pPr lvl="1"/>
             <a:r>
               <a:rPr lang="en-US" altLang="ja-JP" dirty="0"/>
-              <a:t>x:</a:t>
-            </a:r>
+              <a:t>i: </a:t>
+            </a:r>
+            <a:r>
+              <a:rPr lang="ja-JP" altLang="en-US" dirty="0"/>
+              <a:t>ハッシュ配列のインデックス</a:t>
+            </a:r>
+            <a:endParaRPr lang="en-US" altLang="ja-JP" dirty="0"/>
+          </a:p>
+          <a:p>
+            <a:pPr lvl="1"/>
+            <a:r>
+              <a:rPr lang="en-US" altLang="ja-JP" dirty="0" err="1"/>
+              <a:t>tmp</a:t>
+            </a:r>
+            <a:r>
+              <a:rPr lang="en-US" altLang="ja-JP" dirty="0"/>
+              <a:t>: </a:t>
+            </a:r>
+            <a:r>
+              <a:rPr lang="ja-JP" altLang="en-US" dirty="0"/>
+              <a:t>コードを下の桁から一桁ずつ取り出す</a:t>
+            </a:r>
+            <a:endParaRPr lang="en-US" altLang="ja-JP" dirty="0"/>
+          </a:p>
+          <a:p>
+            <a:pPr lvl="1"/>
+            <a:r>
+              <a:rPr lang="en-US" altLang="ja-JP" dirty="0" err="1"/>
+              <a:t>cnt</a:t>
+            </a:r>
+            <a:r>
+              <a:rPr lang="en-US" altLang="ja-JP" dirty="0"/>
+              <a:t>: </a:t>
+            </a:r>
+            <a:r>
+              <a:rPr lang="ja-JP" altLang="en-US" dirty="0"/>
+              <a:t>ループカウンタ</a:t>
+            </a:r>
+            <a:endParaRPr lang="en-US" altLang="ja-JP" dirty="0"/>
           </a:p>
           <a:p>
             <a:r>
               <a:rPr lang="ja-JP" altLang="en-US" dirty="0"/>
               <a:t>ポイント</a:t>
             </a:r>
+            <a:r>
+              <a:rPr lang="en-US" altLang="ja-JP" dirty="0"/>
+              <a:t>: </a:t>
+            </a:r>
+            <a:r>
+              <a:rPr lang="ja-JP" altLang="en-US" dirty="0"/>
+              <a:t>特殊な二次元配列</a:t>
+            </a:r>
             <a:endParaRPr lang="en-US" altLang="ja-JP" dirty="0"/>
-          </a:p>
-          <a:p>
-            <a:pPr lvl="1"/>
-            <a:r>
-              <a:rPr lang="en-US" altLang="ja-JP" dirty="0"/>
-              <a:t>point</a:t>
-            </a:r>
           </a:p>
           <a:p>
             <a:pPr lvl="1"/>
             <a:endParaRPr lang="en-US" altLang="ja-JP" dirty="0"/>
           </a:p>
           <a:p>
-            <a:endParaRPr lang="en-US" altLang="ja-JP" dirty="0"/>
-          </a:p>
-          <a:p>
             <a:pPr lvl="1"/>
             <a:endParaRPr lang="en-US" altLang="ja-JP" dirty="0"/>
+          </a:p>
+          <a:p>
+            <a:endParaRPr lang="en-US" altLang="ja-JP" dirty="0"/>
+          </a:p>
+          <a:p>
+            <a:pPr lvl="1"/>
+            <a:endParaRPr lang="en-US" altLang="ja-JP" dirty="0"/>
+          </a:p>
+        </p:txBody>
+      </p:sp>
+      <p:graphicFrame>
+        <p:nvGraphicFramePr>
+          <p:cNvPr id="4" name="表 3">
+            <a:extLst>
+              <a:ext uri="{FF2B5EF4-FFF2-40B4-BE49-F238E27FC236}">
+                <a16:creationId xmlns:a16="http://schemas.microsoft.com/office/drawing/2014/main" id="{BF9DB59D-03E8-50AF-B8A0-6BD34A94DD20}"/>
+              </a:ext>
+            </a:extLst>
+          </p:cNvPr>
+          <p:cNvGraphicFramePr>
+            <a:graphicFrameLocks noGrp="1"/>
+          </p:cNvGraphicFramePr>
+          <p:nvPr>
+            <p:extLst>
+              <p:ext uri="{D42A27DB-BD31-4B8C-83A1-F6EECF244321}">
+                <p14:modId xmlns:p14="http://schemas.microsoft.com/office/powerpoint/2010/main" val="3064173268"/>
+              </p:ext>
+            </p:extLst>
+          </p:nvPr>
+        </p:nvGraphicFramePr>
+        <p:xfrm>
+          <a:off x="1049562" y="4607243"/>
+          <a:ext cx="10304238" cy="1569720"/>
+        </p:xfrm>
+        <a:graphic>
+          <a:graphicData uri="http://schemas.openxmlformats.org/drawingml/2006/table">
+            <a:tbl>
+              <a:tblPr firstRow="1" firstCol="1" bandRow="1" bandCol="1">
+                <a:tableStyleId>{3B4B98B0-60AC-42C2-AFA5-B58CD77FA1E5}</a:tableStyleId>
+              </a:tblPr>
+              <a:tblGrid>
+                <a:gridCol w="1156606">
+                  <a:extLst>
+                    <a:ext uri="{9D8B030D-6E8A-4147-A177-3AD203B41FA5}">
+                      <a16:colId xmlns:a16="http://schemas.microsoft.com/office/drawing/2014/main" val="2389709969"/>
+                    </a:ext>
+                  </a:extLst>
+                </a:gridCol>
+                <a:gridCol w="1143454">
+                  <a:extLst>
+                    <a:ext uri="{9D8B030D-6E8A-4147-A177-3AD203B41FA5}">
+                      <a16:colId xmlns:a16="http://schemas.microsoft.com/office/drawing/2014/main" val="307338924"/>
+                    </a:ext>
+                  </a:extLst>
+                </a:gridCol>
+                <a:gridCol w="1143454">
+                  <a:extLst>
+                    <a:ext uri="{9D8B030D-6E8A-4147-A177-3AD203B41FA5}">
+                      <a16:colId xmlns:a16="http://schemas.microsoft.com/office/drawing/2014/main" val="3800017486"/>
+                    </a:ext>
+                  </a:extLst>
+                </a:gridCol>
+                <a:gridCol w="1143454">
+                  <a:extLst>
+                    <a:ext uri="{9D8B030D-6E8A-4147-A177-3AD203B41FA5}">
+                      <a16:colId xmlns:a16="http://schemas.microsoft.com/office/drawing/2014/main" val="3982710551"/>
+                    </a:ext>
+                  </a:extLst>
+                </a:gridCol>
+                <a:gridCol w="1143454">
+                  <a:extLst>
+                    <a:ext uri="{9D8B030D-6E8A-4147-A177-3AD203B41FA5}">
+                      <a16:colId xmlns:a16="http://schemas.microsoft.com/office/drawing/2014/main" val="4176687443"/>
+                    </a:ext>
+                  </a:extLst>
+                </a:gridCol>
+                <a:gridCol w="1143454">
+                  <a:extLst>
+                    <a:ext uri="{9D8B030D-6E8A-4147-A177-3AD203B41FA5}">
+                      <a16:colId xmlns:a16="http://schemas.microsoft.com/office/drawing/2014/main" val="2236702038"/>
+                    </a:ext>
+                  </a:extLst>
+                </a:gridCol>
+                <a:gridCol w="1143454">
+                  <a:extLst>
+                    <a:ext uri="{9D8B030D-6E8A-4147-A177-3AD203B41FA5}">
+                      <a16:colId xmlns:a16="http://schemas.microsoft.com/office/drawing/2014/main" val="3717706336"/>
+                    </a:ext>
+                  </a:extLst>
+                </a:gridCol>
+                <a:gridCol w="1143454">
+                  <a:extLst>
+                    <a:ext uri="{9D8B030D-6E8A-4147-A177-3AD203B41FA5}">
+                      <a16:colId xmlns:a16="http://schemas.microsoft.com/office/drawing/2014/main" val="114560066"/>
+                    </a:ext>
+                  </a:extLst>
+                </a:gridCol>
+                <a:gridCol w="1143454">
+                  <a:extLst>
+                    <a:ext uri="{9D8B030D-6E8A-4147-A177-3AD203B41FA5}">
+                      <a16:colId xmlns:a16="http://schemas.microsoft.com/office/drawing/2014/main" val="4154545754"/>
+                    </a:ext>
+                  </a:extLst>
+                </a:gridCol>
+              </a:tblGrid>
+              <a:tr h="370840">
+                <a:tc>
+                  <a:txBody>
+                    <a:bodyPr/>
+                    <a:lstStyle/>
+                    <a:p>
+                      <a:r>
+                        <a:rPr kumimoji="1" lang="ja-JP" altLang="en-US" sz="1200" dirty="0"/>
+                        <a:t>インデックス</a:t>
+                      </a:r>
+                    </a:p>
+                  </a:txBody>
+                  <a:tcPr/>
+                </a:tc>
+                <a:tc>
+                  <a:txBody>
+                    <a:bodyPr/>
+                    <a:lstStyle/>
+                    <a:p>
+                      <a:r>
+                        <a:rPr kumimoji="1" lang="ja-JP" altLang="en-US" dirty="0"/>
+                        <a:t>・・・</a:t>
+                      </a:r>
+                    </a:p>
+                  </a:txBody>
+                  <a:tcPr/>
+                </a:tc>
+                <a:tc>
+                  <a:txBody>
+                    <a:bodyPr/>
+                    <a:lstStyle/>
+                    <a:p>
+                      <a:r>
+                        <a:rPr kumimoji="1" lang="en-US" altLang="ja-JP" dirty="0"/>
+                        <a:t>28</a:t>
+                      </a:r>
+                      <a:endParaRPr kumimoji="1" lang="ja-JP" altLang="en-US" dirty="0"/>
+                    </a:p>
+                  </a:txBody>
+                  <a:tcPr/>
+                </a:tc>
+                <a:tc>
+                  <a:txBody>
+                    <a:bodyPr/>
+                    <a:lstStyle/>
+                    <a:p>
+                      <a:r>
+                        <a:rPr kumimoji="1" lang="en-US" altLang="ja-JP" dirty="0"/>
+                        <a:t>29</a:t>
+                      </a:r>
+                      <a:endParaRPr kumimoji="1" lang="ja-JP" altLang="en-US" dirty="0"/>
+                    </a:p>
+                  </a:txBody>
+                  <a:tcPr/>
+                </a:tc>
+                <a:tc>
+                  <a:txBody>
+                    <a:bodyPr/>
+                    <a:lstStyle/>
+                    <a:p>
+                      <a:r>
+                        <a:rPr kumimoji="1" lang="en-US" altLang="ja-JP" dirty="0"/>
+                        <a:t>30</a:t>
+                      </a:r>
+                      <a:endParaRPr kumimoji="1" lang="ja-JP" altLang="en-US" dirty="0"/>
+                    </a:p>
+                  </a:txBody>
+                  <a:tcPr/>
+                </a:tc>
+                <a:tc>
+                  <a:txBody>
+                    <a:bodyPr/>
+                    <a:lstStyle/>
+                    <a:p>
+                      <a:r>
+                        <a:rPr kumimoji="1" lang="ja-JP" altLang="en-US" dirty="0"/>
+                        <a:t>・・・</a:t>
+                      </a:r>
+                    </a:p>
+                  </a:txBody>
+                  <a:tcPr/>
+                </a:tc>
+                <a:tc>
+                  <a:txBody>
+                    <a:bodyPr/>
+                    <a:lstStyle/>
+                    <a:p>
+                      <a:r>
+                        <a:rPr kumimoji="1" lang="en-US" altLang="ja-JP" dirty="0"/>
+                        <a:t>55</a:t>
+                      </a:r>
+                      <a:endParaRPr kumimoji="1" lang="ja-JP" altLang="en-US" dirty="0"/>
+                    </a:p>
+                  </a:txBody>
+                  <a:tcPr/>
+                </a:tc>
+                <a:tc>
+                  <a:txBody>
+                    <a:bodyPr/>
+                    <a:lstStyle/>
+                    <a:p>
+                      <a:r>
+                        <a:rPr kumimoji="1" lang="en-US" altLang="ja-JP" dirty="0"/>
+                        <a:t>56</a:t>
+                      </a:r>
+                      <a:endParaRPr kumimoji="1" lang="ja-JP" altLang="en-US" dirty="0"/>
+                    </a:p>
+                  </a:txBody>
+                  <a:tcPr/>
+                </a:tc>
+                <a:tc>
+                  <a:txBody>
+                    <a:bodyPr/>
+                    <a:lstStyle/>
+                    <a:p>
+                      <a:r>
+                        <a:rPr kumimoji="1" lang="en-US" altLang="ja-JP" dirty="0"/>
+                        <a:t>57</a:t>
+                      </a:r>
+                      <a:endParaRPr kumimoji="1" lang="ja-JP" altLang="en-US" dirty="0"/>
+                    </a:p>
+                  </a:txBody>
+                  <a:tcPr/>
+                </a:tc>
+                <a:extLst>
+                  <a:ext uri="{0D108BD9-81ED-4DB2-BD59-A6C34878D82A}">
+                    <a16:rowId xmlns:a16="http://schemas.microsoft.com/office/drawing/2014/main" val="240261306"/>
+                  </a:ext>
+                </a:extLst>
+              </a:tr>
+              <a:tr h="370840">
+                <a:tc>
+                  <a:txBody>
+                    <a:bodyPr/>
+                    <a:lstStyle/>
+                    <a:p>
+                      <a:r>
+                        <a:rPr kumimoji="1" lang="ja-JP" altLang="en-US" sz="1200" dirty="0"/>
+                        <a:t>コード</a:t>
+                      </a:r>
+                    </a:p>
+                  </a:txBody>
+                  <a:tcPr/>
+                </a:tc>
+                <a:tc>
+                  <a:txBody>
+                    <a:bodyPr/>
+                    <a:lstStyle/>
+                    <a:p>
+                      <a:endParaRPr kumimoji="1" lang="ja-JP" altLang="en-US" dirty="0"/>
+                    </a:p>
+                  </a:txBody>
+                  <a:tcPr/>
+                </a:tc>
+                <a:tc>
+                  <a:txBody>
+                    <a:bodyPr/>
+                    <a:lstStyle/>
+                    <a:p>
+                      <a:r>
+                        <a:rPr kumimoji="1" lang="en-US" altLang="ja-JP" dirty="0"/>
+                        <a:t>650</a:t>
+                      </a:r>
+                      <a:endParaRPr kumimoji="1" lang="ja-JP" altLang="en-US" dirty="0"/>
+                    </a:p>
+                  </a:txBody>
+                  <a:tcPr/>
+                </a:tc>
+                <a:tc>
+                  <a:txBody>
+                    <a:bodyPr/>
+                    <a:lstStyle/>
+                    <a:p>
+                      <a:r>
+                        <a:rPr kumimoji="1" lang="en-US" altLang="ja-JP" dirty="0"/>
+                        <a:t>384</a:t>
+                      </a:r>
+                      <a:endParaRPr kumimoji="1" lang="ja-JP" altLang="en-US" dirty="0"/>
+                    </a:p>
+                  </a:txBody>
+                  <a:tcPr/>
+                </a:tc>
+                <a:tc>
+                  <a:txBody>
+                    <a:bodyPr/>
+                    <a:lstStyle/>
+                    <a:p>
+                      <a:r>
+                        <a:rPr kumimoji="1" lang="en-US" altLang="ja-JP" dirty="0"/>
+                        <a:t>-1</a:t>
+                      </a:r>
+                      <a:endParaRPr kumimoji="1" lang="ja-JP" altLang="en-US" dirty="0"/>
+                    </a:p>
+                  </a:txBody>
+                  <a:tcPr/>
+                </a:tc>
+                <a:tc>
+                  <a:txBody>
+                    <a:bodyPr/>
+                    <a:lstStyle/>
+                    <a:p>
+                      <a:endParaRPr kumimoji="1" lang="ja-JP" altLang="en-US"/>
+                    </a:p>
+                  </a:txBody>
+                  <a:tcPr/>
+                </a:tc>
+                <a:tc>
+                  <a:txBody>
+                    <a:bodyPr/>
+                    <a:lstStyle/>
+                    <a:p>
+                      <a:r>
+                        <a:rPr kumimoji="1" lang="en-US" altLang="ja-JP" dirty="0"/>
+                        <a:t>465</a:t>
+                      </a:r>
+                      <a:endParaRPr kumimoji="1" lang="ja-JP" altLang="en-US" dirty="0"/>
+                    </a:p>
+                  </a:txBody>
+                  <a:tcPr/>
+                </a:tc>
+                <a:tc>
+                  <a:txBody>
+                    <a:bodyPr/>
+                    <a:lstStyle/>
+                    <a:p>
+                      <a:r>
+                        <a:rPr kumimoji="1" lang="en-US" altLang="ja-JP" dirty="0"/>
+                        <a:t>183</a:t>
+                      </a:r>
+                      <a:endParaRPr kumimoji="1" lang="ja-JP" altLang="en-US" dirty="0"/>
+                    </a:p>
+                  </a:txBody>
+                  <a:tcPr/>
+                </a:tc>
+                <a:tc>
+                  <a:txBody>
+                    <a:bodyPr/>
+                    <a:lstStyle/>
+                    <a:p>
+                      <a:r>
+                        <a:rPr kumimoji="1" lang="en-US" altLang="ja-JP" dirty="0"/>
+                        <a:t>708</a:t>
+                      </a:r>
+                      <a:endParaRPr kumimoji="1" lang="ja-JP" altLang="en-US" dirty="0"/>
+                    </a:p>
+                  </a:txBody>
+                  <a:tcPr/>
+                </a:tc>
+                <a:extLst>
+                  <a:ext uri="{0D108BD9-81ED-4DB2-BD59-A6C34878D82A}">
+                    <a16:rowId xmlns:a16="http://schemas.microsoft.com/office/drawing/2014/main" val="904317491"/>
+                  </a:ext>
+                </a:extLst>
+              </a:tr>
+              <a:tr h="370840">
+                <a:tc>
+                  <a:txBody>
+                    <a:bodyPr/>
+                    <a:lstStyle/>
+                    <a:p>
+                      <a:r>
+                        <a:rPr kumimoji="1" lang="ja-JP" altLang="en-US" sz="1200" dirty="0"/>
+                        <a:t>データ</a:t>
+                      </a:r>
+                    </a:p>
+                  </a:txBody>
+                  <a:tcPr/>
+                </a:tc>
+                <a:tc>
+                  <a:txBody>
+                    <a:bodyPr/>
+                    <a:lstStyle/>
+                    <a:p>
+                      <a:endParaRPr kumimoji="1" lang="ja-JP" altLang="en-US" dirty="0"/>
+                    </a:p>
+                  </a:txBody>
+                  <a:tcPr/>
+                </a:tc>
+                <a:tc>
+                  <a:txBody>
+                    <a:bodyPr/>
+                    <a:lstStyle/>
+                    <a:p>
+                      <a:r>
+                        <a:rPr kumimoji="1" lang="en-US" altLang="ja-JP" dirty="0"/>
+                        <a:t>37</a:t>
+                      </a:r>
+                      <a:endParaRPr kumimoji="1" lang="ja-JP" altLang="en-US" dirty="0"/>
+                    </a:p>
+                  </a:txBody>
+                  <a:tcPr/>
+                </a:tc>
+                <a:tc>
+                  <a:txBody>
+                    <a:bodyPr/>
+                    <a:lstStyle/>
+                    <a:p>
+                      <a:r>
+                        <a:rPr kumimoji="1" lang="en-US" altLang="ja-JP" dirty="0"/>
+                        <a:t>92</a:t>
+                      </a:r>
+                      <a:endParaRPr kumimoji="1" lang="ja-JP" altLang="en-US" dirty="0"/>
+                    </a:p>
+                  </a:txBody>
+                  <a:tcPr/>
+                </a:tc>
+                <a:tc>
+                  <a:txBody>
+                    <a:bodyPr/>
+                    <a:lstStyle/>
+                    <a:p>
+                      <a:r>
+                        <a:rPr kumimoji="1" lang="en-US" altLang="ja-JP" dirty="0"/>
+                        <a:t>-1</a:t>
+                      </a:r>
+                      <a:endParaRPr kumimoji="1" lang="ja-JP" altLang="en-US" dirty="0"/>
+                    </a:p>
+                  </a:txBody>
+                  <a:tcPr/>
+                </a:tc>
+                <a:tc>
+                  <a:txBody>
+                    <a:bodyPr/>
+                    <a:lstStyle/>
+                    <a:p>
+                      <a:endParaRPr kumimoji="1" lang="ja-JP" altLang="en-US"/>
+                    </a:p>
+                  </a:txBody>
+                  <a:tcPr/>
+                </a:tc>
+                <a:tc>
+                  <a:txBody>
+                    <a:bodyPr/>
+                    <a:lstStyle/>
+                    <a:p>
+                      <a:r>
+                        <a:rPr kumimoji="1" lang="en-US" altLang="ja-JP" dirty="0"/>
+                        <a:t>22</a:t>
+                      </a:r>
+                      <a:endParaRPr kumimoji="1" lang="ja-JP" altLang="en-US" dirty="0"/>
+                    </a:p>
+                  </a:txBody>
+                  <a:tcPr/>
+                </a:tc>
+                <a:tc>
+                  <a:txBody>
+                    <a:bodyPr/>
+                    <a:lstStyle/>
+                    <a:p>
+                      <a:r>
+                        <a:rPr kumimoji="1" lang="en-US" altLang="ja-JP" dirty="0"/>
+                        <a:t>54</a:t>
+                      </a:r>
+                      <a:endParaRPr kumimoji="1" lang="ja-JP" altLang="en-US" dirty="0"/>
+                    </a:p>
+                  </a:txBody>
+                  <a:tcPr/>
+                </a:tc>
+                <a:tc>
+                  <a:txBody>
+                    <a:bodyPr/>
+                    <a:lstStyle/>
+                    <a:p>
+                      <a:r>
+                        <a:rPr kumimoji="1" lang="en-US" altLang="ja-JP" dirty="0"/>
+                        <a:t>85</a:t>
+                      </a:r>
+                      <a:endParaRPr kumimoji="1" lang="ja-JP" altLang="en-US" dirty="0"/>
+                    </a:p>
+                  </a:txBody>
+                  <a:tcPr/>
+                </a:tc>
+                <a:extLst>
+                  <a:ext uri="{0D108BD9-81ED-4DB2-BD59-A6C34878D82A}">
+                    <a16:rowId xmlns:a16="http://schemas.microsoft.com/office/drawing/2014/main" val="219095095"/>
+                  </a:ext>
+                </a:extLst>
+              </a:tr>
+              <a:tr h="370840">
+                <a:tc>
+                  <a:txBody>
+                    <a:bodyPr/>
+                    <a:lstStyle/>
+                    <a:p>
+                      <a:r>
+                        <a:rPr kumimoji="1" lang="ja-JP" altLang="en-US" sz="1200" dirty="0"/>
+                        <a:t>シノニムの</a:t>
+                      </a:r>
+                      <a:endParaRPr kumimoji="1" lang="en-US" altLang="ja-JP" sz="1200" dirty="0"/>
+                    </a:p>
+                    <a:p>
+                      <a:r>
+                        <a:rPr kumimoji="1" lang="ja-JP" altLang="en-US" sz="1200" dirty="0"/>
+                        <a:t>インデックス</a:t>
+                      </a:r>
+                    </a:p>
+                  </a:txBody>
+                  <a:tcPr/>
+                </a:tc>
+                <a:tc>
+                  <a:txBody>
+                    <a:bodyPr/>
+                    <a:lstStyle/>
+                    <a:p>
+                      <a:endParaRPr kumimoji="1" lang="ja-JP" altLang="en-US" dirty="0"/>
+                    </a:p>
+                  </a:txBody>
+                  <a:tcPr/>
+                </a:tc>
+                <a:tc>
+                  <a:txBody>
+                    <a:bodyPr/>
+                    <a:lstStyle/>
+                    <a:p>
+                      <a:r>
+                        <a:rPr kumimoji="1" lang="en-US" altLang="ja-JP" dirty="0"/>
+                        <a:t>-1</a:t>
+                      </a:r>
+                      <a:endParaRPr kumimoji="1" lang="ja-JP" altLang="en-US" dirty="0"/>
+                    </a:p>
+                  </a:txBody>
+                  <a:tcPr/>
+                </a:tc>
+                <a:tc>
+                  <a:txBody>
+                    <a:bodyPr/>
+                    <a:lstStyle/>
+                    <a:p>
+                      <a:r>
+                        <a:rPr kumimoji="1" lang="en-US" altLang="ja-JP" dirty="0"/>
+                        <a:t>55</a:t>
+                      </a:r>
+                      <a:endParaRPr kumimoji="1" lang="ja-JP" altLang="en-US" dirty="0"/>
+                    </a:p>
+                  </a:txBody>
+                  <a:tcPr/>
+                </a:tc>
+                <a:tc>
+                  <a:txBody>
+                    <a:bodyPr/>
+                    <a:lstStyle/>
+                    <a:p>
+                      <a:r>
+                        <a:rPr kumimoji="1" lang="en-US" altLang="ja-JP" dirty="0"/>
+                        <a:t>-1</a:t>
+                      </a:r>
+                      <a:endParaRPr kumimoji="1" lang="ja-JP" altLang="en-US" dirty="0"/>
+                    </a:p>
+                  </a:txBody>
+                  <a:tcPr/>
+                </a:tc>
+                <a:tc>
+                  <a:txBody>
+                    <a:bodyPr/>
+                    <a:lstStyle/>
+                    <a:p>
+                      <a:endParaRPr kumimoji="1" lang="ja-JP" altLang="en-US" dirty="0"/>
+                    </a:p>
+                  </a:txBody>
+                  <a:tcPr/>
+                </a:tc>
+                <a:tc>
+                  <a:txBody>
+                    <a:bodyPr/>
+                    <a:lstStyle/>
+                    <a:p>
+                      <a:r>
+                        <a:rPr kumimoji="1" lang="en-US" altLang="ja-JP" dirty="0"/>
+                        <a:t>57</a:t>
+                      </a:r>
+                      <a:endParaRPr kumimoji="1" lang="ja-JP" altLang="en-US" dirty="0"/>
+                    </a:p>
+                  </a:txBody>
+                  <a:tcPr/>
+                </a:tc>
+                <a:tc>
+                  <a:txBody>
+                    <a:bodyPr/>
+                    <a:lstStyle/>
+                    <a:p>
+                      <a:r>
+                        <a:rPr kumimoji="1" lang="en-US" altLang="ja-JP" dirty="0"/>
+                        <a:t>-1</a:t>
+                      </a:r>
+                      <a:endParaRPr kumimoji="1" lang="ja-JP" altLang="en-US" dirty="0"/>
+                    </a:p>
+                  </a:txBody>
+                  <a:tcPr/>
+                </a:tc>
+                <a:tc>
+                  <a:txBody>
+                    <a:bodyPr/>
+                    <a:lstStyle/>
+                    <a:p>
+                      <a:r>
+                        <a:rPr kumimoji="1" lang="en-US" altLang="ja-JP" dirty="0"/>
+                        <a:t>-1</a:t>
+                      </a:r>
+                      <a:endParaRPr kumimoji="1" lang="ja-JP" altLang="en-US" dirty="0"/>
+                    </a:p>
+                  </a:txBody>
+                  <a:tcPr/>
+                </a:tc>
+                <a:extLst>
+                  <a:ext uri="{0D108BD9-81ED-4DB2-BD59-A6C34878D82A}">
+                    <a16:rowId xmlns:a16="http://schemas.microsoft.com/office/drawing/2014/main" val="2869779915"/>
+                  </a:ext>
+                </a:extLst>
+              </a:tr>
+            </a:tbl>
+          </a:graphicData>
+        </a:graphic>
+      </p:graphicFrame>
+      <p:sp>
+        <p:nvSpPr>
+          <p:cNvPr id="13" name="フリーフォーム: 図形 12">
+            <a:extLst>
+              <a:ext uri="{FF2B5EF4-FFF2-40B4-BE49-F238E27FC236}">
+                <a16:creationId xmlns:a16="http://schemas.microsoft.com/office/drawing/2014/main" id="{5980120C-6F8D-E591-3159-468C27FAAD02}"/>
+              </a:ext>
+            </a:extLst>
+          </p:cNvPr>
+          <p:cNvSpPr/>
+          <p:nvPr/>
+        </p:nvSpPr>
+        <p:spPr>
+          <a:xfrm>
+            <a:off x="4977493" y="4372462"/>
+            <a:ext cx="2939143" cy="1393318"/>
+          </a:xfrm>
+          <a:custGeom>
+            <a:avLst/>
+            <a:gdLst>
+              <a:gd name="connsiteX0" fmla="*/ 0 w 2939143"/>
+              <a:gd name="connsiteY0" fmla="*/ 1393318 h 1393318"/>
+              <a:gd name="connsiteX1" fmla="*/ 1690007 w 2939143"/>
+              <a:gd name="connsiteY1" fmla="*/ 62539 h 1393318"/>
+              <a:gd name="connsiteX2" fmla="*/ 2939143 w 2939143"/>
+              <a:gd name="connsiteY2" fmla="*/ 340125 h 1393318"/>
+            </a:gdLst>
+            <a:ahLst/>
+            <a:cxnLst>
+              <a:cxn ang="0">
+                <a:pos x="connsiteX0" y="connsiteY0"/>
+              </a:cxn>
+              <a:cxn ang="0">
+                <a:pos x="connsiteX1" y="connsiteY1"/>
+              </a:cxn>
+              <a:cxn ang="0">
+                <a:pos x="connsiteX2" y="connsiteY2"/>
+              </a:cxn>
+            </a:cxnLst>
+            <a:rect l="l" t="t" r="r" b="b"/>
+            <a:pathLst>
+              <a:path w="2939143" h="1393318">
+                <a:moveTo>
+                  <a:pt x="0" y="1393318"/>
+                </a:moveTo>
+                <a:cubicBezTo>
+                  <a:pt x="600075" y="815694"/>
+                  <a:pt x="1200150" y="238071"/>
+                  <a:pt x="1690007" y="62539"/>
+                </a:cubicBezTo>
+                <a:cubicBezTo>
+                  <a:pt x="2179864" y="-112993"/>
+                  <a:pt x="2559503" y="113566"/>
+                  <a:pt x="2939143" y="340125"/>
+                </a:cubicBezTo>
+              </a:path>
+            </a:pathLst>
+          </a:custGeom>
+          <a:noFill/>
+          <a:ln w="19050">
+            <a:solidFill>
+              <a:srgbClr val="FF0000"/>
+            </a:solidFill>
+            <a:headEnd type="none" w="med" len="med"/>
+            <a:tailEnd type="triangle" w="med" len="med"/>
+          </a:ln>
+        </p:spPr>
+        <p:style>
+          <a:lnRef idx="2">
+            <a:schemeClr val="accent1">
+              <a:shade val="15000"/>
+            </a:schemeClr>
+          </a:lnRef>
+          <a:fillRef idx="1">
+            <a:schemeClr val="accent1"/>
+          </a:fillRef>
+          <a:effectRef idx="0">
+            <a:schemeClr val="accent1"/>
+          </a:effectRef>
+          <a:fontRef idx="minor">
+            <a:schemeClr val="lt1"/>
+          </a:fontRef>
+        </p:style>
+        <p:txBody>
+          <a:bodyPr rtlCol="0" anchor="ctr"/>
+          <a:lstStyle/>
+          <a:p>
+            <a:pPr algn="ctr"/>
+            <a:endParaRPr kumimoji="1" lang="ja-JP" altLang="en-US"/>
+          </a:p>
+        </p:txBody>
+      </p:sp>
+      <p:sp>
+        <p:nvSpPr>
+          <p:cNvPr id="15" name="フリーフォーム: 図形 14">
+            <a:extLst>
+              <a:ext uri="{FF2B5EF4-FFF2-40B4-BE49-F238E27FC236}">
+                <a16:creationId xmlns:a16="http://schemas.microsoft.com/office/drawing/2014/main" id="{3705FDCD-9E74-74C2-5EE9-183A2236FFD9}"/>
+              </a:ext>
+            </a:extLst>
+          </p:cNvPr>
+          <p:cNvSpPr/>
+          <p:nvPr/>
+        </p:nvSpPr>
+        <p:spPr>
+          <a:xfrm>
+            <a:off x="8398329" y="4472306"/>
+            <a:ext cx="1845128" cy="1415938"/>
+          </a:xfrm>
+          <a:custGeom>
+            <a:avLst/>
+            <a:gdLst>
+              <a:gd name="connsiteX0" fmla="*/ 0 w 2016578"/>
+              <a:gd name="connsiteY0" fmla="*/ 1518438 h 1518438"/>
+              <a:gd name="connsiteX1" fmla="*/ 1338943 w 2016578"/>
+              <a:gd name="connsiteY1" fmla="*/ 89688 h 1518438"/>
+              <a:gd name="connsiteX2" fmla="*/ 2016578 w 2016578"/>
+              <a:gd name="connsiteY2" fmla="*/ 269302 h 1518438"/>
+            </a:gdLst>
+            <a:ahLst/>
+            <a:cxnLst>
+              <a:cxn ang="0">
+                <a:pos x="connsiteX0" y="connsiteY0"/>
+              </a:cxn>
+              <a:cxn ang="0">
+                <a:pos x="connsiteX1" y="connsiteY1"/>
+              </a:cxn>
+              <a:cxn ang="0">
+                <a:pos x="connsiteX2" y="connsiteY2"/>
+              </a:cxn>
+            </a:cxnLst>
+            <a:rect l="l" t="t" r="r" b="b"/>
+            <a:pathLst>
+              <a:path w="2016578" h="1518438">
+                <a:moveTo>
+                  <a:pt x="0" y="1518438"/>
+                </a:moveTo>
+                <a:cubicBezTo>
+                  <a:pt x="501423" y="908157"/>
+                  <a:pt x="1002847" y="297877"/>
+                  <a:pt x="1338943" y="89688"/>
+                </a:cubicBezTo>
+                <a:cubicBezTo>
+                  <a:pt x="1675039" y="-118501"/>
+                  <a:pt x="1845808" y="75400"/>
+                  <a:pt x="2016578" y="269302"/>
+                </a:cubicBezTo>
+              </a:path>
+            </a:pathLst>
+          </a:custGeom>
+          <a:noFill/>
+          <a:ln w="19050">
+            <a:solidFill>
+              <a:srgbClr val="FF0000"/>
+            </a:solidFill>
+            <a:headEnd type="none" w="med" len="med"/>
+            <a:tailEnd type="triangle" w="med" len="med"/>
+          </a:ln>
+        </p:spPr>
+        <p:style>
+          <a:lnRef idx="2">
+            <a:schemeClr val="accent1">
+              <a:shade val="15000"/>
+            </a:schemeClr>
+          </a:lnRef>
+          <a:fillRef idx="1">
+            <a:schemeClr val="accent1"/>
+          </a:fillRef>
+          <a:effectRef idx="0">
+            <a:schemeClr val="accent1"/>
+          </a:effectRef>
+          <a:fontRef idx="minor">
+            <a:schemeClr val="lt1"/>
+          </a:fontRef>
+        </p:style>
+        <p:txBody>
+          <a:bodyPr rtlCol="0" anchor="ctr"/>
+          <a:lstStyle/>
+          <a:p>
+            <a:pPr algn="ctr"/>
+            <a:endParaRPr kumimoji="1" lang="ja-JP" altLang="en-US"/>
+          </a:p>
+        </p:txBody>
+      </p:sp>
+      <p:sp>
+        <p:nvSpPr>
+          <p:cNvPr id="17" name="楕円 16">
+            <a:extLst>
+              <a:ext uri="{FF2B5EF4-FFF2-40B4-BE49-F238E27FC236}">
+                <a16:creationId xmlns:a16="http://schemas.microsoft.com/office/drawing/2014/main" id="{2ACC77F0-86AE-5CEC-11C8-83A5913C44C0}"/>
+              </a:ext>
+            </a:extLst>
+          </p:cNvPr>
+          <p:cNvSpPr/>
+          <p:nvPr/>
+        </p:nvSpPr>
+        <p:spPr>
+          <a:xfrm>
+            <a:off x="4495800" y="5675972"/>
+            <a:ext cx="481693" cy="408215"/>
+          </a:xfrm>
+          <a:prstGeom prst="ellipse">
+            <a:avLst/>
+          </a:prstGeom>
+          <a:noFill/>
+          <a:ln>
+            <a:solidFill>
+              <a:srgbClr val="FF0000"/>
+            </a:solidFill>
+          </a:ln>
+        </p:spPr>
+        <p:style>
+          <a:lnRef idx="2">
+            <a:schemeClr val="accent1">
+              <a:shade val="15000"/>
+            </a:schemeClr>
+          </a:lnRef>
+          <a:fillRef idx="1">
+            <a:schemeClr val="accent1"/>
+          </a:fillRef>
+          <a:effectRef idx="0">
+            <a:schemeClr val="accent1"/>
+          </a:effectRef>
+          <a:fontRef idx="minor">
+            <a:schemeClr val="lt1"/>
+          </a:fontRef>
+        </p:style>
+        <p:txBody>
+          <a:bodyPr rtlCol="0" anchor="ctr"/>
+          <a:lstStyle/>
+          <a:p>
+            <a:pPr algn="ctr"/>
+            <a:endParaRPr kumimoji="1" lang="ja-JP" altLang="en-US"/>
+          </a:p>
+        </p:txBody>
+      </p:sp>
+      <p:sp>
+        <p:nvSpPr>
+          <p:cNvPr id="18" name="楕円 17">
+            <a:extLst>
+              <a:ext uri="{FF2B5EF4-FFF2-40B4-BE49-F238E27FC236}">
+                <a16:creationId xmlns:a16="http://schemas.microsoft.com/office/drawing/2014/main" id="{4D8A6448-27E1-5F03-7AA5-BE769717030F}"/>
+              </a:ext>
+            </a:extLst>
+          </p:cNvPr>
+          <p:cNvSpPr/>
+          <p:nvPr/>
+        </p:nvSpPr>
+        <p:spPr>
+          <a:xfrm>
+            <a:off x="7909381" y="5747626"/>
+            <a:ext cx="481693" cy="408215"/>
+          </a:xfrm>
+          <a:prstGeom prst="ellipse">
+            <a:avLst/>
+          </a:prstGeom>
+          <a:noFill/>
+          <a:ln>
+            <a:solidFill>
+              <a:srgbClr val="FF0000"/>
+            </a:solidFill>
+          </a:ln>
+        </p:spPr>
+        <p:style>
+          <a:lnRef idx="2">
+            <a:schemeClr val="accent1">
+              <a:shade val="15000"/>
+            </a:schemeClr>
+          </a:lnRef>
+          <a:fillRef idx="1">
+            <a:schemeClr val="accent1"/>
+          </a:fillRef>
+          <a:effectRef idx="0">
+            <a:schemeClr val="accent1"/>
+          </a:effectRef>
+          <a:fontRef idx="minor">
+            <a:schemeClr val="lt1"/>
+          </a:fontRef>
+        </p:style>
+        <p:txBody>
+          <a:bodyPr rtlCol="0" anchor="ctr"/>
+          <a:lstStyle/>
+          <a:p>
+            <a:pPr algn="ctr"/>
+            <a:endParaRPr kumimoji="1" lang="ja-JP" altLang="en-US"/>
+          </a:p>
+        </p:txBody>
+      </p:sp>
+      <p:sp>
+        <p:nvSpPr>
+          <p:cNvPr id="19" name="吹き出し: 角を丸めた四角形 18">
+            <a:extLst>
+              <a:ext uri="{FF2B5EF4-FFF2-40B4-BE49-F238E27FC236}">
+                <a16:creationId xmlns:a16="http://schemas.microsoft.com/office/drawing/2014/main" id="{A8265098-E6BF-089D-7DFA-ADB0B111368D}"/>
+              </a:ext>
+            </a:extLst>
+          </p:cNvPr>
+          <p:cNvSpPr/>
+          <p:nvPr/>
+        </p:nvSpPr>
+        <p:spPr>
+          <a:xfrm>
+            <a:off x="8398329" y="2024742"/>
+            <a:ext cx="3162299" cy="2090057"/>
+          </a:xfrm>
+          <a:prstGeom prst="wedgeRoundRectCallout">
+            <a:avLst>
+              <a:gd name="adj1" fmla="val -123320"/>
+              <a:gd name="adj2" fmla="val 78986"/>
+              <a:gd name="adj3" fmla="val 16667"/>
+            </a:avLst>
+          </a:prstGeom>
+          <a:noFill/>
+          <a:ln>
+            <a:prstDash val="sysDot"/>
+          </a:ln>
+        </p:spPr>
+        <p:style>
+          <a:lnRef idx="2">
+            <a:schemeClr val="accent1">
+              <a:shade val="15000"/>
+            </a:schemeClr>
+          </a:lnRef>
+          <a:fillRef idx="1">
+            <a:schemeClr val="accent1"/>
+          </a:fillRef>
+          <a:effectRef idx="0">
+            <a:schemeClr val="accent1"/>
+          </a:effectRef>
+          <a:fontRef idx="minor">
+            <a:schemeClr val="lt1"/>
+          </a:fontRef>
+        </p:style>
+        <p:txBody>
+          <a:bodyPr rtlCol="0" anchor="ctr"/>
+          <a:lstStyle/>
+          <a:p>
+            <a:pPr algn="ctr"/>
+            <a:r>
+              <a:rPr kumimoji="1" lang="ja-JP" altLang="en-US" dirty="0">
+                <a:solidFill>
+                  <a:srgbClr val="FF0000"/>
+                </a:solidFill>
+              </a:rPr>
+              <a:t>ハッシュ値が</a:t>
+            </a:r>
+            <a:r>
+              <a:rPr kumimoji="1" lang="en-US" altLang="ja-JP" dirty="0">
+                <a:solidFill>
+                  <a:srgbClr val="FF0000"/>
+                </a:solidFill>
+              </a:rPr>
+              <a:t>30</a:t>
+            </a:r>
+            <a:r>
+              <a:rPr kumimoji="1" lang="ja-JP" altLang="en-US" dirty="0">
+                <a:solidFill>
+                  <a:srgbClr val="FF0000"/>
+                </a:solidFill>
+              </a:rPr>
+              <a:t>になるコードを検索したときは、</a:t>
+            </a:r>
+            <a:endParaRPr kumimoji="1" lang="en-US" altLang="ja-JP" dirty="0">
+              <a:solidFill>
+                <a:srgbClr val="FF0000"/>
+              </a:solidFill>
+            </a:endParaRPr>
+          </a:p>
+          <a:p>
+            <a:pPr algn="ctr"/>
+            <a:r>
+              <a:rPr kumimoji="1" lang="en-US" altLang="ja-JP" dirty="0">
+                <a:solidFill>
+                  <a:srgbClr val="FF0000"/>
+                </a:solidFill>
+              </a:rPr>
+              <a:t>b</a:t>
+            </a:r>
+            <a:r>
+              <a:rPr kumimoji="1" lang="ja-JP" altLang="en-US" dirty="0">
+                <a:solidFill>
+                  <a:srgbClr val="FF0000"/>
+                </a:solidFill>
+              </a:rPr>
+              <a:t>の操作</a:t>
+            </a:r>
+            <a:r>
+              <a:rPr lang="en-US" altLang="ja-JP" u="sng" dirty="0">
+                <a:solidFill>
+                  <a:srgbClr val="FF0000"/>
+                </a:solidFill>
+              </a:rPr>
+              <a:t> </a:t>
+            </a:r>
+            <a:r>
+              <a:rPr lang="en-US" altLang="ja-JP" u="sng" dirty="0" err="1">
+                <a:solidFill>
+                  <a:srgbClr val="FF0000"/>
+                </a:solidFill>
+              </a:rPr>
+              <a:t>i</a:t>
+            </a:r>
+            <a:r>
+              <a:rPr lang="en-US" altLang="ja-JP" u="sng" dirty="0">
+                <a:solidFill>
+                  <a:srgbClr val="FF0000"/>
+                </a:solidFill>
+              </a:rPr>
+              <a:t> </a:t>
+            </a:r>
+            <a:r>
+              <a:rPr lang="ja-JP" altLang="en-US" u="sng" dirty="0">
+                <a:solidFill>
+                  <a:srgbClr val="FF0000"/>
+                </a:solidFill>
+              </a:rPr>
+              <a:t>← </a:t>
+            </a:r>
+            <a:r>
+              <a:rPr lang="en-US" altLang="ja-JP" u="sng" dirty="0">
+                <a:solidFill>
+                  <a:srgbClr val="FF0000"/>
+                </a:solidFill>
+              </a:rPr>
+              <a:t>hash[3,i]</a:t>
+            </a:r>
+          </a:p>
+          <a:p>
+            <a:pPr algn="ctr"/>
+            <a:r>
+              <a:rPr lang="ja-JP" altLang="en-US" dirty="0">
+                <a:solidFill>
+                  <a:srgbClr val="FF0000"/>
+                </a:solidFill>
+              </a:rPr>
+              <a:t>によって、次のループで</a:t>
+            </a:r>
+            <a:endParaRPr lang="en-US" altLang="ja-JP" dirty="0">
+              <a:solidFill>
+                <a:srgbClr val="FF0000"/>
+              </a:solidFill>
+            </a:endParaRPr>
+          </a:p>
+          <a:p>
+            <a:pPr algn="ctr"/>
+            <a:r>
+              <a:rPr lang="en-US" altLang="ja-JP" dirty="0" err="1">
+                <a:solidFill>
+                  <a:srgbClr val="FF0000"/>
+                </a:solidFill>
+              </a:rPr>
+              <a:t>i</a:t>
+            </a:r>
+            <a:r>
+              <a:rPr lang="en-US" altLang="ja-JP" dirty="0">
+                <a:solidFill>
+                  <a:srgbClr val="FF0000"/>
+                </a:solidFill>
+              </a:rPr>
+              <a:t> </a:t>
+            </a:r>
+            <a:r>
+              <a:rPr lang="ja-JP" altLang="en-US" dirty="0">
+                <a:solidFill>
+                  <a:srgbClr val="FF0000"/>
+                </a:solidFill>
+              </a:rPr>
+              <a:t>は</a:t>
+            </a:r>
+            <a:r>
+              <a:rPr lang="en-US" altLang="ja-JP" dirty="0">
+                <a:solidFill>
+                  <a:srgbClr val="FF0000"/>
+                </a:solidFill>
+              </a:rPr>
+              <a:t>-1</a:t>
+            </a:r>
+            <a:r>
+              <a:rPr lang="ja-JP" altLang="en-US" dirty="0">
+                <a:solidFill>
+                  <a:srgbClr val="FF0000"/>
+                </a:solidFill>
+              </a:rPr>
+              <a:t>になる</a:t>
+            </a:r>
+            <a:endParaRPr kumimoji="1" lang="ja-JP" altLang="en-US" dirty="0">
+              <a:solidFill>
+                <a:srgbClr val="FF0000"/>
+              </a:solidFill>
+            </a:endParaRPr>
           </a:p>
         </p:txBody>
       </p:sp>
@@ -4354,7 +9320,27 @@
             </a:r>
             <a:r>
               <a:rPr lang="en-US" altLang="ja-JP" dirty="0"/>
-              <a:t>39</a:t>
+              <a:t>39: </a:t>
+            </a:r>
+            <a:r>
+              <a:rPr lang="ja-JP" altLang="en-US" dirty="0"/>
+              <a:t>ハッシュ</a:t>
+            </a:r>
+            <a:r>
+              <a:rPr lang="en-US" altLang="ja-JP" dirty="0"/>
+              <a:t>(</a:t>
+            </a:r>
+            <a:r>
+              <a:rPr lang="ja-JP" altLang="en-US" dirty="0"/>
+              <a:t>オープンアドレス</a:t>
+            </a:r>
+            <a:r>
+              <a:rPr lang="en-US" altLang="ja-JP" dirty="0"/>
+              <a:t>)</a:t>
+            </a:r>
+            <a:r>
+              <a:rPr lang="ja-JP" altLang="en-US" dirty="0"/>
+              <a:t>法</a:t>
             </a:r>
             <a:endParaRPr kumimoji="1" lang="ja-JP" altLang="en-US" dirty="0"/>
           </a:p>
@@ -4389,8 +9375,13 @@
             </a:r>
             <a:r>
               <a:rPr kumimoji="1" lang="en-US" altLang="ja-JP" dirty="0"/>
-              <a:t>:</a:t>
-            </a:r>
+              <a:t>: </a:t>
+            </a:r>
+            <a:r>
+              <a:rPr kumimoji="1" lang="ja-JP" altLang="en-US" dirty="0"/>
+              <a:t>オープンアドレス法で、キーと値のペアを格納する</a:t>
+            </a:r>
+            <a:endParaRPr kumimoji="1" lang="en-US" altLang="ja-JP" dirty="0"/>
           </a:p>
           <a:p>
             <a:r>
@@ -4403,8 +9394,29 @@
             <a:pPr lvl="1"/>
             <a:r>
               <a:rPr lang="en-US" altLang="ja-JP" dirty="0"/>
-              <a:t>x:</a:t>
-            </a:r>
+              <a:t>hash: </a:t>
+            </a:r>
+            <a:r>
+              <a:rPr lang="ja-JP" altLang="en-US" dirty="0"/>
+              <a:t>ハッシュ値</a:t>
+            </a:r>
+            <a:r>
+              <a:rPr lang="en-US" altLang="ja-JP" dirty="0"/>
+              <a:t>, i: </a:t>
+            </a:r>
+            <a:r>
+              <a:rPr lang="ja-JP" altLang="en-US" dirty="0"/>
+              <a:t>インデックス</a:t>
+            </a:r>
+            <a:r>
+              <a:rPr lang="en-US" altLang="ja-JP" dirty="0"/>
+              <a:t>, pos: </a:t>
+            </a:r>
+            <a:r>
+              <a:rPr lang="ja-JP" altLang="en-US" dirty="0"/>
+              <a:t>格納先インデックス</a:t>
+            </a:r>
+            <a:endParaRPr lang="en-US" altLang="ja-JP" dirty="0"/>
           </a:p>
           <a:p>
             <a:r>
@@ -4415,14 +9427,183 @@
           </a:p>
           <a:p>
             <a:pPr lvl="1"/>
-            <a:r>
-              <a:rPr lang="en-US" altLang="ja-JP" dirty="0"/>
-              <a:t>point</a:t>
-            </a:r>
-          </a:p>
-          <a:p>
-            <a:pPr lvl="1"/>
             <a:endParaRPr lang="en-US" altLang="ja-JP" dirty="0"/>
+          </a:p>
+        </p:txBody>
+      </p:sp>
+      <p:graphicFrame>
+        <p:nvGraphicFramePr>
+          <p:cNvPr id="4" name="図表 3">
+            <a:extLst>
+              <a:ext uri="{FF2B5EF4-FFF2-40B4-BE49-F238E27FC236}">
+                <a16:creationId xmlns:a16="http://schemas.microsoft.com/office/drawing/2014/main" id="{1602F5CF-AB31-34DF-5AFB-AD40F50E9448}"/>
+              </a:ext>
+            </a:extLst>
+          </p:cNvPr>
+          <p:cNvGraphicFramePr/>
+          <p:nvPr>
+            <p:extLst>
+              <p:ext uri="{D42A27DB-BD31-4B8C-83A1-F6EECF244321}">
+                <p14:modId xmlns:p14="http://schemas.microsoft.com/office/powerpoint/2010/main" val="1674765686"/>
+              </p:ext>
+            </p:extLst>
+          </p:nvPr>
+        </p:nvGraphicFramePr>
+        <p:xfrm>
+          <a:off x="7565259" y="3867680"/>
+          <a:ext cx="3788541" cy="2309283"/>
+        </p:xfrm>
+        <a:graphic>
+          <a:graphicData uri="http://schemas.openxmlformats.org/drawingml/2006/diagram">
+            <dgm:relIds xmlns:dgm="http://schemas.openxmlformats.org/drawingml/2006/diagram" xmlns:r="http://schemas.openxmlformats.org/officeDocument/2006/relationships" r:dm="rId2" r:lo="rId3" r:qs="rId4" r:cs="rId5"/>
+          </a:graphicData>
+        </a:graphic>
+      </p:graphicFrame>
+      <p:sp>
+        <p:nvSpPr>
+          <p:cNvPr id="7" name="テキスト ボックス 6">
+            <a:extLst>
+              <a:ext uri="{FF2B5EF4-FFF2-40B4-BE49-F238E27FC236}">
+                <a16:creationId xmlns:a16="http://schemas.microsoft.com/office/drawing/2014/main" id="{F7F93B1D-6A7A-291D-2919-F425C05442E3}"/>
+              </a:ext>
+            </a:extLst>
+          </p:cNvPr>
+          <p:cNvSpPr txBox="1"/>
+          <p:nvPr/>
+        </p:nvSpPr>
+        <p:spPr>
+          <a:xfrm>
+            <a:off x="1340726" y="3719692"/>
+            <a:ext cx="4835632" cy="707886"/>
+          </a:xfrm>
+          <a:prstGeom prst="rect">
+            <a:avLst/>
+          </a:prstGeom>
+          <a:noFill/>
+        </p:spPr>
+        <p:txBody>
+          <a:bodyPr wrap="square" rtlCol="0">
+            <a:spAutoFit/>
+          </a:bodyPr>
+          <a:lstStyle/>
+          <a:p>
+            <a:pPr marL="285750" indent="-285750">
+              <a:buFont typeface="Arial" panose="020B0604020202020204" pitchFamily="34" charset="0"/>
+              <a:buChar char="•"/>
+            </a:pPr>
+            <a:r>
+              <a:rPr lang="ja-JP" altLang="en-US" sz="2000" dirty="0"/>
+              <a:t>空欄</a:t>
+            </a:r>
+            <a:r>
+              <a:rPr kumimoji="1" lang="en-US" altLang="ja-JP" sz="2000" dirty="0"/>
+              <a:t>[a] </a:t>
+            </a:r>
+            <a:r>
+              <a:rPr kumimoji="1" lang="ja-JP" altLang="en-US" sz="2000" dirty="0"/>
+              <a:t>のある</a:t>
+            </a:r>
+            <a:r>
+              <a:rPr kumimoji="1" lang="en-US" altLang="ja-JP" sz="2000" dirty="0"/>
+              <a:t>while</a:t>
+            </a:r>
+            <a:r>
+              <a:rPr kumimoji="1" lang="ja-JP" altLang="en-US" sz="2000" dirty="0"/>
+              <a:t>ループは、格納先が決まらない</a:t>
+            </a:r>
+            <a:r>
+              <a:rPr lang="ja-JP" altLang="en-US" sz="2000" dirty="0"/>
+              <a:t>間、</a:t>
+            </a:r>
+            <a:r>
+              <a:rPr kumimoji="1" lang="ja-JP" altLang="en-US" sz="2000" dirty="0"/>
+              <a:t>回し続けるもの</a:t>
+            </a:r>
+            <a:endParaRPr kumimoji="1" lang="en-US" altLang="ja-JP" sz="2000" dirty="0"/>
+          </a:p>
+        </p:txBody>
+      </p:sp>
+      <p:sp>
+        <p:nvSpPr>
+          <p:cNvPr id="8" name="吹き出し: 角を丸めた四角形 7">
+            <a:extLst>
+              <a:ext uri="{FF2B5EF4-FFF2-40B4-BE49-F238E27FC236}">
+                <a16:creationId xmlns:a16="http://schemas.microsoft.com/office/drawing/2014/main" id="{3B85456E-7E55-963C-0602-BC8138A09206}"/>
+              </a:ext>
+            </a:extLst>
+          </p:cNvPr>
+          <p:cNvSpPr/>
+          <p:nvPr/>
+        </p:nvSpPr>
+        <p:spPr>
+          <a:xfrm>
+            <a:off x="2477192" y="5413019"/>
+            <a:ext cx="4940237" cy="1004099"/>
+          </a:xfrm>
+          <a:prstGeom prst="wedgeRoundRectCallout">
+            <a:avLst>
+              <a:gd name="adj1" fmla="val 70817"/>
+              <a:gd name="adj2" fmla="val -32706"/>
+              <a:gd name="adj3" fmla="val 16667"/>
+            </a:avLst>
+          </a:prstGeom>
+          <a:noFill/>
+          <a:ln>
+            <a:prstDash val="sysDot"/>
+          </a:ln>
+        </p:spPr>
+        <p:style>
+          <a:lnRef idx="2">
+            <a:schemeClr val="accent1">
+              <a:shade val="15000"/>
+            </a:schemeClr>
+          </a:lnRef>
+          <a:fillRef idx="1">
+            <a:schemeClr val="accent1"/>
+          </a:fillRef>
+          <a:effectRef idx="0">
+            <a:schemeClr val="accent1"/>
+          </a:effectRef>
+          <a:fontRef idx="minor">
+            <a:schemeClr val="lt1"/>
+          </a:fontRef>
+        </p:style>
+        <p:txBody>
+          <a:bodyPr rtlCol="0" anchor="ctr"/>
+          <a:lstStyle/>
+          <a:p>
+            <a:r>
+              <a:rPr lang="ja-JP" altLang="en-US" dirty="0">
+                <a:solidFill>
+                  <a:srgbClr val="FF0000"/>
+                </a:solidFill>
+              </a:rPr>
+              <a:t>ハッシュ値の箱が空きでなければ、順次、</a:t>
+            </a:r>
+            <a:endParaRPr lang="en-US" altLang="ja-JP" dirty="0">
+              <a:solidFill>
+                <a:srgbClr val="FF0000"/>
+              </a:solidFill>
+            </a:endParaRPr>
+          </a:p>
+          <a:p>
+            <a:r>
+              <a:rPr lang="ja-JP" altLang="en-US" dirty="0">
+                <a:solidFill>
+                  <a:srgbClr val="FF0000"/>
+                </a:solidFill>
+              </a:rPr>
+              <a:t>となりの箱を見て、空いているものを探す</a:t>
+            </a:r>
+            <a:endParaRPr kumimoji="1" lang="ja-JP" altLang="en-US" dirty="0">
+              <a:solidFill>
+                <a:srgbClr val="FF0000"/>
+              </a:solidFill>
+            </a:endParaRPr>
+          </a:p>
+          <a:p>
+            <a:pPr algn="ctr"/>
+            <a:endParaRPr kumimoji="1" lang="ja-JP" altLang="en-US" dirty="0"/>
           </a:p>
         </p:txBody>
       </p:sp>
@@ -4489,9 +9670,12 @@
             </a:r>
             <a:r>
               <a:rPr kumimoji="1" lang="en-US" altLang="ja-JP" dirty="0"/>
-              <a:t>40</a:t>
-            </a:r>
-            <a:endParaRPr kumimoji="1" lang="ja-JP" altLang="en-US" dirty="0"/>
+              <a:t>40: </a:t>
+            </a:r>
+            <a:r>
+              <a:rPr kumimoji="1" lang="ja-JP" altLang="en-US" dirty="0"/>
+              <a:t>降順バブルソート　説明ここから</a:t>
+            </a:r>
           </a:p>
         </p:txBody>
       </p:sp>
@@ -4524,8 +9708,13 @@
             </a:r>
             <a:r>
               <a:rPr kumimoji="1" lang="en-US" altLang="ja-JP" dirty="0"/>
-              <a:t>:</a:t>
-            </a:r>
+              <a:t>: </a:t>
+            </a:r>
+            <a:r>
+              <a:rPr kumimoji="1" lang="ja-JP" altLang="en-US" dirty="0"/>
+              <a:t>降順に並べ替え</a:t>
+            </a:r>
+            <a:endParaRPr kumimoji="1" lang="en-US" altLang="ja-JP" dirty="0"/>
           </a:p>
           <a:p>
             <a:r>
@@ -4538,8 +9727,37 @@
             <a:pPr lvl="1"/>
             <a:r>
               <a:rPr lang="en-US" altLang="ja-JP" dirty="0"/>
-              <a:t>x:</a:t>
-            </a:r>
+              <a:t>i: </a:t>
+            </a:r>
+            <a:r>
+              <a:rPr lang="ja-JP" altLang="en-US" dirty="0"/>
+              <a:t>確定領域</a:t>
+            </a:r>
+            <a:r>
+              <a:rPr lang="en-US" altLang="ja-JP" dirty="0"/>
+              <a:t>, j: </a:t>
+            </a:r>
+            <a:r>
+              <a:rPr lang="ja-JP" altLang="en-US" dirty="0"/>
+              <a:t>未確定領域をスキャンする</a:t>
+            </a:r>
+            <a:r>
+              <a:rPr lang="en-US" altLang="ja-JP" dirty="0"/>
+              <a:t>, </a:t>
+            </a:r>
+            <a:r>
+              <a:rPr lang="en-US" altLang="ja-JP" dirty="0" err="1"/>
+              <a:t>flg</a:t>
+            </a:r>
+            <a:r>
+              <a:rPr lang="en-US" altLang="ja-JP" dirty="0"/>
+              <a:t>: </a:t>
+            </a:r>
+            <a:r>
+              <a:rPr lang="ja-JP" altLang="en-US" dirty="0"/>
+              <a:t>ループを抜けるか？</a:t>
+            </a:r>
+            <a:endParaRPr lang="en-US" altLang="ja-JP" dirty="0"/>
           </a:p>
           <a:p>
             <a:r>
@@ -4551,9 +9769,62 @@
           <a:p>
             <a:pPr lvl="1"/>
             <a:r>
+              <a:rPr lang="ja-JP" altLang="en-US" b="1" dirty="0"/>
+              <a:t>降順</a:t>
+            </a:r>
+            <a:r>
+              <a:rPr lang="ja-JP" altLang="en-US" dirty="0"/>
+              <a:t>なので、</a:t>
+            </a:r>
+            <a:endParaRPr lang="en-US" altLang="ja-JP" dirty="0"/>
+          </a:p>
+          <a:p>
+            <a:pPr lvl="2"/>
+            <a:r>
+              <a:rPr lang="ja-JP" altLang="en-US" dirty="0"/>
+              <a:t>配列の末尾から二つずつ比較する → </a:t>
+            </a:r>
+            <a:r>
               <a:rPr lang="en-US" altLang="ja-JP" dirty="0"/>
-              <a:t>point</a:t>
-            </a:r>
+              <a:t>j </a:t>
+            </a:r>
+            <a:r>
+              <a:rPr lang="ja-JP" altLang="en-US" dirty="0"/>
+              <a:t>を </a:t>
+            </a:r>
+            <a:r>
+              <a:rPr lang="en-US" altLang="ja-JP" dirty="0"/>
+              <a:t>1 </a:t>
+            </a:r>
+            <a:r>
+              <a:rPr lang="ja-JP" altLang="en-US" dirty="0"/>
+              <a:t>ずつ減らす</a:t>
+            </a:r>
+            <a:endParaRPr lang="en-US" altLang="ja-JP" dirty="0"/>
+          </a:p>
+          <a:p>
+            <a:pPr lvl="2"/>
+            <a:r>
+              <a:rPr lang="ja-JP" altLang="en-US" dirty="0"/>
+              <a:t>配列の先頭から順序が確定してゆく→ </a:t>
+            </a:r>
+            <a:r>
+              <a:rPr lang="en-US" altLang="ja-JP" dirty="0" err="1"/>
+              <a:t>i</a:t>
+            </a:r>
+            <a:r>
+              <a:rPr lang="ja-JP" altLang="en-US" dirty="0"/>
+              <a:t> を </a:t>
+            </a:r>
+            <a:r>
+              <a:rPr lang="en-US" altLang="ja-JP" dirty="0"/>
+              <a:t>1 </a:t>
+            </a:r>
+            <a:r>
+              <a:rPr lang="ja-JP" altLang="en-US" dirty="0"/>
+              <a:t>ずつ増やす</a:t>
+            </a:r>
+            <a:endParaRPr lang="en-US" altLang="ja-JP" dirty="0"/>
           </a:p>
           <a:p>
             <a:pPr lvl="1"/>
@@ -4887,4 +10158,319 @@
     </a:ext>
   </a:extLst>
 </a:theme>
+</file>
+
+<file path=ppt/theme/theme2.xml><?xml version="1.0" encoding="utf-8"?>
+<a:theme xmlns:a="http://schemas.openxmlformats.org/drawingml/2006/main" name="Office テーマ">
+  <a:themeElements>
+    <a:clrScheme name="Office">
+      <a:dk1>
+        <a:sysClr val="windowText" lastClr="000000"/>
+      </a:dk1>
+      <a:lt1>
+        <a:sysClr val="window" lastClr="FFFFFF"/>
+      </a:lt1>
+      <a:dk2>
+        <a:srgbClr val="0E2841"/>
+      </a:dk2>
+      <a:lt2>
+        <a:srgbClr val="E8E8E8"/>
+      </a:lt2>
+      <a:accent1>
+        <a:srgbClr val="156082"/>
+      </a:accent1>
+      <a:accent2>
+        <a:srgbClr val="E97132"/>
+      </a:accent2>
+      <a:accent3>
+        <a:srgbClr val="196B24"/>
+      </a:accent3>
+      <a:accent4>
+        <a:srgbClr val="0F9ED5"/>
+      </a:accent4>
+      <a:accent5>
+        <a:srgbClr val="A02B93"/>
+      </a:accent5>
+      <a:accent6>
+        <a:srgbClr val="4EA72E"/>
+      </a:accent6>
+      <a:hlink>
+        <a:srgbClr val="467886"/>
+      </a:hlink>
+      <a:folHlink>
+        <a:srgbClr val="96607D"/>
+      </a:folHlink>
+    </a:clrScheme>
+    <a:fontScheme name="Office">
+      <a:majorFont>
+        <a:latin typeface="游ゴシック Light" panose="02110004020202020204"/>
+        <a:ea typeface=""/>
+        <a:cs typeface=""/>
+        <a:font script="Jpan" typeface="游ゴシック Light"/>
+        <a:font script="Hang" typeface="맑은 고딕"/>
+        <a:font script="Hans" typeface="等线 Light"/>
+        <a:font script="Hant" typeface="新細明體"/>
+        <a:font script="Arab" typeface="Times New Roman"/>
+        <a:font script="Hebr" typeface="Times New Roman"/>
+        <a:font script="Thai" typeface="Angsana New"/>
+        <a:font script="Ethi" typeface="Nyala"/>
+        <a:font script="Beng" typeface="Vrinda"/>
+        <a:font script="Gujr" typeface="Shruti"/>
+        <a:font script="Khmr" typeface="MoolBoran"/>
+        <a:font script="Knda" typeface="Tunga"/>
+        <a:font script="Guru" typeface="Raavi"/>
+        <a:font script="Cans" typeface="Euphemia"/>
+        <a:font script="Cher" typeface="Plantagenet Cherokee"/>
+        <a:font script="Yiii" typeface="Microsoft Yi Baiti"/>
+        <a:font script="Tibt" typeface="Microsoft Himalaya"/>
+        <a:font script="Thaa" typeface="MV Boli"/>
+        <a:font script="Deva" typeface="Mangal"/>
+        <a:font script="Telu" typeface="Gautami"/>
+        <a:font script="Taml" typeface="Latha"/>
+        <a:font script="Syrc" typeface="Estrangelo Edessa"/>
+        <a:font script="Orya" typeface="Kalinga"/>
+        <a:font script="Mlym" typeface="Kartika"/>
+        <a:font script="Laoo" typeface="DokChampa"/>
+        <a:font script="Sinh" typeface="Iskoola Pota"/>
+        <a:font script="Mong" typeface="Mongolian Baiti"/>
+        <a:font script="Viet" typeface="Times New Roman"/>
+        <a:font script="Uigh" typeface="Microsoft Uighur"/>
+        <a:font script="Geor" typeface="Sylfaen"/>
+        <a:font script="Armn" typeface="Arial"/>
+        <a:font script="Bugi" typeface="Leelawadee UI"/>
+        <a:font script="Bopo" typeface="Microsoft JhengHei"/>
+        <a:font script="Java" typeface="Javanese Text"/>
+        <a:font script="Lisu" typeface="Segoe UI"/>
+        <a:font script="Mymr" typeface="Myanmar Text"/>
+        <a:font script="Nkoo" typeface="Ebrima"/>
+        <a:font script="Olck" typeface="Nirmala UI"/>
+        <a:font script="Osma" typeface="Ebrima"/>
+        <a:font script="Phag" typeface="Phagspa"/>
+        <a:font script="Syrn" typeface="Estrangelo Edessa"/>
+        <a:font script="Syrj" typeface="Estrangelo Edessa"/>
+        <a:font script="Syre" typeface="Estrangelo Edessa"/>
+        <a:font script="Sora" typeface="Nirmala UI"/>
+        <a:font script="Tale" typeface="Microsoft Tai Le"/>
+        <a:font script="Talu" typeface="Microsoft New Tai Lue"/>
+        <a:font script="Tfng" typeface="Ebrima"/>
+      </a:majorFont>
+      <a:minorFont>
+        <a:latin typeface="游ゴシック" panose="02110004020202020204"/>
+        <a:ea typeface=""/>
+        <a:cs typeface=""/>
+        <a:font script="Jpan" typeface="游ゴシック"/>
+        <a:font script="Hang" typeface="맑은 고딕"/>
+        <a:font script="Hans" typeface="等线"/>
+        <a:font script="Hant" typeface="新細明體"/>
+        <a:font script="Arab" typeface="Arial"/>
+        <a:font script="Hebr" typeface="Arial"/>
+        <a:font script="Thai" typeface="Cordia New"/>
+        <a:font script="Ethi" typeface="Nyala"/>
+        <a:font script="Beng" typeface="Vrinda"/>
+        <a:font script="Gujr" typeface="Shruti"/>
+        <a:font script="Khmr" typeface="DaunPenh"/>
+        <a:font script="Knda" typeface="Tunga"/>
+        <a:font script="Guru" typeface="Raavi"/>
+        <a:font script="Cans" typeface="Euphemia"/>
+        <a:font script="Cher" typeface="Plantagenet Cherokee"/>
+        <a:font script="Yiii" typeface="Microsoft Yi Baiti"/>
+        <a:font script="Tibt" typeface="Microsoft Himalaya"/>
+        <a:font script="Thaa" typeface="MV Boli"/>
+        <a:font script="Deva" typeface="Mangal"/>
+        <a:font script="Telu" typeface="Gautami"/>
+        <a:font script="Taml" typeface="Latha"/>
+        <a:font script="Syrc" typeface="Estrangelo Edessa"/>
+        <a:font script="Orya" typeface="Kalinga"/>
+        <a:font script="Mlym" typeface="Kartika"/>
+        <a:font script="Laoo" typeface="DokChampa"/>
+        <a:font script="Sinh" typeface="Iskoola Pota"/>
+        <a:font script="Mong" typeface="Mongolian Baiti"/>
+        <a:font script="Viet" typeface="Arial"/>
+        <a:font script="Uigh" typeface="Microsoft Uighur"/>
+        <a:font script="Geor" typeface="Sylfaen"/>
+        <a:font script="Armn" typeface="Arial"/>
+        <a:font script="Bugi" typeface="Leelawadee UI"/>
+        <a:font script="Bopo" typeface="Microsoft JhengHei"/>
+        <a:font script="Java" typeface="Javanese Text"/>
+        <a:font script="Lisu" typeface="Segoe UI"/>
+        <a:font script="Mymr" typeface="Myanmar Text"/>
+        <a:font script="Nkoo" typeface="Ebrima"/>
+        <a:font script="Olck" typeface="Nirmala UI"/>
+        <a:font script="Osma" typeface="Ebrima"/>
+        <a:font script="Phag" typeface="Phagspa"/>
+        <a:font script="Syrn" typeface="Estrangelo Edessa"/>
+        <a:font script="Syrj" typeface="Estrangelo Edessa"/>
+        <a:font script="Syre" typeface="Estrangelo Edessa"/>
+        <a:font script="Sora" typeface="Nirmala UI"/>
+        <a:font script="Tale" typeface="Microsoft Tai Le"/>
+        <a:font script="Talu" typeface="Microsoft New Tai Lue"/>
+        <a:font script="Tfng" typeface="Ebrima"/>
+      </a:minorFont>
+    </a:fontScheme>
+    <a:fmtScheme name="Office">
+      <a:fillStyleLst>
+        <a:solidFill>
+          <a:schemeClr val="phClr"/>
+        </a:solidFill>
+        <a:gradFill rotWithShape="1">
+          <a:gsLst>
+            <a:gs pos="0">
+              <a:schemeClr val="phClr">
+                <a:lumMod val="110000"/>
+                <a:satMod val="105000"/>
+                <a:tint val="67000"/>
+              </a:schemeClr>
+            </a:gs>
+            <a:gs pos="50000">
+              <a:schemeClr val="phClr">
+                <a:lumMod val="105000"/>
+                <a:satMod val="103000"/>
+                <a:tint val="73000"/>
+              </a:schemeClr>
+            </a:gs>
+            <a:gs pos="100000">
+              <a:schemeClr val="phClr">
+                <a:lumMod val="105000"/>
+                <a:satMod val="109000"/>
+                <a:tint val="81000"/>
+              </a:schemeClr>
+            </a:gs>
+          </a:gsLst>
+          <a:lin ang="5400000" scaled="0"/>
+        </a:gradFill>
+        <a:gradFill rotWithShape="1">
+          <a:gsLst>
+            <a:gs pos="0">
+              <a:schemeClr val="phClr">
+                <a:satMod val="103000"/>
+                <a:lumMod val="102000"/>
+                <a:tint val="94000"/>
+              </a:schemeClr>
+            </a:gs>
+            <a:gs pos="50000">
+              <a:schemeClr val="phClr">
+                <a:satMod val="110000"/>
+                <a:lumMod val="100000"/>
+                <a:shade val="100000"/>
+              </a:schemeClr>
+            </a:gs>
+            <a:gs pos="100000">
+              <a:schemeClr val="phClr">
+                <a:lumMod val="99000"/>
+                <a:satMod val="120000"/>
+                <a:shade val="78000"/>
+              </a:schemeClr>
+            </a:gs>
+          </a:gsLst>
+          <a:lin ang="5400000" scaled="0"/>
+        </a:gradFill>
+      </a:fillStyleLst>
+      <a:lnStyleLst>
+        <a:ln w="12700" cap="flat" cmpd="sng" algn="ctr">
+          <a:solidFill>
+            <a:schemeClr val="phClr"/>
+          </a:solidFill>
+          <a:prstDash val="solid"/>
+          <a:miter lim="800000"/>
+        </a:ln>
+        <a:ln w="19050" cap="flat" cmpd="sng" algn="ctr">
+          <a:solidFill>
+            <a:schemeClr val="phClr"/>
+          </a:solidFill>
+          <a:prstDash val="solid"/>
+          <a:miter lim="800000"/>
+        </a:ln>
+        <a:ln w="25400" cap="flat" cmpd="sng" algn="ctr">
+          <a:solidFill>
+            <a:schemeClr val="phClr"/>
+          </a:solidFill>
+          <a:prstDash val="solid"/>
+          <a:miter lim="800000"/>
+        </a:ln>
+      </a:lnStyleLst>
+      <a:effectStyleLst>
+        <a:effectStyle>
+          <a:effectLst/>
+        </a:effectStyle>
+        <a:effectStyle>
+          <a:effectLst/>
+        </a:effectStyle>
+        <a:effectStyle>
+          <a:effectLst>
+            <a:outerShdw blurRad="57150" dist="19050" dir="5400000" algn="ctr" rotWithShape="0">
+              <a:srgbClr val="000000">
+                <a:alpha val="63000"/>
+              </a:srgbClr>
+            </a:outerShdw>
+          </a:effectLst>
+        </a:effectStyle>
+      </a:effectStyleLst>
+      <a:bgFillStyleLst>
+        <a:solidFill>
+          <a:schemeClr val="phClr"/>
+        </a:solidFill>
+        <a:solidFill>
+          <a:schemeClr val="phClr">
+            <a:tint val="95000"/>
+            <a:satMod val="170000"/>
+          </a:schemeClr>
+        </a:solidFill>
+        <a:gradFill rotWithShape="1">
+          <a:gsLst>
+            <a:gs pos="0">
+              <a:schemeClr val="phClr">
+                <a:tint val="93000"/>
+                <a:satMod val="150000"/>
+                <a:shade val="98000"/>
+                <a:lumMod val="102000"/>
+              </a:schemeClr>
+            </a:gs>
+            <a:gs pos="50000">
+              <a:schemeClr val="phClr">
+                <a:tint val="98000"/>
+                <a:satMod val="130000"/>
+                <a:shade val="90000"/>
+                <a:lumMod val="103000"/>
+              </a:schemeClr>
+            </a:gs>
+            <a:gs pos="100000">
+              <a:schemeClr val="phClr">
+                <a:shade val="63000"/>
+                <a:satMod val="120000"/>
+              </a:schemeClr>
+            </a:gs>
+          </a:gsLst>
+          <a:lin ang="5400000" scaled="0"/>
+        </a:gradFill>
+      </a:bgFillStyleLst>
+    </a:fmtScheme>
+  </a:themeElements>
+  <a:objectDefaults>
+    <a:lnDef>
+      <a:spPr/>
+      <a:bodyPr/>
+      <a:lstStyle/>
+      <a:style>
+        <a:lnRef idx="2">
+          <a:schemeClr val="accent1"/>
+        </a:lnRef>
+        <a:fillRef idx="0">
+          <a:schemeClr val="accent1"/>
+        </a:fillRef>
+        <a:effectRef idx="1">
+          <a:schemeClr val="accent1"/>
+        </a:effectRef>
+        <a:fontRef idx="minor">
+          <a:schemeClr val="tx1"/>
+        </a:fontRef>
+      </a:style>
+    </a:lnDef>
+  </a:objectDefaults>
+  <a:extraClrSchemeLst/>
+  <a:extLst>
+    <a:ext uri="{05A4C25C-085E-4340-85A3-A5531E510DB2}">
+      <thm15:themeFamily xmlns:thm15="http://schemas.microsoft.com/office/thememl/2012/main" name="Office Theme" id="{2E142A2C-CD16-42D6-873A-C26D2A0506FA}" vid="{1BDDFF52-6CD6-40A5-AB3C-68EB2F1E4D0A}"/>
+    </a:ext>
+  </a:extLst>
+</a:theme>
 </file>